--- a/results_minsup_ESBL/minsup_0_001/rep10/plots_reseaux/graph_2022_BLSE_0.95.pptx
+++ b/results_minsup_ESBL/minsup_0_001/rep10/plots_reseaux/graph_2022_BLSE_0.95.pptx
@@ -8717,46 +8717,6 @@
           </p:nvSpPr>
           <p:spPr>
             <a:xfrm>
-              <a:off x="6443240" y="2460097"/>
-              <a:ext cx="265227" cy="2200385"/>
-            </a:xfrm>
-            <a:custGeom>
-              <a:avLst/>
-              <a:pathLst>
-                <a:path w="265227" h="2200385">
-                  <a:moveTo>
-                    <a:pt x="265227" y="0"/>
-                  </a:moveTo>
-                  <a:lnTo>
-                    <a:pt x="0" y="2200385"/>
-                  </a:lnTo>
-                </a:path>
-              </a:pathLst>
-            </a:custGeom>
-            <a:ln w="9525" cap="rnd">
-              <a:solidFill>
-                <a:srgbClr val="A72829">
-                  <a:alpha val="100000"/>
-                </a:srgbClr>
-              </a:solidFill>
-              <a:prstDash val="solid"/>
-              <a:round/>
-            </a:ln>
-          </p:spPr>
-          <p:txBody>
-            <a:bodyPr/>
-            <a:lstStyle/>
-            <a:p/>
-          </p:txBody>
-        </p:sp>
-        <p:sp>
-          <p:nvSpPr>
-            <p:cNvPr id="166" name="pl166"/>
-            <p:cNvSpPr/>
-            <p:nvPr/>
-          </p:nvSpPr>
-          <p:spPr>
-            <a:xfrm>
               <a:off x="5669981" y="1349502"/>
               <a:ext cx="933767" cy="833321"/>
             </a:xfrm>
@@ -8791,7 +8751,7 @@
         </p:sp>
         <p:sp>
           <p:nvSpPr>
-            <p:cNvPr id="167" name="pl167"/>
+            <p:cNvPr id="166" name="pl166"/>
             <p:cNvSpPr/>
             <p:nvPr/>
           </p:nvSpPr>
@@ -8831,7 +8791,7 @@
         </p:sp>
         <p:sp>
           <p:nvSpPr>
-            <p:cNvPr id="168" name="pl168"/>
+            <p:cNvPr id="167" name="pl167"/>
             <p:cNvSpPr/>
             <p:nvPr/>
           </p:nvSpPr>
@@ -8871,7 +8831,7 @@
         </p:sp>
         <p:sp>
           <p:nvSpPr>
-            <p:cNvPr id="169" name="pl169"/>
+            <p:cNvPr id="168" name="pl168"/>
             <p:cNvSpPr/>
             <p:nvPr/>
           </p:nvSpPr>
@@ -8911,7 +8871,7 @@
         </p:sp>
         <p:sp>
           <p:nvSpPr>
-            <p:cNvPr id="170" name="pl170"/>
+            <p:cNvPr id="169" name="pl169"/>
             <p:cNvSpPr/>
             <p:nvPr/>
           </p:nvSpPr>
@@ -8951,7 +8911,7 @@
         </p:sp>
         <p:sp>
           <p:nvSpPr>
-            <p:cNvPr id="171" name="pl171"/>
+            <p:cNvPr id="170" name="pl170"/>
             <p:cNvSpPr/>
             <p:nvPr/>
           </p:nvSpPr>
@@ -8991,7 +8951,7 @@
         </p:sp>
         <p:sp>
           <p:nvSpPr>
-            <p:cNvPr id="172" name="pl172"/>
+            <p:cNvPr id="171" name="pl171"/>
             <p:cNvSpPr/>
             <p:nvPr/>
           </p:nvSpPr>
@@ -9031,7 +8991,7 @@
         </p:sp>
         <p:sp>
           <p:nvSpPr>
-            <p:cNvPr id="173" name="pl173"/>
+            <p:cNvPr id="172" name="pl172"/>
             <p:cNvSpPr/>
             <p:nvPr/>
           </p:nvSpPr>
@@ -9071,7 +9031,7 @@
         </p:sp>
         <p:sp>
           <p:nvSpPr>
-            <p:cNvPr id="174" name="pg174"/>
+            <p:cNvPr id="173" name="pg173"/>
             <p:cNvSpPr/>
             <p:nvPr/>
           </p:nvSpPr>
@@ -9138,7 +9098,7 @@
         </p:sp>
         <p:sp>
           <p:nvSpPr>
-            <p:cNvPr id="175" name="pg175"/>
+            <p:cNvPr id="174" name="pg174"/>
             <p:cNvSpPr/>
             <p:nvPr/>
           </p:nvSpPr>
@@ -9184,7 +9144,7 @@
         </p:sp>
         <p:sp>
           <p:nvSpPr>
-            <p:cNvPr id="176" name="pg176"/>
+            <p:cNvPr id="175" name="pg175"/>
             <p:cNvSpPr/>
             <p:nvPr/>
           </p:nvSpPr>
@@ -9230,7 +9190,7 @@
         </p:sp>
         <p:sp>
           <p:nvSpPr>
-            <p:cNvPr id="177" name="pg177"/>
+            <p:cNvPr id="176" name="pg176"/>
             <p:cNvSpPr/>
             <p:nvPr/>
           </p:nvSpPr>
@@ -9276,7 +9236,7 @@
         </p:sp>
         <p:sp>
           <p:nvSpPr>
-            <p:cNvPr id="178" name="pg178"/>
+            <p:cNvPr id="177" name="pg177"/>
             <p:cNvSpPr/>
             <p:nvPr/>
           </p:nvSpPr>
@@ -9322,7 +9282,7 @@
         </p:sp>
         <p:sp>
           <p:nvSpPr>
-            <p:cNvPr id="179" name="pg179"/>
+            <p:cNvPr id="178" name="pg178"/>
             <p:cNvSpPr/>
             <p:nvPr/>
           </p:nvSpPr>
@@ -9368,7 +9328,7 @@
         </p:sp>
         <p:sp>
           <p:nvSpPr>
-            <p:cNvPr id="180" name="pg180"/>
+            <p:cNvPr id="179" name="pg179"/>
             <p:cNvSpPr/>
             <p:nvPr/>
           </p:nvSpPr>
@@ -9414,7 +9374,7 @@
         </p:sp>
         <p:sp>
           <p:nvSpPr>
-            <p:cNvPr id="181" name="pg181"/>
+            <p:cNvPr id="180" name="pg180"/>
             <p:cNvSpPr/>
             <p:nvPr/>
           </p:nvSpPr>
@@ -9460,7 +9420,7 @@
         </p:sp>
         <p:sp>
           <p:nvSpPr>
-            <p:cNvPr id="182" name="pg182"/>
+            <p:cNvPr id="181" name="pg181"/>
             <p:cNvSpPr/>
             <p:nvPr/>
           </p:nvSpPr>
@@ -9506,7 +9466,7 @@
         </p:sp>
         <p:sp>
           <p:nvSpPr>
-            <p:cNvPr id="183" name="pg183"/>
+            <p:cNvPr id="182" name="pg182"/>
             <p:cNvSpPr/>
             <p:nvPr/>
           </p:nvSpPr>
@@ -9552,7 +9512,7 @@
         </p:sp>
         <p:sp>
           <p:nvSpPr>
-            <p:cNvPr id="184" name="pg184"/>
+            <p:cNvPr id="183" name="pg183"/>
             <p:cNvSpPr/>
             <p:nvPr/>
           </p:nvSpPr>
@@ -9598,7 +9558,7 @@
         </p:sp>
         <p:sp>
           <p:nvSpPr>
-            <p:cNvPr id="185" name="pg185"/>
+            <p:cNvPr id="184" name="pg184"/>
             <p:cNvSpPr/>
             <p:nvPr/>
           </p:nvSpPr>
@@ -9644,7 +9604,7 @@
         </p:sp>
         <p:sp>
           <p:nvSpPr>
-            <p:cNvPr id="186" name="pg186"/>
+            <p:cNvPr id="185" name="pg185"/>
             <p:cNvSpPr/>
             <p:nvPr/>
           </p:nvSpPr>
@@ -9690,7 +9650,7 @@
         </p:sp>
         <p:sp>
           <p:nvSpPr>
-            <p:cNvPr id="187" name="pg187"/>
+            <p:cNvPr id="186" name="pg186"/>
             <p:cNvSpPr/>
             <p:nvPr/>
           </p:nvSpPr>
@@ -9736,7 +9696,7 @@
         </p:sp>
         <p:sp>
           <p:nvSpPr>
-            <p:cNvPr id="188" name="pg188"/>
+            <p:cNvPr id="187" name="pg187"/>
             <p:cNvSpPr/>
             <p:nvPr/>
           </p:nvSpPr>
@@ -9782,7 +9742,7 @@
         </p:sp>
         <p:sp>
           <p:nvSpPr>
-            <p:cNvPr id="189" name="pg189"/>
+            <p:cNvPr id="188" name="pg188"/>
             <p:cNvSpPr/>
             <p:nvPr/>
           </p:nvSpPr>
@@ -9828,7 +9788,7 @@
         </p:sp>
         <p:sp>
           <p:nvSpPr>
-            <p:cNvPr id="190" name="pg190"/>
+            <p:cNvPr id="189" name="pg189"/>
             <p:cNvSpPr/>
             <p:nvPr/>
           </p:nvSpPr>
@@ -9874,7 +9834,7 @@
         </p:sp>
         <p:sp>
           <p:nvSpPr>
-            <p:cNvPr id="191" name="pg191"/>
+            <p:cNvPr id="190" name="pg190"/>
             <p:cNvSpPr/>
             <p:nvPr/>
           </p:nvSpPr>
@@ -9920,7 +9880,7 @@
         </p:sp>
         <p:sp>
           <p:nvSpPr>
-            <p:cNvPr id="192" name="pg192"/>
+            <p:cNvPr id="191" name="pg191"/>
             <p:cNvSpPr/>
             <p:nvPr/>
           </p:nvSpPr>
@@ -9966,7 +9926,7 @@
         </p:sp>
         <p:sp>
           <p:nvSpPr>
-            <p:cNvPr id="193" name="pg193"/>
+            <p:cNvPr id="192" name="pg192"/>
             <p:cNvSpPr/>
             <p:nvPr/>
           </p:nvSpPr>
@@ -10012,7 +9972,7 @@
         </p:sp>
         <p:sp>
           <p:nvSpPr>
-            <p:cNvPr id="194" name="pg194"/>
+            <p:cNvPr id="193" name="pg193"/>
             <p:cNvSpPr/>
             <p:nvPr/>
           </p:nvSpPr>
@@ -10058,7 +10018,7 @@
         </p:sp>
         <p:sp>
           <p:nvSpPr>
-            <p:cNvPr id="195" name="pg195"/>
+            <p:cNvPr id="194" name="pg194"/>
             <p:cNvSpPr/>
             <p:nvPr/>
           </p:nvSpPr>
@@ -10104,7 +10064,7 @@
         </p:sp>
         <p:sp>
           <p:nvSpPr>
-            <p:cNvPr id="196" name="pg196"/>
+            <p:cNvPr id="195" name="pg195"/>
             <p:cNvSpPr/>
             <p:nvPr/>
           </p:nvSpPr>
@@ -10150,7 +10110,7 @@
         </p:sp>
         <p:sp>
           <p:nvSpPr>
-            <p:cNvPr id="197" name="pg197"/>
+            <p:cNvPr id="196" name="pg196"/>
             <p:cNvSpPr/>
             <p:nvPr/>
           </p:nvSpPr>
@@ -10196,7 +10156,7 @@
         </p:sp>
         <p:sp>
           <p:nvSpPr>
-            <p:cNvPr id="198" name="pg198"/>
+            <p:cNvPr id="197" name="pg197"/>
             <p:cNvSpPr/>
             <p:nvPr/>
           </p:nvSpPr>
@@ -10242,7 +10202,7 @@
         </p:sp>
         <p:sp>
           <p:nvSpPr>
-            <p:cNvPr id="199" name="pg199"/>
+            <p:cNvPr id="198" name="pg198"/>
             <p:cNvSpPr/>
             <p:nvPr/>
           </p:nvSpPr>
@@ -10288,7 +10248,7 @@
         </p:sp>
         <p:sp>
           <p:nvSpPr>
-            <p:cNvPr id="200" name="pg200"/>
+            <p:cNvPr id="199" name="pg199"/>
             <p:cNvSpPr/>
             <p:nvPr/>
           </p:nvSpPr>
@@ -10901,7 +10861,7 @@
         </p:sp>
         <p:sp>
           <p:nvSpPr>
-            <p:cNvPr id="201" name="pg201"/>
+            <p:cNvPr id="200" name="pg200"/>
             <p:cNvSpPr/>
             <p:nvPr/>
           </p:nvSpPr>
@@ -10950,7 +10910,7 @@
         </p:sp>
         <p:sp>
           <p:nvSpPr>
-            <p:cNvPr id="202" name="pg202"/>
+            <p:cNvPr id="201" name="pg201"/>
             <p:cNvSpPr/>
             <p:nvPr/>
           </p:nvSpPr>
@@ -10996,7 +10956,7 @@
         </p:sp>
         <p:sp>
           <p:nvSpPr>
-            <p:cNvPr id="203" name="pg203"/>
+            <p:cNvPr id="202" name="pg202"/>
             <p:cNvSpPr/>
             <p:nvPr/>
           </p:nvSpPr>
@@ -11177,7 +11137,7 @@
         </p:sp>
         <p:sp>
           <p:nvSpPr>
-            <p:cNvPr id="204" name="pg204"/>
+            <p:cNvPr id="203" name="pg203"/>
             <p:cNvSpPr/>
             <p:nvPr/>
           </p:nvSpPr>
@@ -11223,7 +11183,7 @@
         </p:sp>
         <p:sp>
           <p:nvSpPr>
-            <p:cNvPr id="205" name="pg205"/>
+            <p:cNvPr id="204" name="pg204"/>
             <p:cNvSpPr/>
             <p:nvPr/>
           </p:nvSpPr>
@@ -11269,7 +11229,7 @@
         </p:sp>
         <p:sp>
           <p:nvSpPr>
-            <p:cNvPr id="206" name="pg206"/>
+            <p:cNvPr id="205" name="pg205"/>
             <p:cNvSpPr/>
             <p:nvPr/>
           </p:nvSpPr>
@@ -11315,7 +11275,7 @@
         </p:sp>
         <p:sp>
           <p:nvSpPr>
-            <p:cNvPr id="207" name="pg207"/>
+            <p:cNvPr id="206" name="pg206"/>
             <p:cNvSpPr/>
             <p:nvPr/>
           </p:nvSpPr>
@@ -11361,7 +11321,7 @@
         </p:sp>
         <p:sp>
           <p:nvSpPr>
-            <p:cNvPr id="208" name="pg208"/>
+            <p:cNvPr id="207" name="pg207"/>
             <p:cNvSpPr/>
             <p:nvPr/>
           </p:nvSpPr>
@@ -11407,7 +11367,7 @@
         </p:sp>
         <p:sp>
           <p:nvSpPr>
-            <p:cNvPr id="209" name="pg209"/>
+            <p:cNvPr id="208" name="pg208"/>
             <p:cNvSpPr/>
             <p:nvPr/>
           </p:nvSpPr>
@@ -11453,7 +11413,7 @@
         </p:sp>
         <p:sp>
           <p:nvSpPr>
-            <p:cNvPr id="210" name="pg210"/>
+            <p:cNvPr id="209" name="pg209"/>
             <p:cNvSpPr/>
             <p:nvPr/>
           </p:nvSpPr>
@@ -11499,7 +11459,7 @@
         </p:sp>
         <p:sp>
           <p:nvSpPr>
-            <p:cNvPr id="211" name="pg211"/>
+            <p:cNvPr id="210" name="pg210"/>
             <p:cNvSpPr/>
             <p:nvPr/>
           </p:nvSpPr>
@@ -11545,7 +11505,7 @@
         </p:sp>
         <p:sp>
           <p:nvSpPr>
-            <p:cNvPr id="212" name="pg212"/>
+            <p:cNvPr id="211" name="pg211"/>
             <p:cNvSpPr/>
             <p:nvPr/>
           </p:nvSpPr>
@@ -11591,7 +11551,7 @@
         </p:sp>
         <p:sp>
           <p:nvSpPr>
-            <p:cNvPr id="213" name="pg213"/>
+            <p:cNvPr id="212" name="pg212"/>
             <p:cNvSpPr/>
             <p:nvPr/>
           </p:nvSpPr>
@@ -11637,7 +11597,7 @@
         </p:sp>
         <p:sp>
           <p:nvSpPr>
-            <p:cNvPr id="214" name="pg214"/>
+            <p:cNvPr id="213" name="pg213"/>
             <p:cNvSpPr/>
             <p:nvPr/>
           </p:nvSpPr>
@@ -11683,7 +11643,7 @@
         </p:sp>
         <p:sp>
           <p:nvSpPr>
-            <p:cNvPr id="215" name="pg215"/>
+            <p:cNvPr id="214" name="pg214"/>
             <p:cNvSpPr/>
             <p:nvPr/>
           </p:nvSpPr>
@@ -11729,7 +11689,7 @@
         </p:sp>
         <p:sp>
           <p:nvSpPr>
-            <p:cNvPr id="216" name="pg216"/>
+            <p:cNvPr id="215" name="pg215"/>
             <p:cNvSpPr/>
             <p:nvPr/>
           </p:nvSpPr>
@@ -11775,7 +11735,7 @@
         </p:sp>
         <p:sp>
           <p:nvSpPr>
-            <p:cNvPr id="217" name="pg217"/>
+            <p:cNvPr id="216" name="pg216"/>
             <p:cNvSpPr/>
             <p:nvPr/>
           </p:nvSpPr>
@@ -11821,7 +11781,7 @@
         </p:sp>
         <p:sp>
           <p:nvSpPr>
-            <p:cNvPr id="218" name="pg218"/>
+            <p:cNvPr id="217" name="pg217"/>
             <p:cNvSpPr/>
             <p:nvPr/>
           </p:nvSpPr>
@@ -11867,7 +11827,7 @@
         </p:sp>
         <p:sp>
           <p:nvSpPr>
-            <p:cNvPr id="219" name="pg219"/>
+            <p:cNvPr id="218" name="pg218"/>
             <p:cNvSpPr/>
             <p:nvPr/>
           </p:nvSpPr>
@@ -11913,7 +11873,7 @@
         </p:sp>
         <p:sp>
           <p:nvSpPr>
-            <p:cNvPr id="220" name="pg220"/>
+            <p:cNvPr id="219" name="pg219"/>
             <p:cNvSpPr/>
             <p:nvPr/>
           </p:nvSpPr>
@@ -11959,7 +11919,7 @@
         </p:sp>
         <p:sp>
           <p:nvSpPr>
-            <p:cNvPr id="221" name="pg221"/>
+            <p:cNvPr id="220" name="pg220"/>
             <p:cNvSpPr/>
             <p:nvPr/>
           </p:nvSpPr>
@@ -12005,7 +11965,7 @@
         </p:sp>
         <p:sp>
           <p:nvSpPr>
-            <p:cNvPr id="222" name="pg222"/>
+            <p:cNvPr id="221" name="pg221"/>
             <p:cNvSpPr/>
             <p:nvPr/>
           </p:nvSpPr>
@@ -12051,7 +12011,7 @@
         </p:sp>
         <p:sp>
           <p:nvSpPr>
-            <p:cNvPr id="223" name="pg223"/>
+            <p:cNvPr id="222" name="pg222"/>
             <p:cNvSpPr/>
             <p:nvPr/>
           </p:nvSpPr>
@@ -12097,7 +12057,7 @@
         </p:sp>
         <p:sp>
           <p:nvSpPr>
-            <p:cNvPr id="224" name="pg224"/>
+            <p:cNvPr id="223" name="pg223"/>
             <p:cNvSpPr/>
             <p:nvPr/>
           </p:nvSpPr>
@@ -12143,7 +12103,7 @@
         </p:sp>
         <p:sp>
           <p:nvSpPr>
-            <p:cNvPr id="225" name="pg225"/>
+            <p:cNvPr id="224" name="pg224"/>
             <p:cNvSpPr/>
             <p:nvPr/>
           </p:nvSpPr>
@@ -12189,7 +12149,7 @@
         </p:sp>
         <p:sp>
           <p:nvSpPr>
-            <p:cNvPr id="226" name="pg226"/>
+            <p:cNvPr id="225" name="pg225"/>
             <p:cNvSpPr/>
             <p:nvPr/>
           </p:nvSpPr>
@@ -12235,7 +12195,7 @@
         </p:sp>
         <p:sp>
           <p:nvSpPr>
-            <p:cNvPr id="227" name="pg227"/>
+            <p:cNvPr id="226" name="pg226"/>
             <p:cNvSpPr/>
             <p:nvPr/>
           </p:nvSpPr>
@@ -12281,7 +12241,7 @@
         </p:sp>
         <p:sp>
           <p:nvSpPr>
-            <p:cNvPr id="228" name="pg228"/>
+            <p:cNvPr id="227" name="pg227"/>
             <p:cNvSpPr/>
             <p:nvPr/>
           </p:nvSpPr>
@@ -12750,7 +12710,7 @@
         </p:sp>
         <p:sp>
           <p:nvSpPr>
-            <p:cNvPr id="229" name="pg229"/>
+            <p:cNvPr id="228" name="pg228"/>
             <p:cNvSpPr/>
             <p:nvPr/>
           </p:nvSpPr>
@@ -12823,7 +12783,7 @@
         </p:sp>
         <p:sp>
           <p:nvSpPr>
-            <p:cNvPr id="230" name="pg230"/>
+            <p:cNvPr id="229" name="pg229"/>
             <p:cNvSpPr/>
             <p:nvPr/>
           </p:nvSpPr>
@@ -12869,7 +12829,7 @@
         </p:sp>
         <p:sp>
           <p:nvSpPr>
-            <p:cNvPr id="231" name="pg231"/>
+            <p:cNvPr id="230" name="pg230"/>
             <p:cNvSpPr/>
             <p:nvPr/>
           </p:nvSpPr>
@@ -12915,7 +12875,7 @@
         </p:sp>
         <p:sp>
           <p:nvSpPr>
-            <p:cNvPr id="232" name="pg232"/>
+            <p:cNvPr id="231" name="pg231"/>
             <p:cNvSpPr/>
             <p:nvPr/>
           </p:nvSpPr>
@@ -12994,7 +12954,7 @@
         </p:sp>
         <p:sp>
           <p:nvSpPr>
-            <p:cNvPr id="233" name="pg233"/>
+            <p:cNvPr id="232" name="pg232"/>
             <p:cNvSpPr/>
             <p:nvPr/>
           </p:nvSpPr>
@@ -13040,7 +13000,7 @@
         </p:sp>
         <p:sp>
           <p:nvSpPr>
-            <p:cNvPr id="234" name="pg234"/>
+            <p:cNvPr id="233" name="pg233"/>
             <p:cNvSpPr/>
             <p:nvPr/>
           </p:nvSpPr>
@@ -13086,7 +13046,7 @@
         </p:sp>
         <p:sp>
           <p:nvSpPr>
-            <p:cNvPr id="235" name="pg235"/>
+            <p:cNvPr id="234" name="pg234"/>
             <p:cNvSpPr/>
             <p:nvPr/>
           </p:nvSpPr>
@@ -13132,7 +13092,7 @@
         </p:sp>
         <p:sp>
           <p:nvSpPr>
-            <p:cNvPr id="236" name="pg236"/>
+            <p:cNvPr id="235" name="pg235"/>
             <p:cNvSpPr/>
             <p:nvPr/>
           </p:nvSpPr>
@@ -13178,7 +13138,7 @@
         </p:sp>
         <p:sp>
           <p:nvSpPr>
-            <p:cNvPr id="237" name="pg237"/>
+            <p:cNvPr id="236" name="pg236"/>
             <p:cNvSpPr/>
             <p:nvPr/>
           </p:nvSpPr>
@@ -13224,7 +13184,7 @@
         </p:sp>
         <p:sp>
           <p:nvSpPr>
-            <p:cNvPr id="238" name="pg238"/>
+            <p:cNvPr id="237" name="pg237"/>
             <p:cNvSpPr/>
             <p:nvPr/>
           </p:nvSpPr>
@@ -13270,7 +13230,7 @@
         </p:sp>
         <p:sp>
           <p:nvSpPr>
-            <p:cNvPr id="239" name="pg239"/>
+            <p:cNvPr id="238" name="pg238"/>
             <p:cNvSpPr/>
             <p:nvPr/>
           </p:nvSpPr>
@@ -13316,7 +13276,7 @@
         </p:sp>
         <p:sp>
           <p:nvSpPr>
-            <p:cNvPr id="240" name="pg240"/>
+            <p:cNvPr id="239" name="pg239"/>
             <p:cNvSpPr/>
             <p:nvPr/>
           </p:nvSpPr>
@@ -13362,7 +13322,7 @@
         </p:sp>
         <p:sp>
           <p:nvSpPr>
-            <p:cNvPr id="241" name="pg241"/>
+            <p:cNvPr id="240" name="pg240"/>
             <p:cNvSpPr/>
             <p:nvPr/>
           </p:nvSpPr>
@@ -13408,7 +13368,7 @@
         </p:sp>
         <p:sp>
           <p:nvSpPr>
-            <p:cNvPr id="242" name="pg242"/>
+            <p:cNvPr id="241" name="pg241"/>
             <p:cNvSpPr/>
             <p:nvPr/>
           </p:nvSpPr>
@@ -13454,7 +13414,7 @@
         </p:sp>
         <p:sp>
           <p:nvSpPr>
-            <p:cNvPr id="243" name="pg243"/>
+            <p:cNvPr id="242" name="pg242"/>
             <p:cNvSpPr/>
             <p:nvPr/>
           </p:nvSpPr>
@@ -13500,7 +13460,7 @@
         </p:sp>
         <p:sp>
           <p:nvSpPr>
-            <p:cNvPr id="244" name="pg244"/>
+            <p:cNvPr id="243" name="pg243"/>
             <p:cNvSpPr/>
             <p:nvPr/>
           </p:nvSpPr>
@@ -13546,7 +13506,7 @@
         </p:sp>
         <p:sp>
           <p:nvSpPr>
-            <p:cNvPr id="245" name="pg245"/>
+            <p:cNvPr id="244" name="pg244"/>
             <p:cNvSpPr/>
             <p:nvPr/>
           </p:nvSpPr>
@@ -13592,7 +13552,7 @@
         </p:sp>
         <p:sp>
           <p:nvSpPr>
-            <p:cNvPr id="246" name="pg246"/>
+            <p:cNvPr id="245" name="pg245"/>
             <p:cNvSpPr/>
             <p:nvPr/>
           </p:nvSpPr>
@@ -13638,7 +13598,7 @@
         </p:sp>
         <p:sp>
           <p:nvSpPr>
-            <p:cNvPr id="247" name="pg247"/>
+            <p:cNvPr id="246" name="pg246"/>
             <p:cNvSpPr/>
             <p:nvPr/>
           </p:nvSpPr>
@@ -13684,7 +13644,7 @@
         </p:sp>
         <p:sp>
           <p:nvSpPr>
-            <p:cNvPr id="248" name="pg248"/>
+            <p:cNvPr id="247" name="pg247"/>
             <p:cNvSpPr/>
             <p:nvPr/>
           </p:nvSpPr>
@@ -13730,7 +13690,7 @@
         </p:sp>
         <p:sp>
           <p:nvSpPr>
-            <p:cNvPr id="249" name="pg249"/>
+            <p:cNvPr id="248" name="pg248"/>
             <p:cNvSpPr/>
             <p:nvPr/>
           </p:nvSpPr>
@@ -13776,7 +13736,7 @@
         </p:sp>
         <p:sp>
           <p:nvSpPr>
-            <p:cNvPr id="250" name="pg250"/>
+            <p:cNvPr id="249" name="pg249"/>
             <p:cNvSpPr/>
             <p:nvPr/>
           </p:nvSpPr>
@@ -13822,7 +13782,7 @@
         </p:sp>
         <p:sp>
           <p:nvSpPr>
-            <p:cNvPr id="251" name="pg251"/>
+            <p:cNvPr id="250" name="pg250"/>
             <p:cNvSpPr/>
             <p:nvPr/>
           </p:nvSpPr>
@@ -13868,7 +13828,7 @@
         </p:sp>
         <p:sp>
           <p:nvSpPr>
-            <p:cNvPr id="252" name="pg252"/>
+            <p:cNvPr id="251" name="pg251"/>
             <p:cNvSpPr/>
             <p:nvPr/>
           </p:nvSpPr>
@@ -13914,7 +13874,7 @@
         </p:sp>
         <p:sp>
           <p:nvSpPr>
-            <p:cNvPr id="253" name="pg253"/>
+            <p:cNvPr id="252" name="pg252"/>
             <p:cNvSpPr/>
             <p:nvPr/>
           </p:nvSpPr>
@@ -13960,7 +13920,7 @@
         </p:sp>
         <p:sp>
           <p:nvSpPr>
-            <p:cNvPr id="254" name="pg254"/>
+            <p:cNvPr id="253" name="pg253"/>
             <p:cNvSpPr/>
             <p:nvPr/>
           </p:nvSpPr>
@@ -14006,7 +13966,7 @@
         </p:sp>
         <p:sp>
           <p:nvSpPr>
-            <p:cNvPr id="255" name="pg255"/>
+            <p:cNvPr id="254" name="pg254"/>
             <p:cNvSpPr/>
             <p:nvPr/>
           </p:nvSpPr>
@@ -14052,7 +14012,7 @@
         </p:sp>
         <p:sp>
           <p:nvSpPr>
-            <p:cNvPr id="256" name="pg256"/>
+            <p:cNvPr id="255" name="pg255"/>
             <p:cNvSpPr/>
             <p:nvPr/>
           </p:nvSpPr>
@@ -14317,7 +14277,7 @@
         </p:sp>
         <p:sp>
           <p:nvSpPr>
-            <p:cNvPr id="257" name="pg257"/>
+            <p:cNvPr id="256" name="pg256"/>
             <p:cNvSpPr/>
             <p:nvPr/>
           </p:nvSpPr>
@@ -14699,7 +14659,7 @@
         </p:sp>
         <p:sp>
           <p:nvSpPr>
-            <p:cNvPr id="258" name="pg258"/>
+            <p:cNvPr id="257" name="pg257"/>
             <p:cNvSpPr/>
             <p:nvPr/>
           </p:nvSpPr>
@@ -14745,7 +14705,7 @@
         </p:sp>
         <p:sp>
           <p:nvSpPr>
-            <p:cNvPr id="259" name="pg259"/>
+            <p:cNvPr id="258" name="pg258"/>
             <p:cNvSpPr/>
             <p:nvPr/>
           </p:nvSpPr>
@@ -14791,7 +14751,7 @@
         </p:sp>
         <p:sp>
           <p:nvSpPr>
-            <p:cNvPr id="260" name="pg260"/>
+            <p:cNvPr id="259" name="pg259"/>
             <p:cNvSpPr/>
             <p:nvPr/>
           </p:nvSpPr>
@@ -14837,7 +14797,7 @@
         </p:sp>
         <p:sp>
           <p:nvSpPr>
-            <p:cNvPr id="261" name="pg261"/>
+            <p:cNvPr id="260" name="pg260"/>
             <p:cNvSpPr/>
             <p:nvPr/>
           </p:nvSpPr>
@@ -14907,7 +14867,7 @@
         </p:sp>
         <p:sp>
           <p:nvSpPr>
-            <p:cNvPr id="262" name="pg262"/>
+            <p:cNvPr id="261" name="pg261"/>
             <p:cNvSpPr/>
             <p:nvPr/>
           </p:nvSpPr>
@@ -14953,7 +14913,7 @@
         </p:sp>
         <p:sp>
           <p:nvSpPr>
-            <p:cNvPr id="263" name="pg263"/>
+            <p:cNvPr id="262" name="pg262"/>
             <p:cNvSpPr/>
             <p:nvPr/>
           </p:nvSpPr>
@@ -14999,7 +14959,7 @@
         </p:sp>
         <p:sp>
           <p:nvSpPr>
-            <p:cNvPr id="264" name="pg264"/>
+            <p:cNvPr id="263" name="pg263"/>
             <p:cNvSpPr/>
             <p:nvPr/>
           </p:nvSpPr>
@@ -15045,7 +15005,7 @@
         </p:sp>
         <p:sp>
           <p:nvSpPr>
-            <p:cNvPr id="265" name="pg265"/>
+            <p:cNvPr id="264" name="pg264"/>
             <p:cNvSpPr/>
             <p:nvPr/>
           </p:nvSpPr>
@@ -15091,7 +15051,7 @@
         </p:sp>
         <p:sp>
           <p:nvSpPr>
-            <p:cNvPr id="266" name="pg266"/>
+            <p:cNvPr id="265" name="pg265"/>
             <p:cNvSpPr/>
             <p:nvPr/>
           </p:nvSpPr>
@@ -15137,7 +15097,7 @@
         </p:sp>
         <p:sp>
           <p:nvSpPr>
-            <p:cNvPr id="267" name="pg267"/>
+            <p:cNvPr id="266" name="pg266"/>
             <p:cNvSpPr/>
             <p:nvPr/>
           </p:nvSpPr>
@@ -15183,7 +15143,7 @@
         </p:sp>
         <p:sp>
           <p:nvSpPr>
-            <p:cNvPr id="268" name="pg268"/>
+            <p:cNvPr id="267" name="pg267"/>
             <p:cNvSpPr/>
             <p:nvPr/>
           </p:nvSpPr>
@@ -15229,7 +15189,7 @@
         </p:sp>
         <p:sp>
           <p:nvSpPr>
-            <p:cNvPr id="269" name="pg269"/>
+            <p:cNvPr id="268" name="pg268"/>
             <p:cNvSpPr/>
             <p:nvPr/>
           </p:nvSpPr>
@@ -15275,7 +15235,7 @@
         </p:sp>
         <p:sp>
           <p:nvSpPr>
-            <p:cNvPr id="270" name="pg270"/>
+            <p:cNvPr id="269" name="pg269"/>
             <p:cNvSpPr/>
             <p:nvPr/>
           </p:nvSpPr>
@@ -15321,7 +15281,7 @@
         </p:sp>
         <p:sp>
           <p:nvSpPr>
-            <p:cNvPr id="271" name="pg271"/>
+            <p:cNvPr id="270" name="pg270"/>
             <p:cNvSpPr/>
             <p:nvPr/>
           </p:nvSpPr>
@@ -15367,7 +15327,7 @@
         </p:sp>
         <p:sp>
           <p:nvSpPr>
-            <p:cNvPr id="272" name="pg272"/>
+            <p:cNvPr id="271" name="pg271"/>
             <p:cNvSpPr/>
             <p:nvPr/>
           </p:nvSpPr>
@@ -15413,7 +15373,7 @@
         </p:sp>
         <p:sp>
           <p:nvSpPr>
-            <p:cNvPr id="273" name="pg273"/>
+            <p:cNvPr id="272" name="pg272"/>
             <p:cNvSpPr/>
             <p:nvPr/>
           </p:nvSpPr>
@@ -15459,7 +15419,7 @@
         </p:sp>
         <p:sp>
           <p:nvSpPr>
-            <p:cNvPr id="274" name="pg274"/>
+            <p:cNvPr id="273" name="pg273"/>
             <p:cNvSpPr/>
             <p:nvPr/>
           </p:nvSpPr>
@@ -15505,7 +15465,7 @@
         </p:sp>
         <p:sp>
           <p:nvSpPr>
-            <p:cNvPr id="275" name="pg275"/>
+            <p:cNvPr id="274" name="pg274"/>
             <p:cNvSpPr/>
             <p:nvPr/>
           </p:nvSpPr>
@@ -15551,7 +15511,7 @@
         </p:sp>
         <p:sp>
           <p:nvSpPr>
-            <p:cNvPr id="276" name="pg276"/>
+            <p:cNvPr id="275" name="pg275"/>
             <p:cNvSpPr/>
             <p:nvPr/>
           </p:nvSpPr>
@@ -15597,7 +15557,7 @@
         </p:sp>
         <p:sp>
           <p:nvSpPr>
-            <p:cNvPr id="277" name="pg277"/>
+            <p:cNvPr id="276" name="pg276"/>
             <p:cNvSpPr/>
             <p:nvPr/>
           </p:nvSpPr>
@@ -15643,7 +15603,7 @@
         </p:sp>
         <p:sp>
           <p:nvSpPr>
-            <p:cNvPr id="278" name="pg278"/>
+            <p:cNvPr id="277" name="pg277"/>
             <p:cNvSpPr/>
             <p:nvPr/>
           </p:nvSpPr>
@@ -15689,7 +15649,7 @@
         </p:sp>
         <p:sp>
           <p:nvSpPr>
-            <p:cNvPr id="279" name="pg279"/>
+            <p:cNvPr id="278" name="pg278"/>
             <p:cNvSpPr/>
             <p:nvPr/>
           </p:nvSpPr>
@@ -15735,7 +15695,7 @@
         </p:sp>
         <p:sp>
           <p:nvSpPr>
-            <p:cNvPr id="280" name="pg280"/>
+            <p:cNvPr id="279" name="pg279"/>
             <p:cNvSpPr/>
             <p:nvPr/>
           </p:nvSpPr>
@@ -15781,7 +15741,7 @@
         </p:sp>
         <p:sp>
           <p:nvSpPr>
-            <p:cNvPr id="281" name="pg281"/>
+            <p:cNvPr id="280" name="pg280"/>
             <p:cNvSpPr/>
             <p:nvPr/>
           </p:nvSpPr>
@@ -15827,7 +15787,7 @@
         </p:sp>
         <p:sp>
           <p:nvSpPr>
-            <p:cNvPr id="282" name="pg282"/>
+            <p:cNvPr id="281" name="pg281"/>
             <p:cNvSpPr/>
             <p:nvPr/>
           </p:nvSpPr>
@@ -15873,7 +15833,7 @@
         </p:sp>
         <p:sp>
           <p:nvSpPr>
-            <p:cNvPr id="283" name="pg283"/>
+            <p:cNvPr id="282" name="pg282"/>
             <p:cNvSpPr/>
             <p:nvPr/>
           </p:nvSpPr>
@@ -15919,7 +15879,7 @@
         </p:sp>
         <p:sp>
           <p:nvSpPr>
-            <p:cNvPr id="284" name="pg284"/>
+            <p:cNvPr id="283" name="pg283"/>
             <p:cNvSpPr/>
             <p:nvPr/>
           </p:nvSpPr>
@@ -16484,7 +16444,7 @@
         </p:sp>
         <p:sp>
           <p:nvSpPr>
-            <p:cNvPr id="285" name="pg285"/>
+            <p:cNvPr id="284" name="pg284"/>
             <p:cNvSpPr/>
             <p:nvPr/>
           </p:nvSpPr>
@@ -16575,7 +16535,7 @@
         </p:sp>
         <p:sp>
           <p:nvSpPr>
-            <p:cNvPr id="286" name="pg286"/>
+            <p:cNvPr id="285" name="pg285"/>
             <p:cNvSpPr/>
             <p:nvPr/>
           </p:nvSpPr>
@@ -16621,7 +16581,7 @@
         </p:sp>
         <p:sp>
           <p:nvSpPr>
-            <p:cNvPr id="287" name="pg287"/>
+            <p:cNvPr id="286" name="pg286"/>
             <p:cNvSpPr/>
             <p:nvPr/>
           </p:nvSpPr>
@@ -16667,7 +16627,7 @@
         </p:sp>
         <p:sp>
           <p:nvSpPr>
-            <p:cNvPr id="288" name="pg288"/>
+            <p:cNvPr id="287" name="pg287"/>
             <p:cNvSpPr/>
             <p:nvPr/>
           </p:nvSpPr>
@@ -16713,7 +16673,7 @@
         </p:sp>
         <p:sp>
           <p:nvSpPr>
-            <p:cNvPr id="289" name="pg289"/>
+            <p:cNvPr id="288" name="pg288"/>
             <p:cNvSpPr/>
             <p:nvPr/>
           </p:nvSpPr>
@@ -16759,7 +16719,7 @@
         </p:sp>
         <p:sp>
           <p:nvSpPr>
-            <p:cNvPr id="290" name="pg290"/>
+            <p:cNvPr id="289" name="pg289"/>
             <p:cNvSpPr/>
             <p:nvPr/>
           </p:nvSpPr>
@@ -17396,7 +17356,7 @@
         </p:sp>
         <p:sp>
           <p:nvSpPr>
-            <p:cNvPr id="291" name="pg291"/>
+            <p:cNvPr id="290" name="pg290"/>
             <p:cNvSpPr/>
             <p:nvPr/>
           </p:nvSpPr>
@@ -17442,7 +17402,7 @@
         </p:sp>
         <p:sp>
           <p:nvSpPr>
-            <p:cNvPr id="292" name="pg292"/>
+            <p:cNvPr id="291" name="pg291"/>
             <p:cNvSpPr/>
             <p:nvPr/>
           </p:nvSpPr>
@@ -17488,7 +17448,7 @@
         </p:sp>
         <p:sp>
           <p:nvSpPr>
-            <p:cNvPr id="293" name="pg293"/>
+            <p:cNvPr id="292" name="pg292"/>
             <p:cNvSpPr/>
             <p:nvPr/>
           </p:nvSpPr>
@@ -17534,7 +17494,7 @@
         </p:sp>
         <p:sp>
           <p:nvSpPr>
-            <p:cNvPr id="294" name="pg294"/>
+            <p:cNvPr id="293" name="pg293"/>
             <p:cNvSpPr/>
             <p:nvPr/>
           </p:nvSpPr>
@@ -17580,7 +17540,7 @@
         </p:sp>
         <p:sp>
           <p:nvSpPr>
-            <p:cNvPr id="295" name="pg295"/>
+            <p:cNvPr id="294" name="pg294"/>
             <p:cNvSpPr/>
             <p:nvPr/>
           </p:nvSpPr>
@@ -17626,7 +17586,7 @@
         </p:sp>
         <p:sp>
           <p:nvSpPr>
-            <p:cNvPr id="296" name="pg296"/>
+            <p:cNvPr id="295" name="pg295"/>
             <p:cNvSpPr/>
             <p:nvPr/>
           </p:nvSpPr>
@@ -17672,7 +17632,7 @@
         </p:sp>
         <p:sp>
           <p:nvSpPr>
-            <p:cNvPr id="297" name="pg297"/>
+            <p:cNvPr id="296" name="pg296"/>
             <p:cNvSpPr/>
             <p:nvPr/>
           </p:nvSpPr>
@@ -17718,7 +17678,7 @@
         </p:sp>
         <p:sp>
           <p:nvSpPr>
-            <p:cNvPr id="298" name="pg298"/>
+            <p:cNvPr id="297" name="pg297"/>
             <p:cNvSpPr/>
             <p:nvPr/>
           </p:nvSpPr>
@@ -17764,7 +17724,7 @@
         </p:sp>
         <p:sp>
           <p:nvSpPr>
-            <p:cNvPr id="299" name="pg299"/>
+            <p:cNvPr id="298" name="pg298"/>
             <p:cNvSpPr/>
             <p:nvPr/>
           </p:nvSpPr>
@@ -17810,7 +17770,7 @@
         </p:sp>
         <p:sp>
           <p:nvSpPr>
-            <p:cNvPr id="300" name="pg300"/>
+            <p:cNvPr id="299" name="pg299"/>
             <p:cNvSpPr/>
             <p:nvPr/>
           </p:nvSpPr>
@@ -17856,7 +17816,7 @@
         </p:sp>
         <p:sp>
           <p:nvSpPr>
-            <p:cNvPr id="301" name="pg301"/>
+            <p:cNvPr id="300" name="pg300"/>
             <p:cNvSpPr/>
             <p:nvPr/>
           </p:nvSpPr>
@@ -17902,7 +17862,7 @@
         </p:sp>
         <p:sp>
           <p:nvSpPr>
-            <p:cNvPr id="302" name="pg302"/>
+            <p:cNvPr id="301" name="pg301"/>
             <p:cNvSpPr/>
             <p:nvPr/>
           </p:nvSpPr>
@@ -17948,7 +17908,7 @@
         </p:sp>
         <p:sp>
           <p:nvSpPr>
-            <p:cNvPr id="303" name="pg303"/>
+            <p:cNvPr id="302" name="pg302"/>
             <p:cNvSpPr/>
             <p:nvPr/>
           </p:nvSpPr>
@@ -17994,7 +17954,7 @@
         </p:sp>
         <p:sp>
           <p:nvSpPr>
-            <p:cNvPr id="304" name="pg304"/>
+            <p:cNvPr id="303" name="pg303"/>
             <p:cNvSpPr/>
             <p:nvPr/>
           </p:nvSpPr>
@@ -18040,7 +18000,7 @@
         </p:sp>
         <p:sp>
           <p:nvSpPr>
-            <p:cNvPr id="305" name="pg305"/>
+            <p:cNvPr id="304" name="pg304"/>
             <p:cNvSpPr/>
             <p:nvPr/>
           </p:nvSpPr>
@@ -18086,7 +18046,7 @@
         </p:sp>
         <p:sp>
           <p:nvSpPr>
-            <p:cNvPr id="306" name="pg306"/>
+            <p:cNvPr id="305" name="pg305"/>
             <p:cNvSpPr/>
             <p:nvPr/>
           </p:nvSpPr>
@@ -18132,7 +18092,7 @@
         </p:sp>
         <p:sp>
           <p:nvSpPr>
-            <p:cNvPr id="307" name="pg307"/>
+            <p:cNvPr id="306" name="pg306"/>
             <p:cNvSpPr/>
             <p:nvPr/>
           </p:nvSpPr>
@@ -18178,7 +18138,7 @@
         </p:sp>
         <p:sp>
           <p:nvSpPr>
-            <p:cNvPr id="308" name="pg308"/>
+            <p:cNvPr id="307" name="pg307"/>
             <p:cNvSpPr/>
             <p:nvPr/>
           </p:nvSpPr>
@@ -18224,7 +18184,7 @@
         </p:sp>
         <p:sp>
           <p:nvSpPr>
-            <p:cNvPr id="309" name="pg309"/>
+            <p:cNvPr id="308" name="pg308"/>
             <p:cNvSpPr/>
             <p:nvPr/>
           </p:nvSpPr>
@@ -18270,7 +18230,7 @@
         </p:sp>
         <p:sp>
           <p:nvSpPr>
-            <p:cNvPr id="310" name="pg310"/>
+            <p:cNvPr id="309" name="pg309"/>
             <p:cNvSpPr/>
             <p:nvPr/>
           </p:nvSpPr>
@@ -18316,7 +18276,7 @@
         </p:sp>
         <p:sp>
           <p:nvSpPr>
-            <p:cNvPr id="311" name="pg311"/>
+            <p:cNvPr id="310" name="pg310"/>
             <p:cNvSpPr/>
             <p:nvPr/>
           </p:nvSpPr>
@@ -18362,7 +18322,7 @@
         </p:sp>
         <p:sp>
           <p:nvSpPr>
-            <p:cNvPr id="312" name="pg312"/>
+            <p:cNvPr id="311" name="pg311"/>
             <p:cNvSpPr/>
             <p:nvPr/>
           </p:nvSpPr>
@@ -18408,7 +18368,7 @@
         </p:sp>
         <p:sp>
           <p:nvSpPr>
-            <p:cNvPr id="313" name="pg313"/>
+            <p:cNvPr id="312" name="pg312"/>
             <p:cNvSpPr/>
             <p:nvPr/>
           </p:nvSpPr>
@@ -18457,7 +18417,7 @@
         </p:sp>
         <p:sp>
           <p:nvSpPr>
-            <p:cNvPr id="314" name="pg314"/>
+            <p:cNvPr id="313" name="pg313"/>
             <p:cNvSpPr/>
             <p:nvPr/>
           </p:nvSpPr>
@@ -18503,7 +18463,7 @@
         </p:sp>
         <p:sp>
           <p:nvSpPr>
-            <p:cNvPr id="315" name="pg315"/>
+            <p:cNvPr id="314" name="pg314"/>
             <p:cNvSpPr/>
             <p:nvPr/>
           </p:nvSpPr>
@@ -18549,7 +18509,7 @@
         </p:sp>
         <p:sp>
           <p:nvSpPr>
-            <p:cNvPr id="316" name="pg316"/>
+            <p:cNvPr id="315" name="pg315"/>
             <p:cNvSpPr/>
             <p:nvPr/>
           </p:nvSpPr>
@@ -18595,7 +18555,7 @@
         </p:sp>
         <p:sp>
           <p:nvSpPr>
-            <p:cNvPr id="317" name="pg317"/>
+            <p:cNvPr id="316" name="pg316"/>
             <p:cNvSpPr/>
             <p:nvPr/>
           </p:nvSpPr>
@@ -18641,7 +18601,7 @@
         </p:sp>
         <p:sp>
           <p:nvSpPr>
-            <p:cNvPr id="318" name="pg318"/>
+            <p:cNvPr id="317" name="pg317"/>
             <p:cNvSpPr/>
             <p:nvPr/>
           </p:nvSpPr>
@@ -18687,7 +18647,7 @@
         </p:sp>
         <p:sp>
           <p:nvSpPr>
-            <p:cNvPr id="319" name="pg319"/>
+            <p:cNvPr id="318" name="pg318"/>
             <p:cNvSpPr/>
             <p:nvPr/>
           </p:nvSpPr>
@@ -19252,7 +19212,7 @@
         </p:sp>
         <p:sp>
           <p:nvSpPr>
-            <p:cNvPr id="320" name="pg320"/>
+            <p:cNvPr id="319" name="pg319"/>
             <p:cNvSpPr/>
             <p:nvPr/>
           </p:nvSpPr>
@@ -19298,7 +19258,7 @@
         </p:sp>
         <p:sp>
           <p:nvSpPr>
-            <p:cNvPr id="321" name="pg321"/>
+            <p:cNvPr id="320" name="pg320"/>
             <p:cNvSpPr/>
             <p:nvPr/>
           </p:nvSpPr>
@@ -19344,7 +19304,7 @@
         </p:sp>
         <p:sp>
           <p:nvSpPr>
-            <p:cNvPr id="322" name="pg322"/>
+            <p:cNvPr id="321" name="pg321"/>
             <p:cNvSpPr/>
             <p:nvPr/>
           </p:nvSpPr>
@@ -19390,7 +19350,7 @@
         </p:sp>
         <p:sp>
           <p:nvSpPr>
-            <p:cNvPr id="323" name="pg323"/>
+            <p:cNvPr id="322" name="pg322"/>
             <p:cNvSpPr/>
             <p:nvPr/>
           </p:nvSpPr>
@@ -19436,7 +19396,7 @@
         </p:sp>
         <p:sp>
           <p:nvSpPr>
-            <p:cNvPr id="324" name="pg324"/>
+            <p:cNvPr id="323" name="pg323"/>
             <p:cNvSpPr/>
             <p:nvPr/>
           </p:nvSpPr>
@@ -19482,7 +19442,7 @@
         </p:sp>
         <p:sp>
           <p:nvSpPr>
-            <p:cNvPr id="325" name="pg325"/>
+            <p:cNvPr id="324" name="pg324"/>
             <p:cNvSpPr/>
             <p:nvPr/>
           </p:nvSpPr>
@@ -19528,7 +19488,7 @@
         </p:sp>
         <p:sp>
           <p:nvSpPr>
-            <p:cNvPr id="326" name="pg326"/>
+            <p:cNvPr id="325" name="pg325"/>
             <p:cNvSpPr/>
             <p:nvPr/>
           </p:nvSpPr>
@@ -19574,7 +19534,7 @@
         </p:sp>
         <p:sp>
           <p:nvSpPr>
-            <p:cNvPr id="327" name="pg327"/>
+            <p:cNvPr id="326" name="pg326"/>
             <p:cNvSpPr/>
             <p:nvPr/>
           </p:nvSpPr>
@@ -19620,7 +19580,7 @@
         </p:sp>
         <p:sp>
           <p:nvSpPr>
-            <p:cNvPr id="328" name="pg328"/>
+            <p:cNvPr id="327" name="pg327"/>
             <p:cNvSpPr/>
             <p:nvPr/>
           </p:nvSpPr>
@@ -19666,7 +19626,7 @@
         </p:sp>
         <p:sp>
           <p:nvSpPr>
-            <p:cNvPr id="329" name="pg329"/>
+            <p:cNvPr id="328" name="pg328"/>
             <p:cNvSpPr/>
             <p:nvPr/>
           </p:nvSpPr>
@@ -19712,7 +19672,7 @@
         </p:sp>
         <p:sp>
           <p:nvSpPr>
-            <p:cNvPr id="330" name="pg330"/>
+            <p:cNvPr id="329" name="pg329"/>
             <p:cNvSpPr/>
             <p:nvPr/>
           </p:nvSpPr>
@@ -19758,7 +19718,7 @@
         </p:sp>
         <p:sp>
           <p:nvSpPr>
-            <p:cNvPr id="331" name="pg331"/>
+            <p:cNvPr id="330" name="pg330"/>
             <p:cNvSpPr/>
             <p:nvPr/>
           </p:nvSpPr>
@@ -19804,7 +19764,7 @@
         </p:sp>
         <p:sp>
           <p:nvSpPr>
-            <p:cNvPr id="332" name="pg332"/>
+            <p:cNvPr id="331" name="pg331"/>
             <p:cNvSpPr/>
             <p:nvPr/>
           </p:nvSpPr>
@@ -19850,7 +19810,7 @@
         </p:sp>
         <p:sp>
           <p:nvSpPr>
-            <p:cNvPr id="333" name="pg333"/>
+            <p:cNvPr id="332" name="pg332"/>
             <p:cNvSpPr/>
             <p:nvPr/>
           </p:nvSpPr>
@@ -19896,7 +19856,7 @@
         </p:sp>
         <p:sp>
           <p:nvSpPr>
-            <p:cNvPr id="334" name="pg334"/>
+            <p:cNvPr id="333" name="pg333"/>
             <p:cNvSpPr/>
             <p:nvPr/>
           </p:nvSpPr>
@@ -19942,7 +19902,7 @@
         </p:sp>
         <p:sp>
           <p:nvSpPr>
-            <p:cNvPr id="335" name="pg335"/>
+            <p:cNvPr id="334" name="pg334"/>
             <p:cNvSpPr/>
             <p:nvPr/>
           </p:nvSpPr>
@@ -19988,7 +19948,7 @@
         </p:sp>
         <p:sp>
           <p:nvSpPr>
-            <p:cNvPr id="336" name="pg336"/>
+            <p:cNvPr id="335" name="pg335"/>
             <p:cNvSpPr/>
             <p:nvPr/>
           </p:nvSpPr>
@@ -20034,7 +19994,7 @@
         </p:sp>
         <p:sp>
           <p:nvSpPr>
-            <p:cNvPr id="337" name="pg337"/>
+            <p:cNvPr id="336" name="pg336"/>
             <p:cNvSpPr/>
             <p:nvPr/>
           </p:nvSpPr>
@@ -20080,7 +20040,7 @@
         </p:sp>
         <p:sp>
           <p:nvSpPr>
-            <p:cNvPr id="338" name="pg338"/>
+            <p:cNvPr id="337" name="pg337"/>
             <p:cNvSpPr/>
             <p:nvPr/>
           </p:nvSpPr>
@@ -20126,7 +20086,7 @@
         </p:sp>
         <p:sp>
           <p:nvSpPr>
-            <p:cNvPr id="339" name="pg339"/>
+            <p:cNvPr id="338" name="pg338"/>
             <p:cNvSpPr/>
             <p:nvPr/>
           </p:nvSpPr>
@@ -20172,7 +20132,7 @@
         </p:sp>
         <p:sp>
           <p:nvSpPr>
-            <p:cNvPr id="340" name="pg340"/>
+            <p:cNvPr id="339" name="pg339"/>
             <p:cNvSpPr/>
             <p:nvPr/>
           </p:nvSpPr>
@@ -20221,7 +20181,7 @@
         </p:sp>
         <p:sp>
           <p:nvSpPr>
-            <p:cNvPr id="341" name="pg341"/>
+            <p:cNvPr id="340" name="pg340"/>
             <p:cNvSpPr/>
             <p:nvPr/>
           </p:nvSpPr>
@@ -20336,7 +20296,7 @@
         </p:sp>
         <p:sp>
           <p:nvSpPr>
-            <p:cNvPr id="342" name="pg342"/>
+            <p:cNvPr id="341" name="pg341"/>
             <p:cNvSpPr/>
             <p:nvPr/>
           </p:nvSpPr>
@@ -20382,7 +20342,7 @@
         </p:sp>
         <p:sp>
           <p:nvSpPr>
-            <p:cNvPr id="343" name="pg343"/>
+            <p:cNvPr id="342" name="pg342"/>
             <p:cNvSpPr/>
             <p:nvPr/>
           </p:nvSpPr>
@@ -20428,7 +20388,7 @@
         </p:sp>
         <p:sp>
           <p:nvSpPr>
-            <p:cNvPr id="344" name="pg344"/>
+            <p:cNvPr id="343" name="pg343"/>
             <p:cNvSpPr/>
             <p:nvPr/>
           </p:nvSpPr>
@@ -20474,7 +20434,7 @@
         </p:sp>
         <p:sp>
           <p:nvSpPr>
-            <p:cNvPr id="345" name="pg345"/>
+            <p:cNvPr id="344" name="pg344"/>
             <p:cNvSpPr/>
             <p:nvPr/>
           </p:nvSpPr>
@@ -20520,7 +20480,7 @@
         </p:sp>
         <p:sp>
           <p:nvSpPr>
-            <p:cNvPr id="346" name="pg346"/>
+            <p:cNvPr id="345" name="pg345"/>
             <p:cNvSpPr/>
             <p:nvPr/>
           </p:nvSpPr>
@@ -20566,7 +20526,7 @@
         </p:sp>
         <p:sp>
           <p:nvSpPr>
-            <p:cNvPr id="347" name="pg347"/>
+            <p:cNvPr id="346" name="pg346"/>
             <p:cNvSpPr/>
             <p:nvPr/>
           </p:nvSpPr>
@@ -20612,7 +20572,7 @@
         </p:sp>
         <p:sp>
           <p:nvSpPr>
-            <p:cNvPr id="348" name="pg348"/>
+            <p:cNvPr id="347" name="pg347"/>
             <p:cNvSpPr/>
             <p:nvPr/>
           </p:nvSpPr>
@@ -20712,7 +20672,7 @@
         </p:sp>
         <p:sp>
           <p:nvSpPr>
-            <p:cNvPr id="349" name="pg349"/>
+            <p:cNvPr id="348" name="pg348"/>
             <p:cNvSpPr/>
             <p:nvPr/>
           </p:nvSpPr>
@@ -20758,7 +20718,7 @@
         </p:sp>
         <p:sp>
           <p:nvSpPr>
-            <p:cNvPr id="350" name="pg350"/>
+            <p:cNvPr id="349" name="pg349"/>
             <p:cNvSpPr/>
             <p:nvPr/>
           </p:nvSpPr>
@@ -20804,7 +20764,7 @@
         </p:sp>
         <p:sp>
           <p:nvSpPr>
-            <p:cNvPr id="351" name="pg351"/>
+            <p:cNvPr id="350" name="pg350"/>
             <p:cNvSpPr/>
             <p:nvPr/>
           </p:nvSpPr>
@@ -20850,7 +20810,7 @@
         </p:sp>
         <p:sp>
           <p:nvSpPr>
-            <p:cNvPr id="352" name="pg352"/>
+            <p:cNvPr id="351" name="pg351"/>
             <p:cNvSpPr/>
             <p:nvPr/>
           </p:nvSpPr>
@@ -20896,7 +20856,7 @@
         </p:sp>
         <p:sp>
           <p:nvSpPr>
-            <p:cNvPr id="353" name="pg353"/>
+            <p:cNvPr id="352" name="pg352"/>
             <p:cNvSpPr/>
             <p:nvPr/>
           </p:nvSpPr>
@@ -20942,7 +20902,7 @@
         </p:sp>
         <p:sp>
           <p:nvSpPr>
-            <p:cNvPr id="354" name="pg354"/>
+            <p:cNvPr id="353" name="pg353"/>
             <p:cNvSpPr/>
             <p:nvPr/>
           </p:nvSpPr>
@@ -20988,7 +20948,7 @@
         </p:sp>
         <p:sp>
           <p:nvSpPr>
-            <p:cNvPr id="355" name="pg355"/>
+            <p:cNvPr id="354" name="pg354"/>
             <p:cNvSpPr/>
             <p:nvPr/>
           </p:nvSpPr>
@@ -21034,7 +20994,7 @@
         </p:sp>
         <p:sp>
           <p:nvSpPr>
-            <p:cNvPr id="356" name="pg356"/>
+            <p:cNvPr id="355" name="pg355"/>
             <p:cNvSpPr/>
             <p:nvPr/>
           </p:nvSpPr>
@@ -21080,7 +21040,7 @@
         </p:sp>
         <p:sp>
           <p:nvSpPr>
-            <p:cNvPr id="357" name="pg357"/>
+            <p:cNvPr id="356" name="pg356"/>
             <p:cNvSpPr/>
             <p:nvPr/>
           </p:nvSpPr>
@@ -21126,7 +21086,7 @@
         </p:sp>
         <p:sp>
           <p:nvSpPr>
-            <p:cNvPr id="358" name="pg358"/>
+            <p:cNvPr id="357" name="pg357"/>
             <p:cNvSpPr/>
             <p:nvPr/>
           </p:nvSpPr>
@@ -21172,7 +21132,7 @@
         </p:sp>
         <p:sp>
           <p:nvSpPr>
-            <p:cNvPr id="359" name="pg359"/>
+            <p:cNvPr id="358" name="pg358"/>
             <p:cNvSpPr/>
             <p:nvPr/>
           </p:nvSpPr>
@@ -21218,7 +21178,7 @@
         </p:sp>
         <p:sp>
           <p:nvSpPr>
-            <p:cNvPr id="360" name="pg360"/>
+            <p:cNvPr id="359" name="pg359"/>
             <p:cNvSpPr/>
             <p:nvPr/>
           </p:nvSpPr>
@@ -21264,7 +21224,7 @@
         </p:sp>
         <p:sp>
           <p:nvSpPr>
-            <p:cNvPr id="361" name="pg361"/>
+            <p:cNvPr id="360" name="pg360"/>
             <p:cNvSpPr/>
             <p:nvPr/>
           </p:nvSpPr>
@@ -21310,7 +21270,7 @@
         </p:sp>
         <p:sp>
           <p:nvSpPr>
-            <p:cNvPr id="362" name="pg362"/>
+            <p:cNvPr id="361" name="pg361"/>
             <p:cNvSpPr/>
             <p:nvPr/>
           </p:nvSpPr>
@@ -21356,7 +21316,7 @@
         </p:sp>
         <p:sp>
           <p:nvSpPr>
-            <p:cNvPr id="363" name="pg363"/>
+            <p:cNvPr id="362" name="pg362"/>
             <p:cNvSpPr/>
             <p:nvPr/>
           </p:nvSpPr>
@@ -21402,7 +21362,7 @@
         </p:sp>
         <p:sp>
           <p:nvSpPr>
-            <p:cNvPr id="364" name="pg364"/>
+            <p:cNvPr id="363" name="pg363"/>
             <p:cNvSpPr/>
             <p:nvPr/>
           </p:nvSpPr>
@@ -21448,7 +21408,7 @@
         </p:sp>
         <p:sp>
           <p:nvSpPr>
-            <p:cNvPr id="365" name="pg365"/>
+            <p:cNvPr id="364" name="pg364"/>
             <p:cNvSpPr/>
             <p:nvPr/>
           </p:nvSpPr>
@@ -21494,7 +21454,7 @@
         </p:sp>
         <p:sp>
           <p:nvSpPr>
-            <p:cNvPr id="366" name="pg366"/>
+            <p:cNvPr id="365" name="pg365"/>
             <p:cNvSpPr/>
             <p:nvPr/>
           </p:nvSpPr>
@@ -21540,7 +21500,7 @@
         </p:sp>
         <p:sp>
           <p:nvSpPr>
-            <p:cNvPr id="367" name="pg367"/>
+            <p:cNvPr id="366" name="pg366"/>
             <p:cNvSpPr/>
             <p:nvPr/>
           </p:nvSpPr>
@@ -21586,7 +21546,7 @@
         </p:sp>
         <p:sp>
           <p:nvSpPr>
-            <p:cNvPr id="368" name="pg368"/>
+            <p:cNvPr id="367" name="pg367"/>
             <p:cNvSpPr/>
             <p:nvPr/>
           </p:nvSpPr>
@@ -22106,7 +22066,7 @@
         </p:sp>
         <p:sp>
           <p:nvSpPr>
-            <p:cNvPr id="369" name="pg369"/>
+            <p:cNvPr id="368" name="pg368"/>
             <p:cNvSpPr/>
             <p:nvPr/>
           </p:nvSpPr>
@@ -22212,7 +22172,7 @@
         </p:sp>
         <p:sp>
           <p:nvSpPr>
-            <p:cNvPr id="370" name="pg370"/>
+            <p:cNvPr id="369" name="pg369"/>
             <p:cNvSpPr/>
             <p:nvPr/>
           </p:nvSpPr>
@@ -22258,7 +22218,7 @@
         </p:sp>
         <p:sp>
           <p:nvSpPr>
-            <p:cNvPr id="371" name="pg371"/>
+            <p:cNvPr id="370" name="pg370"/>
             <p:cNvSpPr/>
             <p:nvPr/>
           </p:nvSpPr>
@@ -22304,7 +22264,7 @@
         </p:sp>
         <p:sp>
           <p:nvSpPr>
-            <p:cNvPr id="372" name="pg372"/>
+            <p:cNvPr id="371" name="pg371"/>
             <p:cNvSpPr/>
             <p:nvPr/>
           </p:nvSpPr>
@@ -22350,7 +22310,7 @@
         </p:sp>
         <p:sp>
           <p:nvSpPr>
-            <p:cNvPr id="373" name="pg373"/>
+            <p:cNvPr id="372" name="pg372"/>
             <p:cNvSpPr/>
             <p:nvPr/>
           </p:nvSpPr>
@@ -22396,7 +22356,7 @@
         </p:sp>
         <p:sp>
           <p:nvSpPr>
-            <p:cNvPr id="374" name="pg374"/>
+            <p:cNvPr id="373" name="pg373"/>
             <p:cNvSpPr/>
             <p:nvPr/>
           </p:nvSpPr>
@@ -22442,7 +22402,7 @@
         </p:sp>
         <p:sp>
           <p:nvSpPr>
-            <p:cNvPr id="375" name="pg375"/>
+            <p:cNvPr id="374" name="pg374"/>
             <p:cNvSpPr/>
             <p:nvPr/>
           </p:nvSpPr>
@@ -22488,7 +22448,7 @@
         </p:sp>
         <p:sp>
           <p:nvSpPr>
-            <p:cNvPr id="376" name="pg376"/>
+            <p:cNvPr id="375" name="pg375"/>
             <p:cNvSpPr/>
             <p:nvPr/>
           </p:nvSpPr>
@@ -22534,7 +22494,7 @@
         </p:sp>
         <p:sp>
           <p:nvSpPr>
-            <p:cNvPr id="377" name="pg377"/>
+            <p:cNvPr id="376" name="pg376"/>
             <p:cNvSpPr/>
             <p:nvPr/>
           </p:nvSpPr>
@@ -22739,7 +22699,7 @@
         </p:sp>
         <p:sp>
           <p:nvSpPr>
-            <p:cNvPr id="378" name="pg378"/>
+            <p:cNvPr id="377" name="pg377"/>
             <p:cNvSpPr/>
             <p:nvPr/>
           </p:nvSpPr>
@@ -22785,7 +22745,7 @@
         </p:sp>
         <p:sp>
           <p:nvSpPr>
-            <p:cNvPr id="379" name="pg379"/>
+            <p:cNvPr id="378" name="pg378"/>
             <p:cNvSpPr/>
             <p:nvPr/>
           </p:nvSpPr>
@@ -22831,7 +22791,7 @@
         </p:sp>
         <p:sp>
           <p:nvSpPr>
-            <p:cNvPr id="380" name="pg380"/>
+            <p:cNvPr id="379" name="pg379"/>
             <p:cNvSpPr/>
             <p:nvPr/>
           </p:nvSpPr>
@@ -22877,7 +22837,7 @@
         </p:sp>
         <p:sp>
           <p:nvSpPr>
-            <p:cNvPr id="381" name="pg381"/>
+            <p:cNvPr id="380" name="pg380"/>
             <p:cNvSpPr/>
             <p:nvPr/>
           </p:nvSpPr>
@@ -22923,7 +22883,7 @@
         </p:sp>
         <p:sp>
           <p:nvSpPr>
-            <p:cNvPr id="382" name="pg382"/>
+            <p:cNvPr id="381" name="pg381"/>
             <p:cNvSpPr/>
             <p:nvPr/>
           </p:nvSpPr>
@@ -22969,7 +22929,7 @@
         </p:sp>
         <p:sp>
           <p:nvSpPr>
-            <p:cNvPr id="383" name="pg383"/>
+            <p:cNvPr id="382" name="pg382"/>
             <p:cNvSpPr/>
             <p:nvPr/>
           </p:nvSpPr>
@@ -23015,7 +22975,7 @@
         </p:sp>
         <p:sp>
           <p:nvSpPr>
-            <p:cNvPr id="384" name="pg384"/>
+            <p:cNvPr id="383" name="pg383"/>
             <p:cNvSpPr/>
             <p:nvPr/>
           </p:nvSpPr>
@@ -23061,7 +23021,7 @@
         </p:sp>
         <p:sp>
           <p:nvSpPr>
-            <p:cNvPr id="385" name="pg385"/>
+            <p:cNvPr id="384" name="pg384"/>
             <p:cNvSpPr/>
             <p:nvPr/>
           </p:nvSpPr>
@@ -23107,7 +23067,7 @@
         </p:sp>
         <p:sp>
           <p:nvSpPr>
-            <p:cNvPr id="386" name="pg386"/>
+            <p:cNvPr id="385" name="pg385"/>
             <p:cNvSpPr/>
             <p:nvPr/>
           </p:nvSpPr>
@@ -23153,7 +23113,7 @@
         </p:sp>
         <p:sp>
           <p:nvSpPr>
-            <p:cNvPr id="387" name="pg387"/>
+            <p:cNvPr id="386" name="pg386"/>
             <p:cNvSpPr/>
             <p:nvPr/>
           </p:nvSpPr>
@@ -23199,7 +23159,7 @@
         </p:sp>
         <p:sp>
           <p:nvSpPr>
-            <p:cNvPr id="388" name="pg388"/>
+            <p:cNvPr id="387" name="pg387"/>
             <p:cNvSpPr/>
             <p:nvPr/>
           </p:nvSpPr>
@@ -23245,7 +23205,7 @@
         </p:sp>
         <p:sp>
           <p:nvSpPr>
-            <p:cNvPr id="389" name="pg389"/>
+            <p:cNvPr id="388" name="pg388"/>
             <p:cNvSpPr/>
             <p:nvPr/>
           </p:nvSpPr>
@@ -23291,7 +23251,7 @@
         </p:sp>
         <p:sp>
           <p:nvSpPr>
-            <p:cNvPr id="390" name="pg390"/>
+            <p:cNvPr id="389" name="pg389"/>
             <p:cNvSpPr/>
             <p:nvPr/>
           </p:nvSpPr>
@@ -23337,7 +23297,7 @@
         </p:sp>
         <p:sp>
           <p:nvSpPr>
-            <p:cNvPr id="391" name="pg391"/>
+            <p:cNvPr id="390" name="pg390"/>
             <p:cNvSpPr/>
             <p:nvPr/>
           </p:nvSpPr>
@@ -23383,7 +23343,7 @@
         </p:sp>
         <p:sp>
           <p:nvSpPr>
-            <p:cNvPr id="392" name="pg392"/>
+            <p:cNvPr id="391" name="pg391"/>
             <p:cNvSpPr/>
             <p:nvPr/>
           </p:nvSpPr>
@@ -23429,7 +23389,7 @@
         </p:sp>
         <p:sp>
           <p:nvSpPr>
-            <p:cNvPr id="393" name="pg393"/>
+            <p:cNvPr id="392" name="pg392"/>
             <p:cNvSpPr/>
             <p:nvPr/>
           </p:nvSpPr>
@@ -23475,7 +23435,7 @@
         </p:sp>
         <p:sp>
           <p:nvSpPr>
-            <p:cNvPr id="394" name="pg394"/>
+            <p:cNvPr id="393" name="pg393"/>
             <p:cNvSpPr/>
             <p:nvPr/>
           </p:nvSpPr>
@@ -23521,7 +23481,7 @@
         </p:sp>
         <p:sp>
           <p:nvSpPr>
-            <p:cNvPr id="395" name="pg395"/>
+            <p:cNvPr id="394" name="pg394"/>
             <p:cNvSpPr/>
             <p:nvPr/>
           </p:nvSpPr>
@@ -23567,7 +23527,7 @@
         </p:sp>
         <p:sp>
           <p:nvSpPr>
-            <p:cNvPr id="396" name="pg396"/>
+            <p:cNvPr id="395" name="pg395"/>
             <p:cNvSpPr/>
             <p:nvPr/>
           </p:nvSpPr>
@@ -23733,7 +23693,7 @@
         </p:sp>
         <p:sp>
           <p:nvSpPr>
-            <p:cNvPr id="397" name="pg397"/>
+            <p:cNvPr id="396" name="pg396"/>
             <p:cNvSpPr/>
             <p:nvPr/>
           </p:nvSpPr>
@@ -24088,7 +24048,7 @@
         </p:sp>
         <p:sp>
           <p:nvSpPr>
-            <p:cNvPr id="398" name="pg398"/>
+            <p:cNvPr id="397" name="pg397"/>
             <p:cNvSpPr/>
             <p:nvPr/>
           </p:nvSpPr>
@@ -24134,7 +24094,7 @@
         </p:sp>
         <p:sp>
           <p:nvSpPr>
-            <p:cNvPr id="399" name="pg399"/>
+            <p:cNvPr id="398" name="pg398"/>
             <p:cNvSpPr/>
             <p:nvPr/>
           </p:nvSpPr>
@@ -24180,7 +24140,7 @@
         </p:sp>
         <p:sp>
           <p:nvSpPr>
-            <p:cNvPr id="400" name="pg400"/>
+            <p:cNvPr id="399" name="pg399"/>
             <p:cNvSpPr/>
             <p:nvPr/>
           </p:nvSpPr>
@@ -24226,7 +24186,7 @@
         </p:sp>
         <p:sp>
           <p:nvSpPr>
-            <p:cNvPr id="401" name="pg401"/>
+            <p:cNvPr id="400" name="pg400"/>
             <p:cNvSpPr/>
             <p:nvPr/>
           </p:nvSpPr>
@@ -24272,7 +24232,7 @@
         </p:sp>
         <p:sp>
           <p:nvSpPr>
-            <p:cNvPr id="402" name="pg402"/>
+            <p:cNvPr id="401" name="pg401"/>
             <p:cNvSpPr/>
             <p:nvPr/>
           </p:nvSpPr>
@@ -24318,7 +24278,7 @@
         </p:sp>
         <p:sp>
           <p:nvSpPr>
-            <p:cNvPr id="403" name="pg403"/>
+            <p:cNvPr id="402" name="pg402"/>
             <p:cNvSpPr/>
             <p:nvPr/>
           </p:nvSpPr>
@@ -24364,7 +24324,7 @@
         </p:sp>
         <p:sp>
           <p:nvSpPr>
-            <p:cNvPr id="404" name="pg404"/>
+            <p:cNvPr id="403" name="pg403"/>
             <p:cNvSpPr/>
             <p:nvPr/>
           </p:nvSpPr>
@@ -24410,7 +24370,7 @@
         </p:sp>
         <p:sp>
           <p:nvSpPr>
-            <p:cNvPr id="405" name="pg405"/>
+            <p:cNvPr id="404" name="pg404"/>
             <p:cNvSpPr/>
             <p:nvPr/>
           </p:nvSpPr>
@@ -24456,7 +24416,7 @@
         </p:sp>
         <p:sp>
           <p:nvSpPr>
-            <p:cNvPr id="406" name="pg406"/>
+            <p:cNvPr id="405" name="pg405"/>
             <p:cNvSpPr/>
             <p:nvPr/>
           </p:nvSpPr>
@@ -24772,7 +24732,7 @@
         </p:sp>
         <p:sp>
           <p:nvSpPr>
-            <p:cNvPr id="407" name="pg407"/>
+            <p:cNvPr id="406" name="pg406"/>
             <p:cNvSpPr/>
             <p:nvPr/>
           </p:nvSpPr>
@@ -24818,7 +24778,7 @@
         </p:sp>
         <p:sp>
           <p:nvSpPr>
-            <p:cNvPr id="408" name="pg408"/>
+            <p:cNvPr id="407" name="pg407"/>
             <p:cNvSpPr/>
             <p:nvPr/>
           </p:nvSpPr>
@@ -24864,7 +24824,7 @@
         </p:sp>
         <p:sp>
           <p:nvSpPr>
-            <p:cNvPr id="409" name="pg409"/>
+            <p:cNvPr id="408" name="pg408"/>
             <p:cNvSpPr/>
             <p:nvPr/>
           </p:nvSpPr>
@@ -24910,7 +24870,7 @@
         </p:sp>
         <p:sp>
           <p:nvSpPr>
-            <p:cNvPr id="410" name="pg410"/>
+            <p:cNvPr id="409" name="pg409"/>
             <p:cNvSpPr/>
             <p:nvPr/>
           </p:nvSpPr>
@@ -24956,7 +24916,7 @@
         </p:sp>
         <p:sp>
           <p:nvSpPr>
-            <p:cNvPr id="411" name="pg411"/>
+            <p:cNvPr id="410" name="pg410"/>
             <p:cNvSpPr/>
             <p:nvPr/>
           </p:nvSpPr>
@@ -25002,7 +24962,7 @@
         </p:sp>
         <p:sp>
           <p:nvSpPr>
-            <p:cNvPr id="412" name="pg412"/>
+            <p:cNvPr id="411" name="pg411"/>
             <p:cNvSpPr/>
             <p:nvPr/>
           </p:nvSpPr>
@@ -25048,7 +25008,7 @@
         </p:sp>
         <p:sp>
           <p:nvSpPr>
-            <p:cNvPr id="413" name="pg413"/>
+            <p:cNvPr id="412" name="pg412"/>
             <p:cNvSpPr/>
             <p:nvPr/>
           </p:nvSpPr>
@@ -25094,7 +25054,7 @@
         </p:sp>
         <p:sp>
           <p:nvSpPr>
-            <p:cNvPr id="414" name="pg414"/>
+            <p:cNvPr id="413" name="pg413"/>
             <p:cNvSpPr/>
             <p:nvPr/>
           </p:nvSpPr>
@@ -25140,7 +25100,7 @@
         </p:sp>
         <p:sp>
           <p:nvSpPr>
-            <p:cNvPr id="415" name="pg415"/>
+            <p:cNvPr id="414" name="pg414"/>
             <p:cNvSpPr/>
             <p:nvPr/>
           </p:nvSpPr>
@@ -25186,7 +25146,7 @@
         </p:sp>
         <p:sp>
           <p:nvSpPr>
-            <p:cNvPr id="416" name="pg416"/>
+            <p:cNvPr id="415" name="pg415"/>
             <p:cNvSpPr/>
             <p:nvPr/>
           </p:nvSpPr>
@@ -25232,7 +25192,7 @@
         </p:sp>
         <p:sp>
           <p:nvSpPr>
-            <p:cNvPr id="417" name="pg417"/>
+            <p:cNvPr id="416" name="pg416"/>
             <p:cNvSpPr/>
             <p:nvPr/>
           </p:nvSpPr>
@@ -25278,7 +25238,7 @@
         </p:sp>
         <p:sp>
           <p:nvSpPr>
-            <p:cNvPr id="418" name="pg418"/>
+            <p:cNvPr id="417" name="pg417"/>
             <p:cNvSpPr/>
             <p:nvPr/>
           </p:nvSpPr>
@@ -25324,7 +25284,7 @@
         </p:sp>
         <p:sp>
           <p:nvSpPr>
-            <p:cNvPr id="419" name="pg419"/>
+            <p:cNvPr id="418" name="pg418"/>
             <p:cNvSpPr/>
             <p:nvPr/>
           </p:nvSpPr>
@@ -25370,7 +25330,7 @@
         </p:sp>
         <p:sp>
           <p:nvSpPr>
-            <p:cNvPr id="420" name="pg420"/>
+            <p:cNvPr id="419" name="pg419"/>
             <p:cNvSpPr/>
             <p:nvPr/>
           </p:nvSpPr>
@@ -25416,7 +25376,7 @@
         </p:sp>
         <p:sp>
           <p:nvSpPr>
-            <p:cNvPr id="421" name="pg421"/>
+            <p:cNvPr id="420" name="pg420"/>
             <p:cNvSpPr/>
             <p:nvPr/>
           </p:nvSpPr>
@@ -25462,7 +25422,7 @@
         </p:sp>
         <p:sp>
           <p:nvSpPr>
-            <p:cNvPr id="422" name="pg422"/>
+            <p:cNvPr id="421" name="pg421"/>
             <p:cNvSpPr/>
             <p:nvPr/>
           </p:nvSpPr>
@@ -25508,7 +25468,7 @@
         </p:sp>
         <p:sp>
           <p:nvSpPr>
-            <p:cNvPr id="423" name="pg423"/>
+            <p:cNvPr id="422" name="pg422"/>
             <p:cNvSpPr/>
             <p:nvPr/>
           </p:nvSpPr>
@@ -25554,7 +25514,7 @@
         </p:sp>
         <p:sp>
           <p:nvSpPr>
-            <p:cNvPr id="424" name="pg424"/>
+            <p:cNvPr id="423" name="pg423"/>
             <p:cNvSpPr/>
             <p:nvPr/>
           </p:nvSpPr>
@@ -25909,7 +25869,7 @@
         </p:sp>
         <p:sp>
           <p:nvSpPr>
-            <p:cNvPr id="425" name="pg425"/>
+            <p:cNvPr id="424" name="pg424"/>
             <p:cNvSpPr/>
             <p:nvPr/>
           </p:nvSpPr>
@@ -25961,7 +25921,7 @@
         </p:sp>
         <p:sp>
           <p:nvSpPr>
-            <p:cNvPr id="426" name="pg426"/>
+            <p:cNvPr id="425" name="pg425"/>
             <p:cNvSpPr/>
             <p:nvPr/>
           </p:nvSpPr>
@@ -26007,7 +25967,7 @@
         </p:sp>
         <p:sp>
           <p:nvSpPr>
-            <p:cNvPr id="427" name="pg427"/>
+            <p:cNvPr id="426" name="pg426"/>
             <p:cNvSpPr/>
             <p:nvPr/>
           </p:nvSpPr>
@@ -26053,7 +26013,7 @@
         </p:sp>
         <p:sp>
           <p:nvSpPr>
-            <p:cNvPr id="428" name="pg428"/>
+            <p:cNvPr id="427" name="pg427"/>
             <p:cNvSpPr/>
             <p:nvPr/>
           </p:nvSpPr>
@@ -26099,7 +26059,7 @@
         </p:sp>
         <p:sp>
           <p:nvSpPr>
-            <p:cNvPr id="429" name="pg429"/>
+            <p:cNvPr id="428" name="pg428"/>
             <p:cNvSpPr/>
             <p:nvPr/>
           </p:nvSpPr>
@@ -26145,7 +26105,7 @@
         </p:sp>
         <p:sp>
           <p:nvSpPr>
-            <p:cNvPr id="430" name="pg430"/>
+            <p:cNvPr id="429" name="pg429"/>
             <p:cNvSpPr/>
             <p:nvPr/>
           </p:nvSpPr>
@@ -26191,7 +26151,7 @@
         </p:sp>
         <p:sp>
           <p:nvSpPr>
-            <p:cNvPr id="431" name="pg431"/>
+            <p:cNvPr id="430" name="pg430"/>
             <p:cNvSpPr/>
             <p:nvPr/>
           </p:nvSpPr>
@@ -26237,7 +26197,7 @@
         </p:sp>
         <p:sp>
           <p:nvSpPr>
-            <p:cNvPr id="432" name="pg432"/>
+            <p:cNvPr id="431" name="pg431"/>
             <p:cNvSpPr/>
             <p:nvPr/>
           </p:nvSpPr>
@@ -26283,7 +26243,7 @@
         </p:sp>
         <p:sp>
           <p:nvSpPr>
-            <p:cNvPr id="433" name="pg433"/>
+            <p:cNvPr id="432" name="pg432"/>
             <p:cNvSpPr/>
             <p:nvPr/>
           </p:nvSpPr>
@@ -26329,7 +26289,7 @@
         </p:sp>
         <p:sp>
           <p:nvSpPr>
-            <p:cNvPr id="434" name="pg434"/>
+            <p:cNvPr id="433" name="pg433"/>
             <p:cNvSpPr/>
             <p:nvPr/>
           </p:nvSpPr>
@@ -26375,7 +26335,7 @@
         </p:sp>
         <p:sp>
           <p:nvSpPr>
-            <p:cNvPr id="435" name="pg435"/>
+            <p:cNvPr id="434" name="pg434"/>
             <p:cNvSpPr/>
             <p:nvPr/>
           </p:nvSpPr>
@@ -26487,7 +26447,7 @@
         </p:sp>
         <p:sp>
           <p:nvSpPr>
-            <p:cNvPr id="436" name="pg436"/>
+            <p:cNvPr id="435" name="pg435"/>
             <p:cNvSpPr/>
             <p:nvPr/>
           </p:nvSpPr>
@@ -26533,7 +26493,7 @@
         </p:sp>
         <p:sp>
           <p:nvSpPr>
-            <p:cNvPr id="437" name="pg437"/>
+            <p:cNvPr id="436" name="pg436"/>
             <p:cNvSpPr/>
             <p:nvPr/>
           </p:nvSpPr>
@@ -26579,7 +26539,7 @@
         </p:sp>
         <p:sp>
           <p:nvSpPr>
-            <p:cNvPr id="438" name="pg438"/>
+            <p:cNvPr id="437" name="pg437"/>
             <p:cNvSpPr/>
             <p:nvPr/>
           </p:nvSpPr>
@@ -26625,7 +26585,7 @@
         </p:sp>
         <p:sp>
           <p:nvSpPr>
-            <p:cNvPr id="439" name="pg439"/>
+            <p:cNvPr id="438" name="pg438"/>
             <p:cNvSpPr/>
             <p:nvPr/>
           </p:nvSpPr>
@@ -26671,7 +26631,7 @@
         </p:sp>
         <p:sp>
           <p:nvSpPr>
-            <p:cNvPr id="440" name="pg440"/>
+            <p:cNvPr id="439" name="pg439"/>
             <p:cNvSpPr/>
             <p:nvPr/>
           </p:nvSpPr>
@@ -26717,7 +26677,7 @@
         </p:sp>
         <p:sp>
           <p:nvSpPr>
-            <p:cNvPr id="441" name="pg441"/>
+            <p:cNvPr id="440" name="pg440"/>
             <p:cNvSpPr/>
             <p:nvPr/>
           </p:nvSpPr>
@@ -26763,7 +26723,7 @@
         </p:sp>
         <p:sp>
           <p:nvSpPr>
-            <p:cNvPr id="442" name="pg442"/>
+            <p:cNvPr id="441" name="pg441"/>
             <p:cNvSpPr/>
             <p:nvPr/>
           </p:nvSpPr>
@@ -26809,7 +26769,7 @@
         </p:sp>
         <p:sp>
           <p:nvSpPr>
-            <p:cNvPr id="443" name="pg443"/>
+            <p:cNvPr id="442" name="pg442"/>
             <p:cNvSpPr/>
             <p:nvPr/>
           </p:nvSpPr>
@@ -26855,7 +26815,7 @@
         </p:sp>
         <p:sp>
           <p:nvSpPr>
-            <p:cNvPr id="444" name="pg444"/>
+            <p:cNvPr id="443" name="pg443"/>
             <p:cNvSpPr/>
             <p:nvPr/>
           </p:nvSpPr>
@@ -26901,7 +26861,7 @@
         </p:sp>
         <p:sp>
           <p:nvSpPr>
-            <p:cNvPr id="445" name="pg445"/>
+            <p:cNvPr id="444" name="pg444"/>
             <p:cNvSpPr/>
             <p:nvPr/>
           </p:nvSpPr>
@@ -26947,7 +26907,7 @@
         </p:sp>
         <p:sp>
           <p:nvSpPr>
-            <p:cNvPr id="446" name="pg446"/>
+            <p:cNvPr id="445" name="pg445"/>
             <p:cNvSpPr/>
             <p:nvPr/>
           </p:nvSpPr>
@@ -26993,7 +26953,7 @@
         </p:sp>
         <p:sp>
           <p:nvSpPr>
-            <p:cNvPr id="447" name="pg447"/>
+            <p:cNvPr id="446" name="pg446"/>
             <p:cNvSpPr/>
             <p:nvPr/>
           </p:nvSpPr>
@@ -27039,7 +26999,7 @@
         </p:sp>
         <p:sp>
           <p:nvSpPr>
-            <p:cNvPr id="448" name="pg448"/>
+            <p:cNvPr id="447" name="pg447"/>
             <p:cNvSpPr/>
             <p:nvPr/>
           </p:nvSpPr>
@@ -27085,7 +27045,7 @@
         </p:sp>
         <p:sp>
           <p:nvSpPr>
-            <p:cNvPr id="449" name="pg449"/>
+            <p:cNvPr id="448" name="pg448"/>
             <p:cNvSpPr/>
             <p:nvPr/>
           </p:nvSpPr>
@@ -27131,7 +27091,7 @@
         </p:sp>
         <p:sp>
           <p:nvSpPr>
-            <p:cNvPr id="450" name="pg450"/>
+            <p:cNvPr id="449" name="pg449"/>
             <p:cNvSpPr/>
             <p:nvPr/>
           </p:nvSpPr>
@@ -27177,7 +27137,7 @@
         </p:sp>
         <p:sp>
           <p:nvSpPr>
-            <p:cNvPr id="451" name="pg451"/>
+            <p:cNvPr id="450" name="pg450"/>
             <p:cNvSpPr/>
             <p:nvPr/>
           </p:nvSpPr>
@@ -27223,7 +27183,7 @@
         </p:sp>
         <p:sp>
           <p:nvSpPr>
-            <p:cNvPr id="452" name="pg452"/>
+            <p:cNvPr id="451" name="pg451"/>
             <p:cNvSpPr/>
             <p:nvPr/>
           </p:nvSpPr>
@@ -27734,7 +27694,7 @@
         </p:sp>
         <p:sp>
           <p:nvSpPr>
-            <p:cNvPr id="453" name="pg453"/>
+            <p:cNvPr id="452" name="pg452"/>
             <p:cNvSpPr/>
             <p:nvPr/>
           </p:nvSpPr>
@@ -27834,7 +27794,7 @@
         </p:sp>
         <p:sp>
           <p:nvSpPr>
-            <p:cNvPr id="454" name="pg454"/>
+            <p:cNvPr id="453" name="pg453"/>
             <p:cNvSpPr/>
             <p:nvPr/>
           </p:nvSpPr>
@@ -27880,7 +27840,7 @@
         </p:sp>
         <p:sp>
           <p:nvSpPr>
-            <p:cNvPr id="455" name="pg455"/>
+            <p:cNvPr id="454" name="pg454"/>
             <p:cNvSpPr/>
             <p:nvPr/>
           </p:nvSpPr>
@@ -27926,7 +27886,7 @@
         </p:sp>
         <p:sp>
           <p:nvSpPr>
-            <p:cNvPr id="456" name="pg456"/>
+            <p:cNvPr id="455" name="pg455"/>
             <p:cNvSpPr/>
             <p:nvPr/>
           </p:nvSpPr>
@@ -27972,7 +27932,7 @@
         </p:sp>
         <p:sp>
           <p:nvSpPr>
-            <p:cNvPr id="457" name="pg457"/>
+            <p:cNvPr id="456" name="pg456"/>
             <p:cNvSpPr/>
             <p:nvPr/>
           </p:nvSpPr>
@@ -28018,7 +27978,7 @@
         </p:sp>
         <p:sp>
           <p:nvSpPr>
-            <p:cNvPr id="458" name="pg458"/>
+            <p:cNvPr id="457" name="pg457"/>
             <p:cNvSpPr/>
             <p:nvPr/>
           </p:nvSpPr>
@@ -28064,7 +28024,7 @@
         </p:sp>
         <p:sp>
           <p:nvSpPr>
-            <p:cNvPr id="459" name="pg459"/>
+            <p:cNvPr id="458" name="pg458"/>
             <p:cNvSpPr/>
             <p:nvPr/>
           </p:nvSpPr>
@@ -28110,7 +28070,7 @@
         </p:sp>
         <p:sp>
           <p:nvSpPr>
-            <p:cNvPr id="460" name="pg460"/>
+            <p:cNvPr id="459" name="pg459"/>
             <p:cNvSpPr/>
             <p:nvPr/>
           </p:nvSpPr>
@@ -28156,7 +28116,7 @@
         </p:sp>
         <p:sp>
           <p:nvSpPr>
-            <p:cNvPr id="461" name="pg461"/>
+            <p:cNvPr id="460" name="pg460"/>
             <p:cNvSpPr/>
             <p:nvPr/>
           </p:nvSpPr>
@@ -28202,7 +28162,7 @@
         </p:sp>
         <p:sp>
           <p:nvSpPr>
-            <p:cNvPr id="462" name="pg462"/>
+            <p:cNvPr id="461" name="pg461"/>
             <p:cNvSpPr/>
             <p:nvPr/>
           </p:nvSpPr>
@@ -28248,7 +28208,7 @@
         </p:sp>
         <p:sp>
           <p:nvSpPr>
-            <p:cNvPr id="463" name="pg463"/>
+            <p:cNvPr id="462" name="pg462"/>
             <p:cNvSpPr/>
             <p:nvPr/>
           </p:nvSpPr>
@@ -28294,7 +28254,7 @@
         </p:sp>
         <p:sp>
           <p:nvSpPr>
-            <p:cNvPr id="464" name="pg464"/>
+            <p:cNvPr id="463" name="pg463"/>
             <p:cNvSpPr/>
             <p:nvPr/>
           </p:nvSpPr>
@@ -28385,7 +28345,7 @@
         </p:sp>
         <p:sp>
           <p:nvSpPr>
-            <p:cNvPr id="465" name="pg465"/>
+            <p:cNvPr id="464" name="pg464"/>
             <p:cNvSpPr/>
             <p:nvPr/>
           </p:nvSpPr>
@@ -28431,7 +28391,7 @@
         </p:sp>
         <p:sp>
           <p:nvSpPr>
-            <p:cNvPr id="466" name="pg466"/>
+            <p:cNvPr id="465" name="pg465"/>
             <p:cNvSpPr/>
             <p:nvPr/>
           </p:nvSpPr>
@@ -28477,7 +28437,7 @@
         </p:sp>
         <p:sp>
           <p:nvSpPr>
-            <p:cNvPr id="467" name="pg467"/>
+            <p:cNvPr id="466" name="pg466"/>
             <p:cNvSpPr/>
             <p:nvPr/>
           </p:nvSpPr>
@@ -28523,7 +28483,7 @@
         </p:sp>
         <p:sp>
           <p:nvSpPr>
-            <p:cNvPr id="468" name="pg468"/>
+            <p:cNvPr id="467" name="pg467"/>
             <p:cNvSpPr/>
             <p:nvPr/>
           </p:nvSpPr>
@@ -28569,7 +28529,7 @@
         </p:sp>
         <p:sp>
           <p:nvSpPr>
-            <p:cNvPr id="469" name="pg469"/>
+            <p:cNvPr id="468" name="pg468"/>
             <p:cNvSpPr/>
             <p:nvPr/>
           </p:nvSpPr>
@@ -28615,7 +28575,7 @@
         </p:sp>
         <p:sp>
           <p:nvSpPr>
-            <p:cNvPr id="470" name="pg470"/>
+            <p:cNvPr id="469" name="pg469"/>
             <p:cNvSpPr/>
             <p:nvPr/>
           </p:nvSpPr>
@@ -28661,7 +28621,7 @@
         </p:sp>
         <p:sp>
           <p:nvSpPr>
-            <p:cNvPr id="471" name="pg471"/>
+            <p:cNvPr id="470" name="pg470"/>
             <p:cNvSpPr/>
             <p:nvPr/>
           </p:nvSpPr>
@@ -28707,7 +28667,7 @@
         </p:sp>
         <p:sp>
           <p:nvSpPr>
-            <p:cNvPr id="472" name="pg472"/>
+            <p:cNvPr id="471" name="pg471"/>
             <p:cNvSpPr/>
             <p:nvPr/>
           </p:nvSpPr>
@@ -28753,7 +28713,7 @@
         </p:sp>
         <p:sp>
           <p:nvSpPr>
-            <p:cNvPr id="473" name="pg473"/>
+            <p:cNvPr id="472" name="pg472"/>
             <p:cNvSpPr/>
             <p:nvPr/>
           </p:nvSpPr>
@@ -28799,7 +28759,7 @@
         </p:sp>
         <p:sp>
           <p:nvSpPr>
-            <p:cNvPr id="474" name="pg474"/>
+            <p:cNvPr id="473" name="pg473"/>
             <p:cNvSpPr/>
             <p:nvPr/>
           </p:nvSpPr>
@@ -28845,7 +28805,7 @@
         </p:sp>
         <p:sp>
           <p:nvSpPr>
-            <p:cNvPr id="475" name="pg475"/>
+            <p:cNvPr id="474" name="pg474"/>
             <p:cNvSpPr/>
             <p:nvPr/>
           </p:nvSpPr>
@@ -28891,7 +28851,7 @@
         </p:sp>
         <p:sp>
           <p:nvSpPr>
-            <p:cNvPr id="476" name="pg476"/>
+            <p:cNvPr id="475" name="pg475"/>
             <p:cNvSpPr/>
             <p:nvPr/>
           </p:nvSpPr>
@@ -28937,7 +28897,7 @@
         </p:sp>
         <p:sp>
           <p:nvSpPr>
-            <p:cNvPr id="477" name="pg477"/>
+            <p:cNvPr id="476" name="pg476"/>
             <p:cNvSpPr/>
             <p:nvPr/>
           </p:nvSpPr>
@@ -28983,7 +28943,7 @@
         </p:sp>
         <p:sp>
           <p:nvSpPr>
-            <p:cNvPr id="478" name="pg478"/>
+            <p:cNvPr id="477" name="pg477"/>
             <p:cNvSpPr/>
             <p:nvPr/>
           </p:nvSpPr>
@@ -29029,7 +28989,7 @@
         </p:sp>
         <p:sp>
           <p:nvSpPr>
-            <p:cNvPr id="479" name="pg479"/>
+            <p:cNvPr id="478" name="pg478"/>
             <p:cNvSpPr/>
             <p:nvPr/>
           </p:nvSpPr>
@@ -29075,7 +29035,7 @@
         </p:sp>
         <p:sp>
           <p:nvSpPr>
-            <p:cNvPr id="480" name="pg480"/>
+            <p:cNvPr id="479" name="pg479"/>
             <p:cNvSpPr/>
             <p:nvPr/>
           </p:nvSpPr>
@@ -29121,7 +29081,7 @@
         </p:sp>
         <p:sp>
           <p:nvSpPr>
-            <p:cNvPr id="481" name="pg481"/>
+            <p:cNvPr id="480" name="pg480"/>
             <p:cNvSpPr/>
             <p:nvPr/>
           </p:nvSpPr>
@@ -29713,7 +29673,7 @@
         </p:sp>
         <p:sp>
           <p:nvSpPr>
-            <p:cNvPr id="482" name="pg482"/>
+            <p:cNvPr id="481" name="pg481"/>
             <p:cNvSpPr/>
             <p:nvPr/>
           </p:nvSpPr>
@@ -29759,7 +29719,7 @@
         </p:sp>
         <p:sp>
           <p:nvSpPr>
-            <p:cNvPr id="483" name="pg483"/>
+            <p:cNvPr id="482" name="pg482"/>
             <p:cNvSpPr/>
             <p:nvPr/>
           </p:nvSpPr>
@@ -29805,7 +29765,7 @@
         </p:sp>
         <p:sp>
           <p:nvSpPr>
-            <p:cNvPr id="484" name="pg484"/>
+            <p:cNvPr id="483" name="pg483"/>
             <p:cNvSpPr/>
             <p:nvPr/>
           </p:nvSpPr>
@@ -29851,7 +29811,7 @@
         </p:sp>
         <p:sp>
           <p:nvSpPr>
-            <p:cNvPr id="485" name="pg485"/>
+            <p:cNvPr id="484" name="pg484"/>
             <p:cNvSpPr/>
             <p:nvPr/>
           </p:nvSpPr>
@@ -29897,7 +29857,7 @@
         </p:sp>
         <p:sp>
           <p:nvSpPr>
-            <p:cNvPr id="486" name="pg486"/>
+            <p:cNvPr id="485" name="pg485"/>
             <p:cNvSpPr/>
             <p:nvPr/>
           </p:nvSpPr>
@@ -29943,7 +29903,7 @@
         </p:sp>
         <p:sp>
           <p:nvSpPr>
-            <p:cNvPr id="487" name="pg487"/>
+            <p:cNvPr id="486" name="pg486"/>
             <p:cNvSpPr/>
             <p:nvPr/>
           </p:nvSpPr>
@@ -29989,7 +29949,7 @@
         </p:sp>
         <p:sp>
           <p:nvSpPr>
-            <p:cNvPr id="488" name="pg488"/>
+            <p:cNvPr id="487" name="pg487"/>
             <p:cNvSpPr/>
             <p:nvPr/>
           </p:nvSpPr>
@@ -30035,7 +29995,7 @@
         </p:sp>
         <p:sp>
           <p:nvSpPr>
-            <p:cNvPr id="489" name="pg489"/>
+            <p:cNvPr id="488" name="pg488"/>
             <p:cNvSpPr/>
             <p:nvPr/>
           </p:nvSpPr>
@@ -30081,7 +30041,7 @@
         </p:sp>
         <p:sp>
           <p:nvSpPr>
-            <p:cNvPr id="490" name="pg490"/>
+            <p:cNvPr id="489" name="pg489"/>
             <p:cNvSpPr/>
             <p:nvPr/>
           </p:nvSpPr>
@@ -30127,7 +30087,7 @@
         </p:sp>
         <p:sp>
           <p:nvSpPr>
-            <p:cNvPr id="491" name="pg491"/>
+            <p:cNvPr id="490" name="pg490"/>
             <p:cNvSpPr/>
             <p:nvPr/>
           </p:nvSpPr>
@@ -30173,7 +30133,7 @@
         </p:sp>
         <p:sp>
           <p:nvSpPr>
-            <p:cNvPr id="492" name="pg492"/>
+            <p:cNvPr id="491" name="pg491"/>
             <p:cNvSpPr/>
             <p:nvPr/>
           </p:nvSpPr>
@@ -30219,7 +30179,7 @@
         </p:sp>
         <p:sp>
           <p:nvSpPr>
-            <p:cNvPr id="493" name="pg493"/>
+            <p:cNvPr id="492" name="pg492"/>
             <p:cNvSpPr/>
             <p:nvPr/>
           </p:nvSpPr>
@@ -30325,7 +30285,7 @@
         </p:sp>
         <p:sp>
           <p:nvSpPr>
-            <p:cNvPr id="494" name="pg494"/>
+            <p:cNvPr id="493" name="pg493"/>
             <p:cNvSpPr/>
             <p:nvPr/>
           </p:nvSpPr>
@@ -30371,7 +30331,7 @@
         </p:sp>
         <p:sp>
           <p:nvSpPr>
-            <p:cNvPr id="495" name="pg495"/>
+            <p:cNvPr id="494" name="pg494"/>
             <p:cNvSpPr/>
             <p:nvPr/>
           </p:nvSpPr>
@@ -30417,7 +30377,7 @@
         </p:sp>
         <p:sp>
           <p:nvSpPr>
-            <p:cNvPr id="496" name="pg496"/>
+            <p:cNvPr id="495" name="pg495"/>
             <p:cNvSpPr/>
             <p:nvPr/>
           </p:nvSpPr>
@@ -30463,7 +30423,7 @@
         </p:sp>
         <p:sp>
           <p:nvSpPr>
-            <p:cNvPr id="497" name="pg497"/>
+            <p:cNvPr id="496" name="pg496"/>
             <p:cNvSpPr/>
             <p:nvPr/>
           </p:nvSpPr>
@@ -30509,7 +30469,7 @@
         </p:sp>
         <p:sp>
           <p:nvSpPr>
-            <p:cNvPr id="498" name="pg498"/>
+            <p:cNvPr id="497" name="pg497"/>
             <p:cNvSpPr/>
             <p:nvPr/>
           </p:nvSpPr>
@@ -30555,7 +30515,7 @@
         </p:sp>
         <p:sp>
           <p:nvSpPr>
-            <p:cNvPr id="499" name="pg499"/>
+            <p:cNvPr id="498" name="pg498"/>
             <p:cNvSpPr/>
             <p:nvPr/>
           </p:nvSpPr>
@@ -30601,7 +30561,7 @@
         </p:sp>
         <p:sp>
           <p:nvSpPr>
-            <p:cNvPr id="500" name="pg500"/>
+            <p:cNvPr id="499" name="pg499"/>
             <p:cNvSpPr/>
             <p:nvPr/>
           </p:nvSpPr>
@@ -30647,7 +30607,7 @@
         </p:sp>
         <p:sp>
           <p:nvSpPr>
-            <p:cNvPr id="501" name="pg501"/>
+            <p:cNvPr id="500" name="pg500"/>
             <p:cNvSpPr/>
             <p:nvPr/>
           </p:nvSpPr>
@@ -30693,7 +30653,7 @@
         </p:sp>
         <p:sp>
           <p:nvSpPr>
-            <p:cNvPr id="502" name="pg502"/>
+            <p:cNvPr id="501" name="pg501"/>
             <p:cNvSpPr/>
             <p:nvPr/>
           </p:nvSpPr>
@@ -30739,7 +30699,7 @@
         </p:sp>
         <p:sp>
           <p:nvSpPr>
-            <p:cNvPr id="503" name="pg503"/>
+            <p:cNvPr id="502" name="pg502"/>
             <p:cNvSpPr/>
             <p:nvPr/>
           </p:nvSpPr>
@@ -30785,7 +30745,7 @@
         </p:sp>
         <p:sp>
           <p:nvSpPr>
-            <p:cNvPr id="504" name="pg504"/>
+            <p:cNvPr id="503" name="pg503"/>
             <p:cNvSpPr/>
             <p:nvPr/>
           </p:nvSpPr>
@@ -30831,7 +30791,7 @@
         </p:sp>
         <p:sp>
           <p:nvSpPr>
-            <p:cNvPr id="505" name="pg505"/>
+            <p:cNvPr id="504" name="pg504"/>
             <p:cNvSpPr/>
             <p:nvPr/>
           </p:nvSpPr>
@@ -30877,7 +30837,7 @@
         </p:sp>
         <p:sp>
           <p:nvSpPr>
-            <p:cNvPr id="506" name="pg506"/>
+            <p:cNvPr id="505" name="pg505"/>
             <p:cNvSpPr/>
             <p:nvPr/>
           </p:nvSpPr>
@@ -30923,7 +30883,7 @@
         </p:sp>
         <p:sp>
           <p:nvSpPr>
-            <p:cNvPr id="507" name="pg507"/>
+            <p:cNvPr id="506" name="pg506"/>
             <p:cNvSpPr/>
             <p:nvPr/>
           </p:nvSpPr>
@@ -30969,7 +30929,7 @@
         </p:sp>
         <p:sp>
           <p:nvSpPr>
-            <p:cNvPr id="508" name="pg508"/>
+            <p:cNvPr id="507" name="pg507"/>
             <p:cNvSpPr/>
             <p:nvPr/>
           </p:nvSpPr>
@@ -31537,7 +31497,7 @@
         </p:sp>
         <p:sp>
           <p:nvSpPr>
-            <p:cNvPr id="509" name="pg509"/>
+            <p:cNvPr id="508" name="pg508"/>
             <p:cNvSpPr/>
             <p:nvPr/>
           </p:nvSpPr>
@@ -31589,7 +31549,7 @@
         </p:sp>
         <p:sp>
           <p:nvSpPr>
-            <p:cNvPr id="510" name="pg510"/>
+            <p:cNvPr id="509" name="pg509"/>
             <p:cNvSpPr/>
             <p:nvPr/>
           </p:nvSpPr>
@@ -31635,7 +31595,7 @@
         </p:sp>
         <p:sp>
           <p:nvSpPr>
-            <p:cNvPr id="511" name="pg511"/>
+            <p:cNvPr id="510" name="pg510"/>
             <p:cNvSpPr/>
             <p:nvPr/>
           </p:nvSpPr>
@@ -31681,7 +31641,7 @@
         </p:sp>
         <p:sp>
           <p:nvSpPr>
-            <p:cNvPr id="512" name="pg512"/>
+            <p:cNvPr id="511" name="pg511"/>
             <p:cNvSpPr/>
             <p:nvPr/>
           </p:nvSpPr>
@@ -31727,7 +31687,7 @@
         </p:sp>
         <p:sp>
           <p:nvSpPr>
-            <p:cNvPr id="513" name="pg513"/>
+            <p:cNvPr id="512" name="pg512"/>
             <p:cNvSpPr/>
             <p:nvPr/>
           </p:nvSpPr>
@@ -31773,7 +31733,7 @@
         </p:sp>
         <p:sp>
           <p:nvSpPr>
-            <p:cNvPr id="514" name="pg514"/>
+            <p:cNvPr id="513" name="pg513"/>
             <p:cNvSpPr/>
             <p:nvPr/>
           </p:nvSpPr>
@@ -31819,7 +31779,7 @@
         </p:sp>
         <p:sp>
           <p:nvSpPr>
-            <p:cNvPr id="515" name="pg515"/>
+            <p:cNvPr id="514" name="pg514"/>
             <p:cNvSpPr/>
             <p:nvPr/>
           </p:nvSpPr>
@@ -31865,7 +31825,7 @@
         </p:sp>
         <p:sp>
           <p:nvSpPr>
-            <p:cNvPr id="516" name="pg516"/>
+            <p:cNvPr id="515" name="pg515"/>
             <p:cNvSpPr/>
             <p:nvPr/>
           </p:nvSpPr>
@@ -31911,7 +31871,7 @@
         </p:sp>
         <p:sp>
           <p:nvSpPr>
-            <p:cNvPr id="517" name="pg517"/>
+            <p:cNvPr id="516" name="pg516"/>
             <p:cNvSpPr/>
             <p:nvPr/>
           </p:nvSpPr>
@@ -31957,7 +31917,7 @@
         </p:sp>
         <p:sp>
           <p:nvSpPr>
-            <p:cNvPr id="518" name="pg518"/>
+            <p:cNvPr id="517" name="pg517"/>
             <p:cNvSpPr/>
             <p:nvPr/>
           </p:nvSpPr>
@@ -32003,7 +31963,7 @@
         </p:sp>
         <p:sp>
           <p:nvSpPr>
-            <p:cNvPr id="519" name="pg519"/>
+            <p:cNvPr id="518" name="pg518"/>
             <p:cNvSpPr/>
             <p:nvPr/>
           </p:nvSpPr>
@@ -32049,7 +32009,7 @@
         </p:sp>
         <p:sp>
           <p:nvSpPr>
-            <p:cNvPr id="520" name="pg520"/>
+            <p:cNvPr id="519" name="pg519"/>
             <p:cNvSpPr/>
             <p:nvPr/>
           </p:nvSpPr>
@@ -32095,7 +32055,7 @@
         </p:sp>
         <p:sp>
           <p:nvSpPr>
-            <p:cNvPr id="521" name="pg521"/>
+            <p:cNvPr id="520" name="pg520"/>
             <p:cNvSpPr/>
             <p:nvPr/>
           </p:nvSpPr>
@@ -32141,7 +32101,7 @@
         </p:sp>
         <p:sp>
           <p:nvSpPr>
-            <p:cNvPr id="522" name="pg522"/>
+            <p:cNvPr id="521" name="pg521"/>
             <p:cNvSpPr/>
             <p:nvPr/>
           </p:nvSpPr>
@@ -32649,7 +32609,7 @@
         </p:sp>
         <p:sp>
           <p:nvSpPr>
-            <p:cNvPr id="523" name="pg523"/>
+            <p:cNvPr id="522" name="pg522"/>
             <p:cNvSpPr/>
             <p:nvPr/>
           </p:nvSpPr>
@@ -32695,7 +32655,7 @@
         </p:sp>
         <p:sp>
           <p:nvSpPr>
-            <p:cNvPr id="524" name="pg524"/>
+            <p:cNvPr id="523" name="pg523"/>
             <p:cNvSpPr/>
             <p:nvPr/>
           </p:nvSpPr>
@@ -32741,7 +32701,7 @@
         </p:sp>
         <p:sp>
           <p:nvSpPr>
-            <p:cNvPr id="525" name="pg525"/>
+            <p:cNvPr id="524" name="pg524"/>
             <p:cNvSpPr/>
             <p:nvPr/>
           </p:nvSpPr>
@@ -32787,7 +32747,7 @@
         </p:sp>
         <p:sp>
           <p:nvSpPr>
-            <p:cNvPr id="526" name="pg526"/>
+            <p:cNvPr id="525" name="pg525"/>
             <p:cNvSpPr/>
             <p:nvPr/>
           </p:nvSpPr>
@@ -32833,7 +32793,7 @@
         </p:sp>
         <p:sp>
           <p:nvSpPr>
-            <p:cNvPr id="527" name="pg527"/>
+            <p:cNvPr id="526" name="pg526"/>
             <p:cNvSpPr/>
             <p:nvPr/>
           </p:nvSpPr>
@@ -32879,7 +32839,7 @@
         </p:sp>
         <p:sp>
           <p:nvSpPr>
-            <p:cNvPr id="528" name="pg528"/>
+            <p:cNvPr id="527" name="pg527"/>
             <p:cNvSpPr/>
             <p:nvPr/>
           </p:nvSpPr>
@@ -32925,7 +32885,7 @@
         </p:sp>
         <p:sp>
           <p:nvSpPr>
-            <p:cNvPr id="529" name="pg529"/>
+            <p:cNvPr id="528" name="pg528"/>
             <p:cNvSpPr/>
             <p:nvPr/>
           </p:nvSpPr>
@@ -32971,7 +32931,7 @@
         </p:sp>
         <p:sp>
           <p:nvSpPr>
-            <p:cNvPr id="530" name="pg530"/>
+            <p:cNvPr id="529" name="pg529"/>
             <p:cNvSpPr/>
             <p:nvPr/>
           </p:nvSpPr>
@@ -33017,7 +32977,7 @@
         </p:sp>
         <p:sp>
           <p:nvSpPr>
-            <p:cNvPr id="531" name="pg531"/>
+            <p:cNvPr id="530" name="pg530"/>
             <p:cNvSpPr/>
             <p:nvPr/>
           </p:nvSpPr>
@@ -33063,7 +33023,7 @@
         </p:sp>
         <p:sp>
           <p:nvSpPr>
-            <p:cNvPr id="532" name="pg532"/>
+            <p:cNvPr id="531" name="pg531"/>
             <p:cNvSpPr/>
             <p:nvPr/>
           </p:nvSpPr>
@@ -33109,7 +33069,7 @@
         </p:sp>
         <p:sp>
           <p:nvSpPr>
-            <p:cNvPr id="533" name="pg533"/>
+            <p:cNvPr id="532" name="pg532"/>
             <p:cNvSpPr/>
             <p:nvPr/>
           </p:nvSpPr>
@@ -33155,7 +33115,7 @@
         </p:sp>
         <p:sp>
           <p:nvSpPr>
-            <p:cNvPr id="534" name="pg534"/>
+            <p:cNvPr id="533" name="pg533"/>
             <p:cNvSpPr/>
             <p:nvPr/>
           </p:nvSpPr>
@@ -33201,7 +33161,7 @@
         </p:sp>
         <p:sp>
           <p:nvSpPr>
-            <p:cNvPr id="535" name="pg535"/>
+            <p:cNvPr id="534" name="pg534"/>
             <p:cNvSpPr/>
             <p:nvPr/>
           </p:nvSpPr>
@@ -33247,7 +33207,7 @@
         </p:sp>
         <p:sp>
           <p:nvSpPr>
-            <p:cNvPr id="536" name="pg536"/>
+            <p:cNvPr id="535" name="pg535"/>
             <p:cNvSpPr/>
             <p:nvPr/>
           </p:nvSpPr>
@@ -33395,7 +33355,7 @@
         </p:sp>
         <p:sp>
           <p:nvSpPr>
-            <p:cNvPr id="537" name="pg537"/>
+            <p:cNvPr id="536" name="pg536"/>
             <p:cNvSpPr/>
             <p:nvPr/>
           </p:nvSpPr>
@@ -33462,7 +33422,7 @@
         </p:sp>
         <p:sp>
           <p:nvSpPr>
-            <p:cNvPr id="538" name="pg538"/>
+            <p:cNvPr id="537" name="pg537"/>
             <p:cNvSpPr/>
             <p:nvPr/>
           </p:nvSpPr>
@@ -33508,7 +33468,7 @@
         </p:sp>
         <p:sp>
           <p:nvSpPr>
-            <p:cNvPr id="539" name="pg539"/>
+            <p:cNvPr id="538" name="pg538"/>
             <p:cNvSpPr/>
             <p:nvPr/>
           </p:nvSpPr>
@@ -33554,7 +33514,7 @@
         </p:sp>
         <p:sp>
           <p:nvSpPr>
-            <p:cNvPr id="540" name="pg540"/>
+            <p:cNvPr id="539" name="pg539"/>
             <p:cNvSpPr/>
             <p:nvPr/>
           </p:nvSpPr>
@@ -33600,7 +33560,7 @@
         </p:sp>
         <p:sp>
           <p:nvSpPr>
-            <p:cNvPr id="541" name="pg541"/>
+            <p:cNvPr id="540" name="pg540"/>
             <p:cNvSpPr/>
             <p:nvPr/>
           </p:nvSpPr>
@@ -33646,7 +33606,7 @@
         </p:sp>
         <p:sp>
           <p:nvSpPr>
-            <p:cNvPr id="542" name="pg542"/>
+            <p:cNvPr id="541" name="pg541"/>
             <p:cNvSpPr/>
             <p:nvPr/>
           </p:nvSpPr>
@@ -33692,7 +33652,7 @@
         </p:sp>
         <p:sp>
           <p:nvSpPr>
-            <p:cNvPr id="543" name="pg543"/>
+            <p:cNvPr id="542" name="pg542"/>
             <p:cNvSpPr/>
             <p:nvPr/>
           </p:nvSpPr>
@@ -33738,7 +33698,7 @@
         </p:sp>
         <p:sp>
           <p:nvSpPr>
-            <p:cNvPr id="544" name="pg544"/>
+            <p:cNvPr id="543" name="pg543"/>
             <p:cNvSpPr/>
             <p:nvPr/>
           </p:nvSpPr>
@@ -33784,7 +33744,7 @@
         </p:sp>
         <p:sp>
           <p:nvSpPr>
-            <p:cNvPr id="545" name="pg545"/>
+            <p:cNvPr id="544" name="pg544"/>
             <p:cNvSpPr/>
             <p:nvPr/>
           </p:nvSpPr>
@@ -33830,7 +33790,7 @@
         </p:sp>
         <p:sp>
           <p:nvSpPr>
-            <p:cNvPr id="546" name="pg546"/>
+            <p:cNvPr id="545" name="pg545"/>
             <p:cNvSpPr/>
             <p:nvPr/>
           </p:nvSpPr>
@@ -33876,7 +33836,7 @@
         </p:sp>
         <p:sp>
           <p:nvSpPr>
-            <p:cNvPr id="547" name="pg547"/>
+            <p:cNvPr id="546" name="pg546"/>
             <p:cNvSpPr/>
             <p:nvPr/>
           </p:nvSpPr>
@@ -33922,7 +33882,7 @@
         </p:sp>
         <p:sp>
           <p:nvSpPr>
-            <p:cNvPr id="548" name="pg548"/>
+            <p:cNvPr id="547" name="pg547"/>
             <p:cNvSpPr/>
             <p:nvPr/>
           </p:nvSpPr>
@@ -33968,7 +33928,7 @@
         </p:sp>
         <p:sp>
           <p:nvSpPr>
-            <p:cNvPr id="549" name="pg549"/>
+            <p:cNvPr id="548" name="pg548"/>
             <p:cNvSpPr/>
             <p:nvPr/>
           </p:nvSpPr>
@@ -34014,7 +33974,7 @@
         </p:sp>
         <p:sp>
           <p:nvSpPr>
-            <p:cNvPr id="550" name="pg550"/>
+            <p:cNvPr id="549" name="pg549"/>
             <p:cNvSpPr/>
             <p:nvPr/>
           </p:nvSpPr>
@@ -34060,7 +34020,7 @@
         </p:sp>
         <p:sp>
           <p:nvSpPr>
-            <p:cNvPr id="551" name="pg551"/>
+            <p:cNvPr id="550" name="pg550"/>
             <p:cNvSpPr/>
             <p:nvPr/>
           </p:nvSpPr>
@@ -34664,7 +34624,7 @@
         </p:sp>
         <p:sp>
           <p:nvSpPr>
-            <p:cNvPr id="552" name="pg552"/>
+            <p:cNvPr id="551" name="pg551"/>
             <p:cNvSpPr/>
             <p:nvPr/>
           </p:nvSpPr>
@@ -34710,7 +34670,7 @@
         </p:sp>
         <p:sp>
           <p:nvSpPr>
-            <p:cNvPr id="553" name="pg553"/>
+            <p:cNvPr id="552" name="pg552"/>
             <p:cNvSpPr/>
             <p:nvPr/>
           </p:nvSpPr>
@@ -34756,7 +34716,7 @@
         </p:sp>
         <p:sp>
           <p:nvSpPr>
-            <p:cNvPr id="554" name="pg554"/>
+            <p:cNvPr id="553" name="pg553"/>
             <p:cNvSpPr/>
             <p:nvPr/>
           </p:nvSpPr>
@@ -34802,7 +34762,7 @@
         </p:sp>
         <p:sp>
           <p:nvSpPr>
-            <p:cNvPr id="555" name="pg555"/>
+            <p:cNvPr id="554" name="pg554"/>
             <p:cNvSpPr/>
             <p:nvPr/>
           </p:nvSpPr>
@@ -34848,7 +34808,7 @@
         </p:sp>
         <p:sp>
           <p:nvSpPr>
-            <p:cNvPr id="556" name="pg556"/>
+            <p:cNvPr id="555" name="pg555"/>
             <p:cNvSpPr/>
             <p:nvPr/>
           </p:nvSpPr>
@@ -34894,7 +34854,7 @@
         </p:sp>
         <p:sp>
           <p:nvSpPr>
-            <p:cNvPr id="557" name="pg557"/>
+            <p:cNvPr id="556" name="pg556"/>
             <p:cNvSpPr/>
             <p:nvPr/>
           </p:nvSpPr>
@@ -34940,7 +34900,7 @@
         </p:sp>
         <p:sp>
           <p:nvSpPr>
-            <p:cNvPr id="558" name="pg558"/>
+            <p:cNvPr id="557" name="pg557"/>
             <p:cNvSpPr/>
             <p:nvPr/>
           </p:nvSpPr>
@@ -34986,7 +34946,7 @@
         </p:sp>
         <p:sp>
           <p:nvSpPr>
-            <p:cNvPr id="559" name="pg559"/>
+            <p:cNvPr id="558" name="pg558"/>
             <p:cNvSpPr/>
             <p:nvPr/>
           </p:nvSpPr>
@@ -35032,7 +34992,7 @@
         </p:sp>
         <p:sp>
           <p:nvSpPr>
-            <p:cNvPr id="560" name="pg560"/>
+            <p:cNvPr id="559" name="pg559"/>
             <p:cNvSpPr/>
             <p:nvPr/>
           </p:nvSpPr>
@@ -35078,7 +35038,7 @@
         </p:sp>
         <p:sp>
           <p:nvSpPr>
-            <p:cNvPr id="561" name="pg561"/>
+            <p:cNvPr id="560" name="pg560"/>
             <p:cNvSpPr/>
             <p:nvPr/>
           </p:nvSpPr>
@@ -35124,7 +35084,7 @@
         </p:sp>
         <p:sp>
           <p:nvSpPr>
-            <p:cNvPr id="562" name="pg562"/>
+            <p:cNvPr id="561" name="pg561"/>
             <p:cNvSpPr/>
             <p:nvPr/>
           </p:nvSpPr>
@@ -35170,7 +35130,7 @@
         </p:sp>
         <p:sp>
           <p:nvSpPr>
-            <p:cNvPr id="563" name="pg563"/>
+            <p:cNvPr id="562" name="pg562"/>
             <p:cNvSpPr/>
             <p:nvPr/>
           </p:nvSpPr>
@@ -35216,7 +35176,7 @@
         </p:sp>
         <p:sp>
           <p:nvSpPr>
-            <p:cNvPr id="564" name="pg564"/>
+            <p:cNvPr id="563" name="pg563"/>
             <p:cNvSpPr/>
             <p:nvPr/>
           </p:nvSpPr>
@@ -35268,7 +35228,7 @@
         </p:sp>
         <p:sp>
           <p:nvSpPr>
-            <p:cNvPr id="565" name="pg565"/>
+            <p:cNvPr id="564" name="pg564"/>
             <p:cNvSpPr/>
             <p:nvPr/>
           </p:nvSpPr>
@@ -35335,7 +35295,7 @@
         </p:sp>
         <p:sp>
           <p:nvSpPr>
-            <p:cNvPr id="566" name="pg566"/>
+            <p:cNvPr id="565" name="pg565"/>
             <p:cNvSpPr/>
             <p:nvPr/>
           </p:nvSpPr>
@@ -35381,7 +35341,7 @@
         </p:sp>
         <p:sp>
           <p:nvSpPr>
-            <p:cNvPr id="567" name="pg567"/>
+            <p:cNvPr id="566" name="pg566"/>
             <p:cNvSpPr/>
             <p:nvPr/>
           </p:nvSpPr>
@@ -35427,7 +35387,7 @@
         </p:sp>
         <p:sp>
           <p:nvSpPr>
-            <p:cNvPr id="568" name="pg568"/>
+            <p:cNvPr id="567" name="pg567"/>
             <p:cNvSpPr/>
             <p:nvPr/>
           </p:nvSpPr>
@@ -35473,7 +35433,7 @@
         </p:sp>
         <p:sp>
           <p:nvSpPr>
-            <p:cNvPr id="569" name="pg569"/>
+            <p:cNvPr id="568" name="pg568"/>
             <p:cNvSpPr/>
             <p:nvPr/>
           </p:nvSpPr>
@@ -35519,7 +35479,7 @@
         </p:sp>
         <p:sp>
           <p:nvSpPr>
-            <p:cNvPr id="570" name="pg570"/>
+            <p:cNvPr id="569" name="pg569"/>
             <p:cNvSpPr/>
             <p:nvPr/>
           </p:nvSpPr>
@@ -35565,7 +35525,7 @@
         </p:sp>
         <p:sp>
           <p:nvSpPr>
-            <p:cNvPr id="571" name="pg571"/>
+            <p:cNvPr id="570" name="pg570"/>
             <p:cNvSpPr/>
             <p:nvPr/>
           </p:nvSpPr>
@@ -35611,7 +35571,7 @@
         </p:sp>
         <p:sp>
           <p:nvSpPr>
-            <p:cNvPr id="572" name="pg572"/>
+            <p:cNvPr id="571" name="pg571"/>
             <p:cNvSpPr/>
             <p:nvPr/>
           </p:nvSpPr>
@@ -35657,7 +35617,7 @@
         </p:sp>
         <p:sp>
           <p:nvSpPr>
-            <p:cNvPr id="573" name="pg573"/>
+            <p:cNvPr id="572" name="pg572"/>
             <p:cNvSpPr/>
             <p:nvPr/>
           </p:nvSpPr>
@@ -35703,7 +35663,7 @@
         </p:sp>
         <p:sp>
           <p:nvSpPr>
-            <p:cNvPr id="574" name="pg574"/>
+            <p:cNvPr id="573" name="pg573"/>
             <p:cNvSpPr/>
             <p:nvPr/>
           </p:nvSpPr>
@@ -35749,7 +35709,7 @@
         </p:sp>
         <p:sp>
           <p:nvSpPr>
-            <p:cNvPr id="575" name="pg575"/>
+            <p:cNvPr id="574" name="pg574"/>
             <p:cNvSpPr/>
             <p:nvPr/>
           </p:nvSpPr>
@@ -35795,7 +35755,7 @@
         </p:sp>
         <p:sp>
           <p:nvSpPr>
-            <p:cNvPr id="576" name="pg576"/>
+            <p:cNvPr id="575" name="pg575"/>
             <p:cNvSpPr/>
             <p:nvPr/>
           </p:nvSpPr>
@@ -35841,7 +35801,7 @@
         </p:sp>
         <p:sp>
           <p:nvSpPr>
-            <p:cNvPr id="577" name="pg577"/>
+            <p:cNvPr id="576" name="pg576"/>
             <p:cNvSpPr/>
             <p:nvPr/>
           </p:nvSpPr>
@@ -35887,7 +35847,7 @@
         </p:sp>
         <p:sp>
           <p:nvSpPr>
-            <p:cNvPr id="578" name="pg578"/>
+            <p:cNvPr id="577" name="pg577"/>
             <p:cNvSpPr/>
             <p:nvPr/>
           </p:nvSpPr>
@@ -35933,7 +35893,7 @@
         </p:sp>
         <p:sp>
           <p:nvSpPr>
-            <p:cNvPr id="579" name="pg579"/>
+            <p:cNvPr id="578" name="pg578"/>
             <p:cNvSpPr/>
             <p:nvPr/>
           </p:nvSpPr>
@@ -35979,7 +35939,7 @@
         </p:sp>
         <p:sp>
           <p:nvSpPr>
-            <p:cNvPr id="580" name="pg580"/>
+            <p:cNvPr id="579" name="pg579"/>
             <p:cNvSpPr/>
             <p:nvPr/>
           </p:nvSpPr>
@@ -36619,7 +36579,7 @@
         </p:sp>
         <p:sp>
           <p:nvSpPr>
-            <p:cNvPr id="581" name="pg581"/>
+            <p:cNvPr id="580" name="pg580"/>
             <p:cNvSpPr/>
             <p:nvPr/>
           </p:nvSpPr>
@@ -36665,7 +36625,7 @@
         </p:sp>
         <p:sp>
           <p:nvSpPr>
-            <p:cNvPr id="582" name="pg582"/>
+            <p:cNvPr id="581" name="pg581"/>
             <p:cNvSpPr/>
             <p:nvPr/>
           </p:nvSpPr>
@@ -36711,7 +36671,7 @@
         </p:sp>
         <p:sp>
           <p:nvSpPr>
-            <p:cNvPr id="583" name="pg583"/>
+            <p:cNvPr id="582" name="pg582"/>
             <p:cNvSpPr/>
             <p:nvPr/>
           </p:nvSpPr>
@@ -36757,7 +36717,7 @@
         </p:sp>
         <p:sp>
           <p:nvSpPr>
-            <p:cNvPr id="584" name="pg584"/>
+            <p:cNvPr id="583" name="pg583"/>
             <p:cNvSpPr/>
             <p:nvPr/>
           </p:nvSpPr>
@@ -36803,7 +36763,7 @@
         </p:sp>
         <p:sp>
           <p:nvSpPr>
-            <p:cNvPr id="585" name="pg585"/>
+            <p:cNvPr id="584" name="pg584"/>
             <p:cNvSpPr/>
             <p:nvPr/>
           </p:nvSpPr>
@@ -36849,7 +36809,7 @@
         </p:sp>
         <p:sp>
           <p:nvSpPr>
-            <p:cNvPr id="586" name="pg586"/>
+            <p:cNvPr id="585" name="pg585"/>
             <p:cNvSpPr/>
             <p:nvPr/>
           </p:nvSpPr>
@@ -36895,7 +36855,7 @@
         </p:sp>
         <p:sp>
           <p:nvSpPr>
-            <p:cNvPr id="587" name="pg587"/>
+            <p:cNvPr id="586" name="pg586"/>
             <p:cNvSpPr/>
             <p:nvPr/>
           </p:nvSpPr>
@@ -36941,7 +36901,7 @@
         </p:sp>
         <p:sp>
           <p:nvSpPr>
-            <p:cNvPr id="588" name="pg588"/>
+            <p:cNvPr id="587" name="pg587"/>
             <p:cNvSpPr/>
             <p:nvPr/>
           </p:nvSpPr>
@@ -36987,7 +36947,7 @@
         </p:sp>
         <p:sp>
           <p:nvSpPr>
-            <p:cNvPr id="589" name="pg589"/>
+            <p:cNvPr id="588" name="pg588"/>
             <p:cNvSpPr/>
             <p:nvPr/>
           </p:nvSpPr>
@@ -37033,7 +36993,7 @@
         </p:sp>
         <p:sp>
           <p:nvSpPr>
-            <p:cNvPr id="590" name="pg590"/>
+            <p:cNvPr id="589" name="pg589"/>
             <p:cNvSpPr/>
             <p:nvPr/>
           </p:nvSpPr>
@@ -37079,7 +37039,7 @@
         </p:sp>
         <p:sp>
           <p:nvSpPr>
-            <p:cNvPr id="591" name="pg591"/>
+            <p:cNvPr id="590" name="pg590"/>
             <p:cNvSpPr/>
             <p:nvPr/>
           </p:nvSpPr>
@@ -37125,7 +37085,7 @@
         </p:sp>
         <p:sp>
           <p:nvSpPr>
-            <p:cNvPr id="592" name="pg592"/>
+            <p:cNvPr id="591" name="pg591"/>
             <p:cNvSpPr/>
             <p:nvPr/>
           </p:nvSpPr>
@@ -37174,7 +37134,7 @@
         </p:sp>
         <p:sp>
           <p:nvSpPr>
-            <p:cNvPr id="593" name="pg593"/>
+            <p:cNvPr id="592" name="pg592"/>
             <p:cNvSpPr/>
             <p:nvPr/>
           </p:nvSpPr>
@@ -37220,7 +37180,7 @@
         </p:sp>
         <p:sp>
           <p:nvSpPr>
-            <p:cNvPr id="594" name="pg594"/>
+            <p:cNvPr id="593" name="pg593"/>
             <p:cNvSpPr/>
             <p:nvPr/>
           </p:nvSpPr>
@@ -37266,7 +37226,7 @@
         </p:sp>
         <p:sp>
           <p:nvSpPr>
-            <p:cNvPr id="595" name="pg595"/>
+            <p:cNvPr id="594" name="pg594"/>
             <p:cNvSpPr/>
             <p:nvPr/>
           </p:nvSpPr>
@@ -37312,7 +37272,7 @@
         </p:sp>
         <p:sp>
           <p:nvSpPr>
-            <p:cNvPr id="596" name="pg596"/>
+            <p:cNvPr id="595" name="pg595"/>
             <p:cNvSpPr/>
             <p:nvPr/>
           </p:nvSpPr>
@@ -37358,7 +37318,7 @@
         </p:sp>
         <p:sp>
           <p:nvSpPr>
-            <p:cNvPr id="597" name="pg597"/>
+            <p:cNvPr id="596" name="pg596"/>
             <p:cNvSpPr/>
             <p:nvPr/>
           </p:nvSpPr>
@@ -37404,7 +37364,7 @@
         </p:sp>
         <p:sp>
           <p:nvSpPr>
-            <p:cNvPr id="598" name="pg598"/>
+            <p:cNvPr id="597" name="pg597"/>
             <p:cNvSpPr/>
             <p:nvPr/>
           </p:nvSpPr>
@@ -37450,7 +37410,7 @@
         </p:sp>
         <p:sp>
           <p:nvSpPr>
-            <p:cNvPr id="599" name="pg599"/>
+            <p:cNvPr id="598" name="pg598"/>
             <p:cNvSpPr/>
             <p:nvPr/>
           </p:nvSpPr>
@@ -37496,7 +37456,7 @@
         </p:sp>
         <p:sp>
           <p:nvSpPr>
-            <p:cNvPr id="600" name="pg600"/>
+            <p:cNvPr id="599" name="pg599"/>
             <p:cNvSpPr/>
             <p:nvPr/>
           </p:nvSpPr>
@@ -37542,7 +37502,7 @@
         </p:sp>
         <p:sp>
           <p:nvSpPr>
-            <p:cNvPr id="601" name="pg601"/>
+            <p:cNvPr id="600" name="pg600"/>
             <p:cNvSpPr/>
             <p:nvPr/>
           </p:nvSpPr>
@@ -37588,7 +37548,7 @@
         </p:sp>
         <p:sp>
           <p:nvSpPr>
-            <p:cNvPr id="602" name="pg602"/>
+            <p:cNvPr id="601" name="pg601"/>
             <p:cNvSpPr/>
             <p:nvPr/>
           </p:nvSpPr>
@@ -37634,7 +37594,7 @@
         </p:sp>
         <p:sp>
           <p:nvSpPr>
-            <p:cNvPr id="603" name="pg603"/>
+            <p:cNvPr id="602" name="pg602"/>
             <p:cNvSpPr/>
             <p:nvPr/>
           </p:nvSpPr>
@@ -37680,7 +37640,7 @@
         </p:sp>
         <p:sp>
           <p:nvSpPr>
-            <p:cNvPr id="604" name="pg604"/>
+            <p:cNvPr id="603" name="pg603"/>
             <p:cNvSpPr/>
             <p:nvPr/>
           </p:nvSpPr>
@@ -37726,7 +37686,7 @@
         </p:sp>
         <p:sp>
           <p:nvSpPr>
-            <p:cNvPr id="605" name="pg605"/>
+            <p:cNvPr id="604" name="pg604"/>
             <p:cNvSpPr/>
             <p:nvPr/>
           </p:nvSpPr>
@@ -37772,7 +37732,7 @@
         </p:sp>
         <p:sp>
           <p:nvSpPr>
-            <p:cNvPr id="606" name="pg606"/>
+            <p:cNvPr id="605" name="pg605"/>
             <p:cNvSpPr/>
             <p:nvPr/>
           </p:nvSpPr>
@@ -37818,7 +37778,7 @@
         </p:sp>
         <p:sp>
           <p:nvSpPr>
-            <p:cNvPr id="607" name="pg607"/>
+            <p:cNvPr id="606" name="pg606"/>
             <p:cNvSpPr/>
             <p:nvPr/>
           </p:nvSpPr>
@@ -37864,7 +37824,7 @@
         </p:sp>
         <p:sp>
           <p:nvSpPr>
-            <p:cNvPr id="608" name="pg608"/>
+            <p:cNvPr id="607" name="pg607"/>
             <p:cNvSpPr/>
             <p:nvPr/>
           </p:nvSpPr>
@@ -37910,7 +37870,7 @@
         </p:sp>
         <p:sp>
           <p:nvSpPr>
-            <p:cNvPr id="609" name="pg609"/>
+            <p:cNvPr id="608" name="pg608"/>
             <p:cNvSpPr/>
             <p:nvPr/>
           </p:nvSpPr>
@@ -38550,7 +38510,7 @@
         </p:sp>
         <p:sp>
           <p:nvSpPr>
-            <p:cNvPr id="610" name="pg610"/>
+            <p:cNvPr id="609" name="pg609"/>
             <p:cNvSpPr/>
             <p:nvPr/>
           </p:nvSpPr>
@@ -38596,7 +38556,7 @@
         </p:sp>
         <p:sp>
           <p:nvSpPr>
-            <p:cNvPr id="611" name="pg611"/>
+            <p:cNvPr id="610" name="pg610"/>
             <p:cNvSpPr/>
             <p:nvPr/>
           </p:nvSpPr>
@@ -38642,7 +38602,7 @@
         </p:sp>
         <p:sp>
           <p:nvSpPr>
-            <p:cNvPr id="612" name="pg612"/>
+            <p:cNvPr id="611" name="pg611"/>
             <p:cNvSpPr/>
             <p:nvPr/>
           </p:nvSpPr>
@@ -38688,7 +38648,7 @@
         </p:sp>
         <p:sp>
           <p:nvSpPr>
-            <p:cNvPr id="613" name="pg613"/>
+            <p:cNvPr id="612" name="pg612"/>
             <p:cNvSpPr/>
             <p:nvPr/>
           </p:nvSpPr>
@@ -38734,7 +38694,7 @@
         </p:sp>
         <p:sp>
           <p:nvSpPr>
-            <p:cNvPr id="614" name="pg614"/>
+            <p:cNvPr id="613" name="pg613"/>
             <p:cNvSpPr/>
             <p:nvPr/>
           </p:nvSpPr>
@@ -38780,7 +38740,7 @@
         </p:sp>
         <p:sp>
           <p:nvSpPr>
-            <p:cNvPr id="615" name="pg615"/>
+            <p:cNvPr id="614" name="pg614"/>
             <p:cNvSpPr/>
             <p:nvPr/>
           </p:nvSpPr>
@@ -38826,7 +38786,7 @@
         </p:sp>
         <p:sp>
           <p:nvSpPr>
-            <p:cNvPr id="616" name="pg616"/>
+            <p:cNvPr id="615" name="pg615"/>
             <p:cNvSpPr/>
             <p:nvPr/>
           </p:nvSpPr>
@@ -38872,7 +38832,7 @@
         </p:sp>
         <p:sp>
           <p:nvSpPr>
-            <p:cNvPr id="617" name="pg617"/>
+            <p:cNvPr id="616" name="pg616"/>
             <p:cNvSpPr/>
             <p:nvPr/>
           </p:nvSpPr>
@@ -38918,7 +38878,7 @@
         </p:sp>
         <p:sp>
           <p:nvSpPr>
-            <p:cNvPr id="618" name="pg618"/>
+            <p:cNvPr id="617" name="pg617"/>
             <p:cNvSpPr/>
             <p:nvPr/>
           </p:nvSpPr>
@@ -38964,7 +38924,7 @@
         </p:sp>
         <p:sp>
           <p:nvSpPr>
-            <p:cNvPr id="619" name="pg619"/>
+            <p:cNvPr id="618" name="pg618"/>
             <p:cNvSpPr/>
             <p:nvPr/>
           </p:nvSpPr>
@@ -39010,7 +38970,7 @@
         </p:sp>
         <p:sp>
           <p:nvSpPr>
-            <p:cNvPr id="620" name="pg620"/>
+            <p:cNvPr id="619" name="pg619"/>
             <p:cNvSpPr/>
             <p:nvPr/>
           </p:nvSpPr>
@@ -39059,7 +39019,7 @@
         </p:sp>
         <p:sp>
           <p:nvSpPr>
-            <p:cNvPr id="621" name="pg621"/>
+            <p:cNvPr id="620" name="pg620"/>
             <p:cNvSpPr/>
             <p:nvPr/>
           </p:nvSpPr>
@@ -39105,7 +39065,7 @@
         </p:sp>
         <p:sp>
           <p:nvSpPr>
-            <p:cNvPr id="622" name="pg622"/>
+            <p:cNvPr id="621" name="pg621"/>
             <p:cNvSpPr/>
             <p:nvPr/>
           </p:nvSpPr>
@@ -39151,7 +39111,7 @@
         </p:sp>
         <p:sp>
           <p:nvSpPr>
-            <p:cNvPr id="623" name="pg623"/>
+            <p:cNvPr id="622" name="pg622"/>
             <p:cNvSpPr/>
             <p:nvPr/>
           </p:nvSpPr>
@@ -39197,7 +39157,7 @@
         </p:sp>
         <p:sp>
           <p:nvSpPr>
-            <p:cNvPr id="624" name="pg624"/>
+            <p:cNvPr id="623" name="pg623"/>
             <p:cNvSpPr/>
             <p:nvPr/>
           </p:nvSpPr>
@@ -39243,7 +39203,7 @@
         </p:sp>
         <p:sp>
           <p:nvSpPr>
-            <p:cNvPr id="625" name="pg625"/>
+            <p:cNvPr id="624" name="pg624"/>
             <p:cNvSpPr/>
             <p:nvPr/>
           </p:nvSpPr>
@@ -39289,7 +39249,7 @@
         </p:sp>
         <p:sp>
           <p:nvSpPr>
-            <p:cNvPr id="626" name="pg626"/>
+            <p:cNvPr id="625" name="pg625"/>
             <p:cNvSpPr/>
             <p:nvPr/>
           </p:nvSpPr>
@@ -39335,7 +39295,7 @@
         </p:sp>
         <p:sp>
           <p:nvSpPr>
-            <p:cNvPr id="627" name="pg627"/>
+            <p:cNvPr id="626" name="pg626"/>
             <p:cNvSpPr/>
             <p:nvPr/>
           </p:nvSpPr>
@@ -39381,7 +39341,7 @@
         </p:sp>
         <p:sp>
           <p:nvSpPr>
-            <p:cNvPr id="628" name="pg628"/>
+            <p:cNvPr id="627" name="pg627"/>
             <p:cNvSpPr/>
             <p:nvPr/>
           </p:nvSpPr>
@@ -39427,7 +39387,7 @@
         </p:sp>
         <p:sp>
           <p:nvSpPr>
-            <p:cNvPr id="629" name="pg629"/>
+            <p:cNvPr id="628" name="pg628"/>
             <p:cNvSpPr/>
             <p:nvPr/>
           </p:nvSpPr>
@@ -39473,7 +39433,7 @@
         </p:sp>
         <p:sp>
           <p:nvSpPr>
-            <p:cNvPr id="630" name="pg630"/>
+            <p:cNvPr id="629" name="pg629"/>
             <p:cNvSpPr/>
             <p:nvPr/>
           </p:nvSpPr>
@@ -39519,7 +39479,7 @@
         </p:sp>
         <p:sp>
           <p:nvSpPr>
-            <p:cNvPr id="631" name="pg631"/>
+            <p:cNvPr id="630" name="pg630"/>
             <p:cNvSpPr/>
             <p:nvPr/>
           </p:nvSpPr>
@@ -39565,7 +39525,7 @@
         </p:sp>
         <p:sp>
           <p:nvSpPr>
-            <p:cNvPr id="632" name="pg632"/>
+            <p:cNvPr id="631" name="pg631"/>
             <p:cNvSpPr/>
             <p:nvPr/>
           </p:nvSpPr>
@@ -39611,7 +39571,7 @@
         </p:sp>
         <p:sp>
           <p:nvSpPr>
-            <p:cNvPr id="633" name="pg633"/>
+            <p:cNvPr id="632" name="pg632"/>
             <p:cNvSpPr/>
             <p:nvPr/>
           </p:nvSpPr>
@@ -39657,7 +39617,7 @@
         </p:sp>
         <p:sp>
           <p:nvSpPr>
-            <p:cNvPr id="634" name="pg634"/>
+            <p:cNvPr id="633" name="pg633"/>
             <p:cNvSpPr/>
             <p:nvPr/>
           </p:nvSpPr>
@@ -39703,7 +39663,7 @@
         </p:sp>
         <p:sp>
           <p:nvSpPr>
-            <p:cNvPr id="635" name="pg635"/>
+            <p:cNvPr id="634" name="pg634"/>
             <p:cNvSpPr/>
             <p:nvPr/>
           </p:nvSpPr>
@@ -39749,7 +39709,7 @@
         </p:sp>
         <p:sp>
           <p:nvSpPr>
-            <p:cNvPr id="636" name="pg636"/>
+            <p:cNvPr id="635" name="pg635"/>
             <p:cNvSpPr/>
             <p:nvPr/>
           </p:nvSpPr>
@@ -39795,7 +39755,7 @@
         </p:sp>
         <p:sp>
           <p:nvSpPr>
-            <p:cNvPr id="637" name="pg637"/>
+            <p:cNvPr id="636" name="pg636"/>
             <p:cNvSpPr/>
             <p:nvPr/>
           </p:nvSpPr>
@@ -39841,7 +39801,7 @@
         </p:sp>
         <p:sp>
           <p:nvSpPr>
-            <p:cNvPr id="638" name="pg638"/>
+            <p:cNvPr id="637" name="pg637"/>
             <p:cNvSpPr/>
             <p:nvPr/>
           </p:nvSpPr>
@@ -40034,7 +39994,7 @@
         </p:sp>
         <p:sp>
           <p:nvSpPr>
-            <p:cNvPr id="639" name="pg639"/>
+            <p:cNvPr id="638" name="pg638"/>
             <p:cNvSpPr/>
             <p:nvPr/>
           </p:nvSpPr>
@@ -40080,7 +40040,7 @@
         </p:sp>
         <p:sp>
           <p:nvSpPr>
-            <p:cNvPr id="640" name="pg640"/>
+            <p:cNvPr id="639" name="pg639"/>
             <p:cNvSpPr/>
             <p:nvPr/>
           </p:nvSpPr>
@@ -40126,7 +40086,7 @@
         </p:sp>
         <p:sp>
           <p:nvSpPr>
-            <p:cNvPr id="641" name="pg641"/>
+            <p:cNvPr id="640" name="pg640"/>
             <p:cNvSpPr/>
             <p:nvPr/>
           </p:nvSpPr>
@@ -40172,7 +40132,7 @@
         </p:sp>
         <p:sp>
           <p:nvSpPr>
-            <p:cNvPr id="642" name="pg642"/>
+            <p:cNvPr id="641" name="pg641"/>
             <p:cNvSpPr/>
             <p:nvPr/>
           </p:nvSpPr>
@@ -40218,7 +40178,7 @@
         </p:sp>
         <p:sp>
           <p:nvSpPr>
-            <p:cNvPr id="643" name="pg643"/>
+            <p:cNvPr id="642" name="pg642"/>
             <p:cNvSpPr/>
             <p:nvPr/>
           </p:nvSpPr>
@@ -40264,7 +40224,7 @@
         </p:sp>
         <p:sp>
           <p:nvSpPr>
-            <p:cNvPr id="644" name="pg644"/>
+            <p:cNvPr id="643" name="pg643"/>
             <p:cNvSpPr/>
             <p:nvPr/>
           </p:nvSpPr>
@@ -40310,7 +40270,7 @@
         </p:sp>
         <p:sp>
           <p:nvSpPr>
-            <p:cNvPr id="645" name="pg645"/>
+            <p:cNvPr id="644" name="pg644"/>
             <p:cNvSpPr/>
             <p:nvPr/>
           </p:nvSpPr>
@@ -40356,7 +40316,7 @@
         </p:sp>
         <p:sp>
           <p:nvSpPr>
-            <p:cNvPr id="646" name="pg646"/>
+            <p:cNvPr id="645" name="pg645"/>
             <p:cNvSpPr/>
             <p:nvPr/>
           </p:nvSpPr>
@@ -40402,7 +40362,7 @@
         </p:sp>
         <p:sp>
           <p:nvSpPr>
-            <p:cNvPr id="647" name="pg647"/>
+            <p:cNvPr id="646" name="pg646"/>
             <p:cNvSpPr/>
             <p:nvPr/>
           </p:nvSpPr>
@@ -40448,7 +40408,7 @@
         </p:sp>
         <p:sp>
           <p:nvSpPr>
-            <p:cNvPr id="648" name="pg648"/>
+            <p:cNvPr id="647" name="pg647"/>
             <p:cNvSpPr/>
             <p:nvPr/>
           </p:nvSpPr>
@@ -40503,7 +40463,7 @@
         </p:sp>
         <p:sp>
           <p:nvSpPr>
-            <p:cNvPr id="649" name="pg649"/>
+            <p:cNvPr id="648" name="pg648"/>
             <p:cNvSpPr/>
             <p:nvPr/>
           </p:nvSpPr>
@@ -40981,7 +40941,7 @@
         </p:sp>
         <p:sp>
           <p:nvSpPr>
-            <p:cNvPr id="650" name="pg650"/>
+            <p:cNvPr id="649" name="pg649"/>
             <p:cNvSpPr/>
             <p:nvPr/>
           </p:nvSpPr>
@@ -41027,7 +40987,7 @@
         </p:sp>
         <p:sp>
           <p:nvSpPr>
-            <p:cNvPr id="651" name="pg651"/>
+            <p:cNvPr id="650" name="pg650"/>
             <p:cNvSpPr/>
             <p:nvPr/>
           </p:nvSpPr>
@@ -41073,7 +41033,7 @@
         </p:sp>
         <p:sp>
           <p:nvSpPr>
-            <p:cNvPr id="652" name="pg652"/>
+            <p:cNvPr id="651" name="pg651"/>
             <p:cNvSpPr/>
             <p:nvPr/>
           </p:nvSpPr>
@@ -41119,7 +41079,7 @@
         </p:sp>
         <p:sp>
           <p:nvSpPr>
-            <p:cNvPr id="653" name="pg653"/>
+            <p:cNvPr id="652" name="pg652"/>
             <p:cNvSpPr/>
             <p:nvPr/>
           </p:nvSpPr>
@@ -41165,7 +41125,7 @@
         </p:sp>
         <p:sp>
           <p:nvSpPr>
-            <p:cNvPr id="654" name="pg654"/>
+            <p:cNvPr id="653" name="pg653"/>
             <p:cNvSpPr/>
             <p:nvPr/>
           </p:nvSpPr>
@@ -41211,7 +41171,7 @@
         </p:sp>
         <p:sp>
           <p:nvSpPr>
-            <p:cNvPr id="655" name="pg655"/>
+            <p:cNvPr id="654" name="pg654"/>
             <p:cNvSpPr/>
             <p:nvPr/>
           </p:nvSpPr>
@@ -41257,7 +41217,7 @@
         </p:sp>
         <p:sp>
           <p:nvSpPr>
-            <p:cNvPr id="656" name="pg656"/>
+            <p:cNvPr id="655" name="pg655"/>
             <p:cNvSpPr/>
             <p:nvPr/>
           </p:nvSpPr>
@@ -41303,7 +41263,7 @@
         </p:sp>
         <p:sp>
           <p:nvSpPr>
-            <p:cNvPr id="657" name="pg657"/>
+            <p:cNvPr id="656" name="pg656"/>
             <p:cNvSpPr/>
             <p:nvPr/>
           </p:nvSpPr>
@@ -41349,7 +41309,7 @@
         </p:sp>
         <p:sp>
           <p:nvSpPr>
-            <p:cNvPr id="658" name="pg658"/>
+            <p:cNvPr id="657" name="pg657"/>
             <p:cNvSpPr/>
             <p:nvPr/>
           </p:nvSpPr>
@@ -41395,7 +41355,7 @@
         </p:sp>
         <p:sp>
           <p:nvSpPr>
-            <p:cNvPr id="659" name="pg659"/>
+            <p:cNvPr id="658" name="pg658"/>
             <p:cNvSpPr/>
             <p:nvPr/>
           </p:nvSpPr>
@@ -41441,7 +41401,7 @@
         </p:sp>
         <p:sp>
           <p:nvSpPr>
-            <p:cNvPr id="660" name="pg660"/>
+            <p:cNvPr id="659" name="pg659"/>
             <p:cNvSpPr/>
             <p:nvPr/>
           </p:nvSpPr>
@@ -41487,7 +41447,7 @@
         </p:sp>
         <p:sp>
           <p:nvSpPr>
-            <p:cNvPr id="661" name="pg661"/>
+            <p:cNvPr id="660" name="pg660"/>
             <p:cNvSpPr/>
             <p:nvPr/>
           </p:nvSpPr>
@@ -41533,7 +41493,7 @@
         </p:sp>
         <p:sp>
           <p:nvSpPr>
-            <p:cNvPr id="662" name="pg662"/>
+            <p:cNvPr id="661" name="pg661"/>
             <p:cNvSpPr/>
             <p:nvPr/>
           </p:nvSpPr>
@@ -41579,7 +41539,7 @@
         </p:sp>
         <p:sp>
           <p:nvSpPr>
-            <p:cNvPr id="663" name="pg663"/>
+            <p:cNvPr id="662" name="pg662"/>
             <p:cNvSpPr/>
             <p:nvPr/>
           </p:nvSpPr>
@@ -41625,7 +41585,7 @@
         </p:sp>
         <p:sp>
           <p:nvSpPr>
-            <p:cNvPr id="664" name="pg664"/>
+            <p:cNvPr id="663" name="pg663"/>
             <p:cNvSpPr/>
             <p:nvPr/>
           </p:nvSpPr>
@@ -41671,7 +41631,7 @@
         </p:sp>
         <p:sp>
           <p:nvSpPr>
-            <p:cNvPr id="665" name="pg665"/>
+            <p:cNvPr id="664" name="pg664"/>
             <p:cNvSpPr/>
             <p:nvPr/>
           </p:nvSpPr>
@@ -41717,7 +41677,7 @@
         </p:sp>
         <p:sp>
           <p:nvSpPr>
-            <p:cNvPr id="666" name="pg666"/>
+            <p:cNvPr id="665" name="pg665"/>
             <p:cNvSpPr/>
             <p:nvPr/>
           </p:nvSpPr>
@@ -41763,7 +41723,7 @@
         </p:sp>
         <p:sp>
           <p:nvSpPr>
-            <p:cNvPr id="667" name="pg667"/>
+            <p:cNvPr id="666" name="pg666"/>
             <p:cNvSpPr/>
             <p:nvPr/>
           </p:nvSpPr>
@@ -41812,7 +41772,7 @@
         </p:sp>
         <p:sp>
           <p:nvSpPr>
-            <p:cNvPr id="668" name="pg668"/>
+            <p:cNvPr id="667" name="pg667"/>
             <p:cNvSpPr/>
             <p:nvPr/>
           </p:nvSpPr>
@@ -41858,7 +41818,7 @@
         </p:sp>
         <p:sp>
           <p:nvSpPr>
-            <p:cNvPr id="669" name="pg669"/>
+            <p:cNvPr id="668" name="pg668"/>
             <p:cNvSpPr/>
             <p:nvPr/>
           </p:nvSpPr>
@@ -41904,7 +41864,7 @@
         </p:sp>
         <p:sp>
           <p:nvSpPr>
-            <p:cNvPr id="670" name="pg670"/>
+            <p:cNvPr id="669" name="pg669"/>
             <p:cNvSpPr/>
             <p:nvPr/>
           </p:nvSpPr>
@@ -41950,7 +41910,7 @@
         </p:sp>
         <p:sp>
           <p:nvSpPr>
-            <p:cNvPr id="671" name="pg671"/>
+            <p:cNvPr id="670" name="pg670"/>
             <p:cNvSpPr/>
             <p:nvPr/>
           </p:nvSpPr>
@@ -41996,7 +41956,7 @@
         </p:sp>
         <p:sp>
           <p:nvSpPr>
-            <p:cNvPr id="672" name="pg672"/>
+            <p:cNvPr id="671" name="pg671"/>
             <p:cNvSpPr/>
             <p:nvPr/>
           </p:nvSpPr>
@@ -42042,7 +42002,7 @@
         </p:sp>
         <p:sp>
           <p:nvSpPr>
-            <p:cNvPr id="673" name="pg673"/>
+            <p:cNvPr id="672" name="pg672"/>
             <p:cNvSpPr/>
             <p:nvPr/>
           </p:nvSpPr>
@@ -42088,7 +42048,7 @@
         </p:sp>
         <p:sp>
           <p:nvSpPr>
-            <p:cNvPr id="674" name="pg674"/>
+            <p:cNvPr id="673" name="pg673"/>
             <p:cNvSpPr/>
             <p:nvPr/>
           </p:nvSpPr>
@@ -42134,7 +42094,7 @@
         </p:sp>
         <p:sp>
           <p:nvSpPr>
-            <p:cNvPr id="675" name="pg675"/>
+            <p:cNvPr id="674" name="pg674"/>
             <p:cNvSpPr/>
             <p:nvPr/>
           </p:nvSpPr>
@@ -42180,7 +42140,7 @@
         </p:sp>
         <p:sp>
           <p:nvSpPr>
-            <p:cNvPr id="676" name="pg676"/>
+            <p:cNvPr id="675" name="pg675"/>
             <p:cNvSpPr/>
             <p:nvPr/>
           </p:nvSpPr>
@@ -42817,7 +42777,7 @@
         </p:sp>
         <p:sp>
           <p:nvSpPr>
-            <p:cNvPr id="677" name="pg677"/>
+            <p:cNvPr id="676" name="pg676"/>
             <p:cNvSpPr/>
             <p:nvPr/>
           </p:nvSpPr>
@@ -42866,7 +42826,7 @@
         </p:sp>
         <p:sp>
           <p:nvSpPr>
-            <p:cNvPr id="678" name="pg678"/>
+            <p:cNvPr id="677" name="pg677"/>
             <p:cNvSpPr/>
             <p:nvPr/>
           </p:nvSpPr>
@@ -42912,7 +42872,7 @@
         </p:sp>
         <p:sp>
           <p:nvSpPr>
-            <p:cNvPr id="679" name="pg679"/>
+            <p:cNvPr id="678" name="pg678"/>
             <p:cNvSpPr/>
             <p:nvPr/>
           </p:nvSpPr>
@@ -42958,7 +42918,7 @@
         </p:sp>
         <p:sp>
           <p:nvSpPr>
-            <p:cNvPr id="680" name="pg680"/>
+            <p:cNvPr id="679" name="pg679"/>
             <p:cNvSpPr/>
             <p:nvPr/>
           </p:nvSpPr>
@@ -43004,7 +42964,7 @@
         </p:sp>
         <p:sp>
           <p:nvSpPr>
-            <p:cNvPr id="681" name="pg681"/>
+            <p:cNvPr id="680" name="pg680"/>
             <p:cNvSpPr/>
             <p:nvPr/>
           </p:nvSpPr>
@@ -43050,7 +43010,7 @@
         </p:sp>
         <p:sp>
           <p:nvSpPr>
-            <p:cNvPr id="682" name="pg682"/>
+            <p:cNvPr id="681" name="pg681"/>
             <p:cNvSpPr/>
             <p:nvPr/>
           </p:nvSpPr>
@@ -43096,7 +43056,7 @@
         </p:sp>
         <p:sp>
           <p:nvSpPr>
-            <p:cNvPr id="683" name="pg683"/>
+            <p:cNvPr id="682" name="pg682"/>
             <p:cNvSpPr/>
             <p:nvPr/>
           </p:nvSpPr>
@@ -43142,7 +43102,7 @@
         </p:sp>
         <p:sp>
           <p:nvSpPr>
-            <p:cNvPr id="684" name="pg684"/>
+            <p:cNvPr id="683" name="pg683"/>
             <p:cNvSpPr/>
             <p:nvPr/>
           </p:nvSpPr>
@@ -43188,7 +43148,7 @@
         </p:sp>
         <p:sp>
           <p:nvSpPr>
-            <p:cNvPr id="685" name="pg685"/>
+            <p:cNvPr id="684" name="pg684"/>
             <p:cNvSpPr/>
             <p:nvPr/>
           </p:nvSpPr>
@@ -43234,7 +43194,7 @@
         </p:sp>
         <p:sp>
           <p:nvSpPr>
-            <p:cNvPr id="686" name="pg686"/>
+            <p:cNvPr id="685" name="pg685"/>
             <p:cNvSpPr/>
             <p:nvPr/>
           </p:nvSpPr>
@@ -43280,7 +43240,7 @@
         </p:sp>
         <p:sp>
           <p:nvSpPr>
-            <p:cNvPr id="687" name="pg687"/>
+            <p:cNvPr id="686" name="pg686"/>
             <p:cNvSpPr/>
             <p:nvPr/>
           </p:nvSpPr>
@@ -43326,7 +43286,7 @@
         </p:sp>
         <p:sp>
           <p:nvSpPr>
-            <p:cNvPr id="688" name="pg688"/>
+            <p:cNvPr id="687" name="pg687"/>
             <p:cNvSpPr/>
             <p:nvPr/>
           </p:nvSpPr>
@@ -43372,7 +43332,7 @@
         </p:sp>
         <p:sp>
           <p:nvSpPr>
-            <p:cNvPr id="689" name="pg689"/>
+            <p:cNvPr id="688" name="pg688"/>
             <p:cNvSpPr/>
             <p:nvPr/>
           </p:nvSpPr>
@@ -43418,7 +43378,7 @@
         </p:sp>
         <p:sp>
           <p:nvSpPr>
-            <p:cNvPr id="690" name="pg690"/>
+            <p:cNvPr id="689" name="pg689"/>
             <p:cNvSpPr/>
             <p:nvPr/>
           </p:nvSpPr>
@@ -43464,7 +43424,7 @@
         </p:sp>
         <p:sp>
           <p:nvSpPr>
-            <p:cNvPr id="691" name="pg691"/>
+            <p:cNvPr id="690" name="pg690"/>
             <p:cNvSpPr/>
             <p:nvPr/>
           </p:nvSpPr>
@@ -43510,7 +43470,7 @@
         </p:sp>
         <p:sp>
           <p:nvSpPr>
-            <p:cNvPr id="692" name="pg692"/>
+            <p:cNvPr id="691" name="pg691"/>
             <p:cNvSpPr/>
             <p:nvPr/>
           </p:nvSpPr>
@@ -43556,7 +43516,7 @@
         </p:sp>
         <p:sp>
           <p:nvSpPr>
-            <p:cNvPr id="693" name="pg693"/>
+            <p:cNvPr id="692" name="pg692"/>
             <p:cNvSpPr/>
             <p:nvPr/>
           </p:nvSpPr>
@@ -43602,7 +43562,7 @@
         </p:sp>
         <p:sp>
           <p:nvSpPr>
-            <p:cNvPr id="694" name="pg694"/>
+            <p:cNvPr id="693" name="pg693"/>
             <p:cNvSpPr/>
             <p:nvPr/>
           </p:nvSpPr>
@@ -43648,7 +43608,7 @@
         </p:sp>
         <p:sp>
           <p:nvSpPr>
-            <p:cNvPr id="695" name="pg695"/>
+            <p:cNvPr id="694" name="pg694"/>
             <p:cNvSpPr/>
             <p:nvPr/>
           </p:nvSpPr>
@@ -43694,7 +43654,7 @@
         </p:sp>
         <p:sp>
           <p:nvSpPr>
-            <p:cNvPr id="696" name="pg696"/>
+            <p:cNvPr id="695" name="pg695"/>
             <p:cNvSpPr/>
             <p:nvPr/>
           </p:nvSpPr>
@@ -43740,7 +43700,7 @@
         </p:sp>
         <p:sp>
           <p:nvSpPr>
-            <p:cNvPr id="697" name="pg697"/>
+            <p:cNvPr id="696" name="pg696"/>
             <p:cNvSpPr/>
             <p:nvPr/>
           </p:nvSpPr>
@@ -43786,7 +43746,7 @@
         </p:sp>
         <p:sp>
           <p:nvSpPr>
-            <p:cNvPr id="698" name="pg698"/>
+            <p:cNvPr id="697" name="pg697"/>
             <p:cNvSpPr/>
             <p:nvPr/>
           </p:nvSpPr>
@@ -43832,7 +43792,7 @@
         </p:sp>
         <p:sp>
           <p:nvSpPr>
-            <p:cNvPr id="699" name="pg699"/>
+            <p:cNvPr id="698" name="pg698"/>
             <p:cNvSpPr/>
             <p:nvPr/>
           </p:nvSpPr>
@@ -43878,7 +43838,7 @@
         </p:sp>
         <p:sp>
           <p:nvSpPr>
-            <p:cNvPr id="700" name="pg700"/>
+            <p:cNvPr id="699" name="pg699"/>
             <p:cNvSpPr/>
             <p:nvPr/>
           </p:nvSpPr>
@@ -43924,7 +43884,7 @@
         </p:sp>
         <p:sp>
           <p:nvSpPr>
-            <p:cNvPr id="701" name="pg701"/>
+            <p:cNvPr id="700" name="pg700"/>
             <p:cNvSpPr/>
             <p:nvPr/>
           </p:nvSpPr>
@@ -43970,7 +43930,7 @@
         </p:sp>
         <p:sp>
           <p:nvSpPr>
-            <p:cNvPr id="702" name="pg702"/>
+            <p:cNvPr id="701" name="pg701"/>
             <p:cNvSpPr/>
             <p:nvPr/>
           </p:nvSpPr>
@@ -44016,7 +43976,7 @@
         </p:sp>
         <p:sp>
           <p:nvSpPr>
-            <p:cNvPr id="703" name="pg703"/>
+            <p:cNvPr id="702" name="pg702"/>
             <p:cNvSpPr/>
             <p:nvPr/>
           </p:nvSpPr>
@@ -44062,7 +44022,7 @@
         </p:sp>
         <p:sp>
           <p:nvSpPr>
-            <p:cNvPr id="704" name="pg704"/>
+            <p:cNvPr id="703" name="pg703"/>
             <p:cNvSpPr/>
             <p:nvPr/>
           </p:nvSpPr>
@@ -44267,7 +44227,7 @@
         </p:sp>
         <p:sp>
           <p:nvSpPr>
-            <p:cNvPr id="705" name="pg705"/>
+            <p:cNvPr id="704" name="pg704"/>
             <p:cNvSpPr/>
             <p:nvPr/>
           </p:nvSpPr>
@@ -44745,7 +44705,7 @@
         </p:sp>
         <p:sp>
           <p:nvSpPr>
-            <p:cNvPr id="706" name="pg706"/>
+            <p:cNvPr id="705" name="pg705"/>
             <p:cNvSpPr/>
             <p:nvPr/>
           </p:nvSpPr>
@@ -44791,7 +44751,7 @@
         </p:sp>
         <p:sp>
           <p:nvSpPr>
-            <p:cNvPr id="707" name="pg707"/>
+            <p:cNvPr id="706" name="pg706"/>
             <p:cNvSpPr/>
             <p:nvPr/>
           </p:nvSpPr>
@@ -44837,7 +44797,7 @@
         </p:sp>
         <p:sp>
           <p:nvSpPr>
-            <p:cNvPr id="708" name="pg708"/>
+            <p:cNvPr id="707" name="pg707"/>
             <p:cNvSpPr/>
             <p:nvPr/>
           </p:nvSpPr>
@@ -44883,7 +44843,7 @@
         </p:sp>
         <p:sp>
           <p:nvSpPr>
-            <p:cNvPr id="709" name="pg709"/>
+            <p:cNvPr id="708" name="pg708"/>
             <p:cNvSpPr/>
             <p:nvPr/>
           </p:nvSpPr>
@@ -44929,7 +44889,7 @@
         </p:sp>
         <p:sp>
           <p:nvSpPr>
-            <p:cNvPr id="710" name="pg710"/>
+            <p:cNvPr id="709" name="pg709"/>
             <p:cNvSpPr/>
             <p:nvPr/>
           </p:nvSpPr>
@@ -44975,7 +44935,7 @@
         </p:sp>
         <p:sp>
           <p:nvSpPr>
-            <p:cNvPr id="711" name="pg711"/>
+            <p:cNvPr id="710" name="pg710"/>
             <p:cNvSpPr/>
             <p:nvPr/>
           </p:nvSpPr>
@@ -45021,7 +44981,7 @@
         </p:sp>
         <p:sp>
           <p:nvSpPr>
-            <p:cNvPr id="712" name="pg712"/>
+            <p:cNvPr id="711" name="pg711"/>
             <p:cNvSpPr/>
             <p:nvPr/>
           </p:nvSpPr>
@@ -45067,7 +45027,7 @@
         </p:sp>
         <p:sp>
           <p:nvSpPr>
-            <p:cNvPr id="713" name="pg713"/>
+            <p:cNvPr id="712" name="pg712"/>
             <p:cNvSpPr/>
             <p:nvPr/>
           </p:nvSpPr>
@@ -45113,7 +45073,7 @@
         </p:sp>
         <p:sp>
           <p:nvSpPr>
-            <p:cNvPr id="714" name="pg714"/>
+            <p:cNvPr id="713" name="pg713"/>
             <p:cNvSpPr/>
             <p:nvPr/>
           </p:nvSpPr>
@@ -45159,7 +45119,7 @@
         </p:sp>
         <p:sp>
           <p:nvSpPr>
-            <p:cNvPr id="715" name="pg715"/>
+            <p:cNvPr id="714" name="pg714"/>
             <p:cNvSpPr/>
             <p:nvPr/>
           </p:nvSpPr>
@@ -45205,7 +45165,7 @@
         </p:sp>
         <p:sp>
           <p:nvSpPr>
-            <p:cNvPr id="716" name="pg716"/>
+            <p:cNvPr id="715" name="pg715"/>
             <p:cNvSpPr/>
             <p:nvPr/>
           </p:nvSpPr>
@@ -45251,7 +45211,7 @@
         </p:sp>
         <p:sp>
           <p:nvSpPr>
-            <p:cNvPr id="717" name="pg717"/>
+            <p:cNvPr id="716" name="pg716"/>
             <p:cNvSpPr/>
             <p:nvPr/>
           </p:nvSpPr>
@@ -45297,7 +45257,7 @@
         </p:sp>
         <p:sp>
           <p:nvSpPr>
-            <p:cNvPr id="718" name="pg718"/>
+            <p:cNvPr id="717" name="pg717"/>
             <p:cNvSpPr/>
             <p:nvPr/>
           </p:nvSpPr>
@@ -45343,7 +45303,7 @@
         </p:sp>
         <p:sp>
           <p:nvSpPr>
-            <p:cNvPr id="719" name="pg719"/>
+            <p:cNvPr id="718" name="pg718"/>
             <p:cNvSpPr/>
             <p:nvPr/>
           </p:nvSpPr>
@@ -45389,7 +45349,7 @@
         </p:sp>
         <p:sp>
           <p:nvSpPr>
-            <p:cNvPr id="720" name="pg720"/>
+            <p:cNvPr id="719" name="pg719"/>
             <p:cNvSpPr/>
             <p:nvPr/>
           </p:nvSpPr>
@@ -45435,7 +45395,7 @@
         </p:sp>
         <p:sp>
           <p:nvSpPr>
-            <p:cNvPr id="721" name="pg721"/>
+            <p:cNvPr id="720" name="pg720"/>
             <p:cNvSpPr/>
             <p:nvPr/>
           </p:nvSpPr>
@@ -45481,7 +45441,7 @@
         </p:sp>
         <p:sp>
           <p:nvSpPr>
-            <p:cNvPr id="722" name="pg722"/>
+            <p:cNvPr id="721" name="pg721"/>
             <p:cNvSpPr/>
             <p:nvPr/>
           </p:nvSpPr>
@@ -45527,7 +45487,7 @@
         </p:sp>
         <p:sp>
           <p:nvSpPr>
-            <p:cNvPr id="723" name="pg723"/>
+            <p:cNvPr id="722" name="pg722"/>
             <p:cNvSpPr/>
             <p:nvPr/>
           </p:nvSpPr>
@@ -45573,7 +45533,7 @@
         </p:sp>
         <p:sp>
           <p:nvSpPr>
-            <p:cNvPr id="724" name="pg724"/>
+            <p:cNvPr id="723" name="pg723"/>
             <p:cNvSpPr/>
             <p:nvPr/>
           </p:nvSpPr>
@@ -45619,7 +45579,7 @@
         </p:sp>
         <p:sp>
           <p:nvSpPr>
-            <p:cNvPr id="725" name="pg725"/>
+            <p:cNvPr id="724" name="pg724"/>
             <p:cNvSpPr/>
             <p:nvPr/>
           </p:nvSpPr>
@@ -45671,7 +45631,7 @@
         </p:sp>
         <p:sp>
           <p:nvSpPr>
-            <p:cNvPr id="726" name="pg726"/>
+            <p:cNvPr id="725" name="pg725"/>
             <p:cNvSpPr/>
             <p:nvPr/>
           </p:nvSpPr>
@@ -45717,7 +45677,7 @@
         </p:sp>
         <p:sp>
           <p:nvSpPr>
-            <p:cNvPr id="727" name="pg727"/>
+            <p:cNvPr id="726" name="pg726"/>
             <p:cNvSpPr/>
             <p:nvPr/>
           </p:nvSpPr>
@@ -45763,7 +45723,7 @@
         </p:sp>
         <p:sp>
           <p:nvSpPr>
-            <p:cNvPr id="728" name="pg728"/>
+            <p:cNvPr id="727" name="pg727"/>
             <p:cNvSpPr/>
             <p:nvPr/>
           </p:nvSpPr>
@@ -45809,7 +45769,7 @@
         </p:sp>
         <p:sp>
           <p:nvSpPr>
-            <p:cNvPr id="729" name="pg729"/>
+            <p:cNvPr id="728" name="pg728"/>
             <p:cNvSpPr/>
             <p:nvPr/>
           </p:nvSpPr>
@@ -45855,7 +45815,7 @@
         </p:sp>
         <p:sp>
           <p:nvSpPr>
-            <p:cNvPr id="730" name="pg730"/>
+            <p:cNvPr id="729" name="pg729"/>
             <p:cNvSpPr/>
             <p:nvPr/>
           </p:nvSpPr>
@@ -45901,7 +45861,7 @@
         </p:sp>
         <p:sp>
           <p:nvSpPr>
-            <p:cNvPr id="731" name="pg731"/>
+            <p:cNvPr id="730" name="pg730"/>
             <p:cNvSpPr/>
             <p:nvPr/>
           </p:nvSpPr>
@@ -45947,7 +45907,7 @@
         </p:sp>
         <p:sp>
           <p:nvSpPr>
-            <p:cNvPr id="732" name="pg732"/>
+            <p:cNvPr id="731" name="pg731"/>
             <p:cNvSpPr/>
             <p:nvPr/>
           </p:nvSpPr>
@@ -46566,7 +46526,7 @@
         </p:sp>
         <p:sp>
           <p:nvSpPr>
-            <p:cNvPr id="733" name="pg733"/>
+            <p:cNvPr id="732" name="pg732"/>
             <p:cNvSpPr/>
             <p:nvPr/>
           </p:nvSpPr>
@@ -46621,7 +46581,7 @@
         </p:sp>
         <p:sp>
           <p:nvSpPr>
-            <p:cNvPr id="734" name="pg734"/>
+            <p:cNvPr id="733" name="pg733"/>
             <p:cNvSpPr/>
             <p:nvPr/>
           </p:nvSpPr>
@@ -46667,7 +46627,7 @@
         </p:sp>
         <p:sp>
           <p:nvSpPr>
-            <p:cNvPr id="735" name="pg735"/>
+            <p:cNvPr id="734" name="pg734"/>
             <p:cNvSpPr/>
             <p:nvPr/>
           </p:nvSpPr>
@@ -46713,7 +46673,7 @@
         </p:sp>
         <p:sp>
           <p:nvSpPr>
-            <p:cNvPr id="736" name="pg736"/>
+            <p:cNvPr id="735" name="pg735"/>
             <p:cNvSpPr/>
             <p:nvPr/>
           </p:nvSpPr>
@@ -46759,7 +46719,7 @@
         </p:sp>
         <p:sp>
           <p:nvSpPr>
-            <p:cNvPr id="737" name="pg737"/>
+            <p:cNvPr id="736" name="pg736"/>
             <p:cNvSpPr/>
             <p:nvPr/>
           </p:nvSpPr>
@@ -46805,7 +46765,7 @@
         </p:sp>
         <p:sp>
           <p:nvSpPr>
-            <p:cNvPr id="738" name="pg738"/>
+            <p:cNvPr id="737" name="pg737"/>
             <p:cNvSpPr/>
             <p:nvPr/>
           </p:nvSpPr>
@@ -46851,7 +46811,7 @@
         </p:sp>
         <p:sp>
           <p:nvSpPr>
-            <p:cNvPr id="739" name="pg739"/>
+            <p:cNvPr id="738" name="pg738"/>
             <p:cNvSpPr/>
             <p:nvPr/>
           </p:nvSpPr>
@@ -46897,7 +46857,7 @@
         </p:sp>
         <p:sp>
           <p:nvSpPr>
-            <p:cNvPr id="740" name="pg740"/>
+            <p:cNvPr id="739" name="pg739"/>
             <p:cNvSpPr/>
             <p:nvPr/>
           </p:nvSpPr>
@@ -46943,7 +46903,7 @@
         </p:sp>
         <p:sp>
           <p:nvSpPr>
-            <p:cNvPr id="741" name="pg741"/>
+            <p:cNvPr id="740" name="pg740"/>
             <p:cNvSpPr/>
             <p:nvPr/>
           </p:nvSpPr>
@@ -46989,7 +46949,7 @@
         </p:sp>
         <p:sp>
           <p:nvSpPr>
-            <p:cNvPr id="742" name="pg742"/>
+            <p:cNvPr id="741" name="pg741"/>
             <p:cNvSpPr/>
             <p:nvPr/>
           </p:nvSpPr>
@@ -47035,7 +46995,7 @@
         </p:sp>
         <p:sp>
           <p:nvSpPr>
-            <p:cNvPr id="743" name="pg743"/>
+            <p:cNvPr id="742" name="pg742"/>
             <p:cNvSpPr/>
             <p:nvPr/>
           </p:nvSpPr>
@@ -47081,7 +47041,7 @@
         </p:sp>
         <p:sp>
           <p:nvSpPr>
-            <p:cNvPr id="744" name="pg744"/>
+            <p:cNvPr id="743" name="pg743"/>
             <p:cNvSpPr/>
             <p:nvPr/>
           </p:nvSpPr>
@@ -47127,7 +47087,7 @@
         </p:sp>
         <p:sp>
           <p:nvSpPr>
-            <p:cNvPr id="745" name="pg745"/>
+            <p:cNvPr id="744" name="pg744"/>
             <p:cNvSpPr/>
             <p:nvPr/>
           </p:nvSpPr>
@@ -47173,7 +47133,7 @@
         </p:sp>
         <p:sp>
           <p:nvSpPr>
-            <p:cNvPr id="746" name="pg746"/>
+            <p:cNvPr id="745" name="pg745"/>
             <p:cNvSpPr/>
             <p:nvPr/>
           </p:nvSpPr>
@@ -47219,7 +47179,7 @@
         </p:sp>
         <p:sp>
           <p:nvSpPr>
-            <p:cNvPr id="747" name="pg747"/>
+            <p:cNvPr id="746" name="pg746"/>
             <p:cNvSpPr/>
             <p:nvPr/>
           </p:nvSpPr>
@@ -47265,7 +47225,7 @@
         </p:sp>
         <p:sp>
           <p:nvSpPr>
-            <p:cNvPr id="748" name="pg748"/>
+            <p:cNvPr id="747" name="pg747"/>
             <p:cNvSpPr/>
             <p:nvPr/>
           </p:nvSpPr>
@@ -47311,7 +47271,7 @@
         </p:sp>
         <p:sp>
           <p:nvSpPr>
-            <p:cNvPr id="749" name="pg749"/>
+            <p:cNvPr id="748" name="pg748"/>
             <p:cNvSpPr/>
             <p:nvPr/>
           </p:nvSpPr>
@@ -47357,7 +47317,7 @@
         </p:sp>
         <p:sp>
           <p:nvSpPr>
-            <p:cNvPr id="750" name="pg750"/>
+            <p:cNvPr id="749" name="pg749"/>
             <p:cNvSpPr/>
             <p:nvPr/>
           </p:nvSpPr>
@@ -47403,7 +47363,7 @@
         </p:sp>
         <p:sp>
           <p:nvSpPr>
-            <p:cNvPr id="751" name="pg751"/>
+            <p:cNvPr id="750" name="pg750"/>
             <p:cNvSpPr/>
             <p:nvPr/>
           </p:nvSpPr>
@@ -47449,7 +47409,7 @@
         </p:sp>
         <p:sp>
           <p:nvSpPr>
-            <p:cNvPr id="752" name="pg752"/>
+            <p:cNvPr id="751" name="pg751"/>
             <p:cNvSpPr/>
             <p:nvPr/>
           </p:nvSpPr>
@@ -47495,7 +47455,7 @@
         </p:sp>
         <p:sp>
           <p:nvSpPr>
-            <p:cNvPr id="753" name="pg753"/>
+            <p:cNvPr id="752" name="pg752"/>
             <p:cNvSpPr/>
             <p:nvPr/>
           </p:nvSpPr>
@@ -47541,7 +47501,7 @@
         </p:sp>
         <p:sp>
           <p:nvSpPr>
-            <p:cNvPr id="754" name="pg754"/>
+            <p:cNvPr id="753" name="pg753"/>
             <p:cNvSpPr/>
             <p:nvPr/>
           </p:nvSpPr>
@@ -47764,7 +47724,7 @@
         </p:sp>
         <p:sp>
           <p:nvSpPr>
-            <p:cNvPr id="755" name="pg755"/>
+            <p:cNvPr id="754" name="pg754"/>
             <p:cNvSpPr/>
             <p:nvPr/>
           </p:nvSpPr>
@@ -47810,7 +47770,7 @@
         </p:sp>
         <p:sp>
           <p:nvSpPr>
-            <p:cNvPr id="756" name="pg756"/>
+            <p:cNvPr id="755" name="pg755"/>
             <p:cNvSpPr/>
             <p:nvPr/>
           </p:nvSpPr>
@@ -47856,7 +47816,7 @@
         </p:sp>
         <p:sp>
           <p:nvSpPr>
-            <p:cNvPr id="757" name="pg757"/>
+            <p:cNvPr id="756" name="pg756"/>
             <p:cNvSpPr/>
             <p:nvPr/>
           </p:nvSpPr>
@@ -47902,7 +47862,7 @@
         </p:sp>
         <p:sp>
           <p:nvSpPr>
-            <p:cNvPr id="758" name="pg758"/>
+            <p:cNvPr id="757" name="pg757"/>
             <p:cNvSpPr/>
             <p:nvPr/>
           </p:nvSpPr>
@@ -47948,7 +47908,7 @@
         </p:sp>
         <p:sp>
           <p:nvSpPr>
-            <p:cNvPr id="759" name="pg759"/>
+            <p:cNvPr id="758" name="pg758"/>
             <p:cNvSpPr/>
             <p:nvPr/>
           </p:nvSpPr>
@@ -47994,7 +47954,7 @@
         </p:sp>
         <p:sp>
           <p:nvSpPr>
-            <p:cNvPr id="760" name="pg760"/>
+            <p:cNvPr id="759" name="pg759"/>
             <p:cNvSpPr/>
             <p:nvPr/>
           </p:nvSpPr>
@@ -48097,7 +48057,7 @@
         </p:sp>
         <p:sp>
           <p:nvSpPr>
-            <p:cNvPr id="761" name="pg761"/>
+            <p:cNvPr id="760" name="pg760"/>
             <p:cNvSpPr/>
             <p:nvPr/>
           </p:nvSpPr>
@@ -48494,7 +48454,7 @@
         </p:sp>
         <p:sp>
           <p:nvSpPr>
-            <p:cNvPr id="762" name="pg762"/>
+            <p:cNvPr id="761" name="pg761"/>
             <p:cNvSpPr/>
             <p:nvPr/>
           </p:nvSpPr>
@@ -48540,7 +48500,7 @@
         </p:sp>
         <p:sp>
           <p:nvSpPr>
-            <p:cNvPr id="763" name="pg763"/>
+            <p:cNvPr id="762" name="pg762"/>
             <p:cNvSpPr/>
             <p:nvPr/>
           </p:nvSpPr>
@@ -48586,7 +48546,7 @@
         </p:sp>
         <p:sp>
           <p:nvSpPr>
-            <p:cNvPr id="764" name="pg764"/>
+            <p:cNvPr id="763" name="pg763"/>
             <p:cNvSpPr/>
             <p:nvPr/>
           </p:nvSpPr>
@@ -48632,7 +48592,7 @@
         </p:sp>
         <p:sp>
           <p:nvSpPr>
-            <p:cNvPr id="765" name="pg765"/>
+            <p:cNvPr id="764" name="pg764"/>
             <p:cNvSpPr/>
             <p:nvPr/>
           </p:nvSpPr>
@@ -48678,7 +48638,7 @@
         </p:sp>
         <p:sp>
           <p:nvSpPr>
-            <p:cNvPr id="766" name="pg766"/>
+            <p:cNvPr id="765" name="pg765"/>
             <p:cNvSpPr/>
             <p:nvPr/>
           </p:nvSpPr>
@@ -48724,7 +48684,7 @@
         </p:sp>
         <p:sp>
           <p:nvSpPr>
-            <p:cNvPr id="767" name="pg767"/>
+            <p:cNvPr id="766" name="pg766"/>
             <p:cNvSpPr/>
             <p:nvPr/>
           </p:nvSpPr>
@@ -48770,7 +48730,7 @@
         </p:sp>
         <p:sp>
           <p:nvSpPr>
-            <p:cNvPr id="768" name="pg768"/>
+            <p:cNvPr id="767" name="pg767"/>
             <p:cNvSpPr/>
             <p:nvPr/>
           </p:nvSpPr>
@@ -48816,7 +48776,7 @@
         </p:sp>
         <p:sp>
           <p:nvSpPr>
-            <p:cNvPr id="769" name="pg769"/>
+            <p:cNvPr id="768" name="pg768"/>
             <p:cNvSpPr/>
             <p:nvPr/>
           </p:nvSpPr>
@@ -48862,7 +48822,7 @@
         </p:sp>
         <p:sp>
           <p:nvSpPr>
-            <p:cNvPr id="770" name="pg770"/>
+            <p:cNvPr id="769" name="pg769"/>
             <p:cNvSpPr/>
             <p:nvPr/>
           </p:nvSpPr>
@@ -48908,7 +48868,7 @@
         </p:sp>
         <p:sp>
           <p:nvSpPr>
-            <p:cNvPr id="771" name="pg771"/>
+            <p:cNvPr id="770" name="pg770"/>
             <p:cNvSpPr/>
             <p:nvPr/>
           </p:nvSpPr>
@@ -48954,7 +48914,7 @@
         </p:sp>
         <p:sp>
           <p:nvSpPr>
-            <p:cNvPr id="772" name="pg772"/>
+            <p:cNvPr id="771" name="pg771"/>
             <p:cNvSpPr/>
             <p:nvPr/>
           </p:nvSpPr>
@@ -49000,7 +48960,7 @@
         </p:sp>
         <p:sp>
           <p:nvSpPr>
-            <p:cNvPr id="773" name="pg773"/>
+            <p:cNvPr id="772" name="pg772"/>
             <p:cNvSpPr/>
             <p:nvPr/>
           </p:nvSpPr>
@@ -49046,7 +49006,7 @@
         </p:sp>
         <p:sp>
           <p:nvSpPr>
-            <p:cNvPr id="774" name="pg774"/>
+            <p:cNvPr id="773" name="pg773"/>
             <p:cNvSpPr/>
             <p:nvPr/>
           </p:nvSpPr>
@@ -49092,7 +49052,7 @@
         </p:sp>
         <p:sp>
           <p:nvSpPr>
-            <p:cNvPr id="775" name="pg775"/>
+            <p:cNvPr id="774" name="pg774"/>
             <p:cNvSpPr/>
             <p:nvPr/>
           </p:nvSpPr>
@@ -49138,7 +49098,7 @@
         </p:sp>
         <p:sp>
           <p:nvSpPr>
-            <p:cNvPr id="776" name="pg776"/>
+            <p:cNvPr id="775" name="pg775"/>
             <p:cNvSpPr/>
             <p:nvPr/>
           </p:nvSpPr>
@@ -49184,7 +49144,7 @@
         </p:sp>
         <p:sp>
           <p:nvSpPr>
-            <p:cNvPr id="777" name="pg777"/>
+            <p:cNvPr id="776" name="pg776"/>
             <p:cNvSpPr/>
             <p:nvPr/>
           </p:nvSpPr>
@@ -49230,7 +49190,7 @@
         </p:sp>
         <p:sp>
           <p:nvSpPr>
-            <p:cNvPr id="778" name="pg778"/>
+            <p:cNvPr id="777" name="pg777"/>
             <p:cNvSpPr/>
             <p:nvPr/>
           </p:nvSpPr>
@@ -49276,7 +49236,7 @@
         </p:sp>
         <p:sp>
           <p:nvSpPr>
-            <p:cNvPr id="779" name="pg779"/>
+            <p:cNvPr id="778" name="pg778"/>
             <p:cNvSpPr/>
             <p:nvPr/>
           </p:nvSpPr>
@@ -49322,7 +49282,7 @@
         </p:sp>
         <p:sp>
           <p:nvSpPr>
-            <p:cNvPr id="780" name="pg780"/>
+            <p:cNvPr id="779" name="pg779"/>
             <p:cNvSpPr/>
             <p:nvPr/>
           </p:nvSpPr>
@@ -49368,7 +49328,7 @@
         </p:sp>
         <p:sp>
           <p:nvSpPr>
-            <p:cNvPr id="781" name="pg781"/>
+            <p:cNvPr id="780" name="pg780"/>
             <p:cNvSpPr/>
             <p:nvPr/>
           </p:nvSpPr>
@@ -49414,7 +49374,7 @@
         </p:sp>
         <p:sp>
           <p:nvSpPr>
-            <p:cNvPr id="782" name="pg782"/>
+            <p:cNvPr id="781" name="pg781"/>
             <p:cNvSpPr/>
             <p:nvPr/>
           </p:nvSpPr>
@@ -49460,7 +49420,7 @@
         </p:sp>
         <p:sp>
           <p:nvSpPr>
-            <p:cNvPr id="783" name="pg783"/>
+            <p:cNvPr id="782" name="pg782"/>
             <p:cNvSpPr/>
             <p:nvPr/>
           </p:nvSpPr>
@@ -49614,7 +49574,7 @@
         </p:sp>
         <p:sp>
           <p:nvSpPr>
-            <p:cNvPr id="784" name="pg784"/>
+            <p:cNvPr id="783" name="pg783"/>
             <p:cNvSpPr/>
             <p:nvPr/>
           </p:nvSpPr>
@@ -49660,7 +49620,7 @@
         </p:sp>
         <p:sp>
           <p:nvSpPr>
-            <p:cNvPr id="785" name="pg785"/>
+            <p:cNvPr id="784" name="pg784"/>
             <p:cNvSpPr/>
             <p:nvPr/>
           </p:nvSpPr>
@@ -49706,7 +49666,7 @@
         </p:sp>
         <p:sp>
           <p:nvSpPr>
-            <p:cNvPr id="786" name="pg786"/>
+            <p:cNvPr id="785" name="pg785"/>
             <p:cNvSpPr/>
             <p:nvPr/>
           </p:nvSpPr>
@@ -49752,7 +49712,7 @@
         </p:sp>
         <p:sp>
           <p:nvSpPr>
-            <p:cNvPr id="787" name="pg787"/>
+            <p:cNvPr id="786" name="pg786"/>
             <p:cNvSpPr/>
             <p:nvPr/>
           </p:nvSpPr>
@@ -49798,7 +49758,7 @@
         </p:sp>
         <p:sp>
           <p:nvSpPr>
-            <p:cNvPr id="788" name="pg788"/>
+            <p:cNvPr id="787" name="pg787"/>
             <p:cNvSpPr/>
             <p:nvPr/>
           </p:nvSpPr>
@@ -49886,7 +49846,7 @@
         </p:sp>
         <p:sp>
           <p:nvSpPr>
-            <p:cNvPr id="789" name="pg789"/>
+            <p:cNvPr id="788" name="pg788"/>
             <p:cNvSpPr/>
             <p:nvPr/>
           </p:nvSpPr>
@@ -50370,7 +50330,7 @@
         </p:sp>
         <p:sp>
           <p:nvSpPr>
-            <p:cNvPr id="790" name="pg790"/>
+            <p:cNvPr id="789" name="pg789"/>
             <p:cNvSpPr/>
             <p:nvPr/>
           </p:nvSpPr>
@@ -50416,7 +50376,7 @@
         </p:sp>
         <p:sp>
           <p:nvSpPr>
-            <p:cNvPr id="791" name="pg791"/>
+            <p:cNvPr id="790" name="pg790"/>
             <p:cNvSpPr/>
             <p:nvPr/>
           </p:nvSpPr>
@@ -50462,7 +50422,7 @@
         </p:sp>
         <p:sp>
           <p:nvSpPr>
-            <p:cNvPr id="792" name="pg792"/>
+            <p:cNvPr id="791" name="pg791"/>
             <p:cNvSpPr/>
             <p:nvPr/>
           </p:nvSpPr>
@@ -50508,7 +50468,7 @@
         </p:sp>
         <p:sp>
           <p:nvSpPr>
-            <p:cNvPr id="793" name="pg793"/>
+            <p:cNvPr id="792" name="pg792"/>
             <p:cNvSpPr/>
             <p:nvPr/>
           </p:nvSpPr>
@@ -50554,7 +50514,7 @@
         </p:sp>
         <p:sp>
           <p:nvSpPr>
-            <p:cNvPr id="794" name="pg794"/>
+            <p:cNvPr id="793" name="pg793"/>
             <p:cNvSpPr/>
             <p:nvPr/>
           </p:nvSpPr>
@@ -50600,7 +50560,7 @@
         </p:sp>
         <p:sp>
           <p:nvSpPr>
-            <p:cNvPr id="795" name="pg795"/>
+            <p:cNvPr id="794" name="pg794"/>
             <p:cNvSpPr/>
             <p:nvPr/>
           </p:nvSpPr>
@@ -50646,7 +50606,7 @@
         </p:sp>
         <p:sp>
           <p:nvSpPr>
-            <p:cNvPr id="796" name="pg796"/>
+            <p:cNvPr id="795" name="pg795"/>
             <p:cNvSpPr/>
             <p:nvPr/>
           </p:nvSpPr>
@@ -50692,7 +50652,7 @@
         </p:sp>
         <p:sp>
           <p:nvSpPr>
-            <p:cNvPr id="797" name="pg797"/>
+            <p:cNvPr id="796" name="pg796"/>
             <p:cNvSpPr/>
             <p:nvPr/>
           </p:nvSpPr>
@@ -50738,7 +50698,7 @@
         </p:sp>
         <p:sp>
           <p:nvSpPr>
-            <p:cNvPr id="798" name="pg798"/>
+            <p:cNvPr id="797" name="pg797"/>
             <p:cNvSpPr/>
             <p:nvPr/>
           </p:nvSpPr>
@@ -50784,7 +50744,7 @@
         </p:sp>
         <p:sp>
           <p:nvSpPr>
-            <p:cNvPr id="799" name="pg799"/>
+            <p:cNvPr id="798" name="pg798"/>
             <p:cNvSpPr/>
             <p:nvPr/>
           </p:nvSpPr>
@@ -50830,7 +50790,7 @@
         </p:sp>
         <p:sp>
           <p:nvSpPr>
-            <p:cNvPr id="800" name="pg800"/>
+            <p:cNvPr id="799" name="pg799"/>
             <p:cNvSpPr/>
             <p:nvPr/>
           </p:nvSpPr>
@@ -50876,7 +50836,7 @@
         </p:sp>
         <p:sp>
           <p:nvSpPr>
-            <p:cNvPr id="801" name="pg801"/>
+            <p:cNvPr id="800" name="pg800"/>
             <p:cNvSpPr/>
             <p:nvPr/>
           </p:nvSpPr>
@@ -50922,7 +50882,7 @@
         </p:sp>
         <p:sp>
           <p:nvSpPr>
-            <p:cNvPr id="802" name="pg802"/>
+            <p:cNvPr id="801" name="pg801"/>
             <p:cNvSpPr/>
             <p:nvPr/>
           </p:nvSpPr>
@@ -50968,7 +50928,7 @@
         </p:sp>
         <p:sp>
           <p:nvSpPr>
-            <p:cNvPr id="803" name="pg803"/>
+            <p:cNvPr id="802" name="pg802"/>
             <p:cNvSpPr/>
             <p:nvPr/>
           </p:nvSpPr>
@@ -51014,7 +50974,7 @@
         </p:sp>
         <p:sp>
           <p:nvSpPr>
-            <p:cNvPr id="804" name="pg804"/>
+            <p:cNvPr id="803" name="pg803"/>
             <p:cNvSpPr/>
             <p:nvPr/>
           </p:nvSpPr>
@@ -51060,7 +51020,7 @@
         </p:sp>
         <p:sp>
           <p:nvSpPr>
-            <p:cNvPr id="805" name="pg805"/>
+            <p:cNvPr id="804" name="pg804"/>
             <p:cNvSpPr/>
             <p:nvPr/>
           </p:nvSpPr>
@@ -51106,7 +51066,7 @@
         </p:sp>
         <p:sp>
           <p:nvSpPr>
-            <p:cNvPr id="806" name="pg806"/>
+            <p:cNvPr id="805" name="pg805"/>
             <p:cNvSpPr/>
             <p:nvPr/>
           </p:nvSpPr>
@@ -51152,7 +51112,7 @@
         </p:sp>
         <p:sp>
           <p:nvSpPr>
-            <p:cNvPr id="807" name="pg807"/>
+            <p:cNvPr id="806" name="pg806"/>
             <p:cNvSpPr/>
             <p:nvPr/>
           </p:nvSpPr>
@@ -51198,7 +51158,7 @@
         </p:sp>
         <p:sp>
           <p:nvSpPr>
-            <p:cNvPr id="808" name="pg808"/>
+            <p:cNvPr id="807" name="pg807"/>
             <p:cNvSpPr/>
             <p:nvPr/>
           </p:nvSpPr>
@@ -51244,7 +51204,7 @@
         </p:sp>
         <p:sp>
           <p:nvSpPr>
-            <p:cNvPr id="809" name="pg809"/>
+            <p:cNvPr id="808" name="pg808"/>
             <p:cNvSpPr/>
             <p:nvPr/>
           </p:nvSpPr>
@@ -51290,7 +51250,7 @@
         </p:sp>
         <p:sp>
           <p:nvSpPr>
-            <p:cNvPr id="810" name="pg810"/>
+            <p:cNvPr id="809" name="pg809"/>
             <p:cNvSpPr/>
             <p:nvPr/>
           </p:nvSpPr>
@@ -51336,7 +51296,7 @@
         </p:sp>
         <p:sp>
           <p:nvSpPr>
-            <p:cNvPr id="811" name="pg811"/>
+            <p:cNvPr id="810" name="pg810"/>
             <p:cNvSpPr/>
             <p:nvPr/>
           </p:nvSpPr>
@@ -51382,7 +51342,7 @@
         </p:sp>
         <p:sp>
           <p:nvSpPr>
-            <p:cNvPr id="812" name="pg812"/>
+            <p:cNvPr id="811" name="pg811"/>
             <p:cNvSpPr/>
             <p:nvPr/>
           </p:nvSpPr>
@@ -51503,7 +51463,7 @@
         </p:sp>
         <p:sp>
           <p:nvSpPr>
-            <p:cNvPr id="813" name="pg813"/>
+            <p:cNvPr id="812" name="pg812"/>
             <p:cNvSpPr/>
             <p:nvPr/>
           </p:nvSpPr>
@@ -51549,7 +51509,7 @@
         </p:sp>
         <p:sp>
           <p:nvSpPr>
-            <p:cNvPr id="814" name="pg814"/>
+            <p:cNvPr id="813" name="pg813"/>
             <p:cNvSpPr/>
             <p:nvPr/>
           </p:nvSpPr>
@@ -51595,7 +51555,7 @@
         </p:sp>
         <p:sp>
           <p:nvSpPr>
-            <p:cNvPr id="815" name="pg815"/>
+            <p:cNvPr id="814" name="pg814"/>
             <p:cNvSpPr/>
             <p:nvPr/>
           </p:nvSpPr>
@@ -51641,7 +51601,7 @@
         </p:sp>
         <p:sp>
           <p:nvSpPr>
-            <p:cNvPr id="816" name="pg816"/>
+            <p:cNvPr id="815" name="pg815"/>
             <p:cNvSpPr/>
             <p:nvPr/>
           </p:nvSpPr>
@@ -51699,7 +51659,7 @@
         </p:sp>
         <p:sp>
           <p:nvSpPr>
-            <p:cNvPr id="817" name="pg817"/>
+            <p:cNvPr id="816" name="pg816"/>
             <p:cNvSpPr/>
             <p:nvPr/>
           </p:nvSpPr>
@@ -52243,7 +52203,7 @@
         </p:sp>
         <p:sp>
           <p:nvSpPr>
-            <p:cNvPr id="818" name="pg818"/>
+            <p:cNvPr id="817" name="pg817"/>
             <p:cNvSpPr/>
             <p:nvPr/>
           </p:nvSpPr>
@@ -52289,7 +52249,7 @@
         </p:sp>
         <p:sp>
           <p:nvSpPr>
-            <p:cNvPr id="819" name="pg819"/>
+            <p:cNvPr id="818" name="pg818"/>
             <p:cNvSpPr/>
             <p:nvPr/>
           </p:nvSpPr>
@@ -52335,7 +52295,7 @@
         </p:sp>
         <p:sp>
           <p:nvSpPr>
-            <p:cNvPr id="820" name="pg820"/>
+            <p:cNvPr id="819" name="pg819"/>
             <p:cNvSpPr/>
             <p:nvPr/>
           </p:nvSpPr>
@@ -52381,7 +52341,7 @@
         </p:sp>
         <p:sp>
           <p:nvSpPr>
-            <p:cNvPr id="821" name="pg821"/>
+            <p:cNvPr id="820" name="pg820"/>
             <p:cNvSpPr/>
             <p:nvPr/>
           </p:nvSpPr>
@@ -52427,7 +52387,7 @@
         </p:sp>
         <p:sp>
           <p:nvSpPr>
-            <p:cNvPr id="822" name="pg822"/>
+            <p:cNvPr id="821" name="pg821"/>
             <p:cNvSpPr/>
             <p:nvPr/>
           </p:nvSpPr>
@@ -52473,7 +52433,7 @@
         </p:sp>
         <p:sp>
           <p:nvSpPr>
-            <p:cNvPr id="823" name="pg823"/>
+            <p:cNvPr id="822" name="pg822"/>
             <p:cNvSpPr/>
             <p:nvPr/>
           </p:nvSpPr>
@@ -52519,7 +52479,7 @@
         </p:sp>
         <p:sp>
           <p:nvSpPr>
-            <p:cNvPr id="824" name="pg824"/>
+            <p:cNvPr id="823" name="pg823"/>
             <p:cNvSpPr/>
             <p:nvPr/>
           </p:nvSpPr>
@@ -52565,7 +52525,7 @@
         </p:sp>
         <p:sp>
           <p:nvSpPr>
-            <p:cNvPr id="825" name="pg825"/>
+            <p:cNvPr id="824" name="pg824"/>
             <p:cNvSpPr/>
             <p:nvPr/>
           </p:nvSpPr>
@@ -52611,7 +52571,7 @@
         </p:sp>
         <p:sp>
           <p:nvSpPr>
-            <p:cNvPr id="826" name="pg826"/>
+            <p:cNvPr id="825" name="pg825"/>
             <p:cNvSpPr/>
             <p:nvPr/>
           </p:nvSpPr>
@@ -52657,7 +52617,7 @@
         </p:sp>
         <p:sp>
           <p:nvSpPr>
-            <p:cNvPr id="827" name="pg827"/>
+            <p:cNvPr id="826" name="pg826"/>
             <p:cNvSpPr/>
             <p:nvPr/>
           </p:nvSpPr>
@@ -52703,7 +52663,7 @@
         </p:sp>
         <p:sp>
           <p:nvSpPr>
-            <p:cNvPr id="828" name="pg828"/>
+            <p:cNvPr id="827" name="pg827"/>
             <p:cNvSpPr/>
             <p:nvPr/>
           </p:nvSpPr>
@@ -52749,7 +52709,7 @@
         </p:sp>
         <p:sp>
           <p:nvSpPr>
-            <p:cNvPr id="829" name="pg829"/>
+            <p:cNvPr id="828" name="pg828"/>
             <p:cNvSpPr/>
             <p:nvPr/>
           </p:nvSpPr>
@@ -52795,7 +52755,7 @@
         </p:sp>
         <p:sp>
           <p:nvSpPr>
-            <p:cNvPr id="830" name="pg830"/>
+            <p:cNvPr id="829" name="pg829"/>
             <p:cNvSpPr/>
             <p:nvPr/>
           </p:nvSpPr>
@@ -52841,7 +52801,7 @@
         </p:sp>
         <p:sp>
           <p:nvSpPr>
-            <p:cNvPr id="831" name="pg831"/>
+            <p:cNvPr id="830" name="pg830"/>
             <p:cNvSpPr/>
             <p:nvPr/>
           </p:nvSpPr>
@@ -52887,7 +52847,7 @@
         </p:sp>
         <p:sp>
           <p:nvSpPr>
-            <p:cNvPr id="832" name="pg832"/>
+            <p:cNvPr id="831" name="pg831"/>
             <p:cNvSpPr/>
             <p:nvPr/>
           </p:nvSpPr>
@@ -52933,7 +52893,7 @@
         </p:sp>
         <p:sp>
           <p:nvSpPr>
-            <p:cNvPr id="833" name="pg833"/>
+            <p:cNvPr id="832" name="pg832"/>
             <p:cNvSpPr/>
             <p:nvPr/>
           </p:nvSpPr>
@@ -52979,7 +52939,7 @@
         </p:sp>
         <p:sp>
           <p:nvSpPr>
-            <p:cNvPr id="834" name="pg834"/>
+            <p:cNvPr id="833" name="pg833"/>
             <p:cNvSpPr/>
             <p:nvPr/>
           </p:nvSpPr>
@@ -53025,7 +52985,7 @@
         </p:sp>
         <p:sp>
           <p:nvSpPr>
-            <p:cNvPr id="835" name="pg835"/>
+            <p:cNvPr id="834" name="pg834"/>
             <p:cNvSpPr/>
             <p:nvPr/>
           </p:nvSpPr>
@@ -53071,7 +53031,7 @@
         </p:sp>
         <p:sp>
           <p:nvSpPr>
-            <p:cNvPr id="836" name="pg836"/>
+            <p:cNvPr id="835" name="pg835"/>
             <p:cNvSpPr/>
             <p:nvPr/>
           </p:nvSpPr>
@@ -53117,7 +53077,7 @@
         </p:sp>
         <p:sp>
           <p:nvSpPr>
-            <p:cNvPr id="837" name="pg837"/>
+            <p:cNvPr id="836" name="pg836"/>
             <p:cNvSpPr/>
             <p:nvPr/>
           </p:nvSpPr>
@@ -53163,7 +53123,7 @@
         </p:sp>
         <p:sp>
           <p:nvSpPr>
-            <p:cNvPr id="838" name="pg838"/>
+            <p:cNvPr id="837" name="pg837"/>
             <p:cNvSpPr/>
             <p:nvPr/>
           </p:nvSpPr>
@@ -53209,7 +53169,7 @@
         </p:sp>
         <p:sp>
           <p:nvSpPr>
-            <p:cNvPr id="839" name="pg839"/>
+            <p:cNvPr id="838" name="pg838"/>
             <p:cNvSpPr/>
             <p:nvPr/>
           </p:nvSpPr>
@@ -53255,7 +53215,7 @@
         </p:sp>
         <p:sp>
           <p:nvSpPr>
-            <p:cNvPr id="840" name="pg840"/>
+            <p:cNvPr id="839" name="pg839"/>
             <p:cNvSpPr/>
             <p:nvPr/>
           </p:nvSpPr>
@@ -53301,7 +53261,7 @@
         </p:sp>
         <p:sp>
           <p:nvSpPr>
-            <p:cNvPr id="841" name="pg841"/>
+            <p:cNvPr id="840" name="pg840"/>
             <p:cNvSpPr/>
             <p:nvPr/>
           </p:nvSpPr>
@@ -53758,7 +53718,7 @@
         </p:sp>
         <p:sp>
           <p:nvSpPr>
-            <p:cNvPr id="842" name="pg842"/>
+            <p:cNvPr id="841" name="pg841"/>
             <p:cNvSpPr/>
             <p:nvPr/>
           </p:nvSpPr>
@@ -53804,7 +53764,7 @@
         </p:sp>
         <p:sp>
           <p:nvSpPr>
-            <p:cNvPr id="843" name="pg843"/>
+            <p:cNvPr id="842" name="pg842"/>
             <p:cNvSpPr/>
             <p:nvPr/>
           </p:nvSpPr>
@@ -53850,7 +53810,7 @@
         </p:sp>
         <p:sp>
           <p:nvSpPr>
-            <p:cNvPr id="844" name="pg844"/>
+            <p:cNvPr id="843" name="pg843"/>
             <p:cNvSpPr/>
             <p:nvPr/>
           </p:nvSpPr>
@@ -53971,7 +53931,7 @@
         </p:sp>
         <p:sp>
           <p:nvSpPr>
-            <p:cNvPr id="845" name="pg845"/>
+            <p:cNvPr id="844" name="pg844"/>
             <p:cNvSpPr/>
             <p:nvPr/>
           </p:nvSpPr>
@@ -54116,7 +54076,7 @@
         </p:sp>
         <p:sp>
           <p:nvSpPr>
-            <p:cNvPr id="846" name="pg846"/>
+            <p:cNvPr id="845" name="pg845"/>
             <p:cNvSpPr/>
             <p:nvPr/>
           </p:nvSpPr>
@@ -54162,7 +54122,7 @@
         </p:sp>
         <p:sp>
           <p:nvSpPr>
-            <p:cNvPr id="847" name="pg847"/>
+            <p:cNvPr id="846" name="pg846"/>
             <p:cNvSpPr/>
             <p:nvPr/>
           </p:nvSpPr>
@@ -54208,7 +54168,7 @@
         </p:sp>
         <p:sp>
           <p:nvSpPr>
-            <p:cNvPr id="848" name="pg848"/>
+            <p:cNvPr id="847" name="pg847"/>
             <p:cNvSpPr/>
             <p:nvPr/>
           </p:nvSpPr>
@@ -54254,7 +54214,7 @@
         </p:sp>
         <p:sp>
           <p:nvSpPr>
-            <p:cNvPr id="849" name="pg849"/>
+            <p:cNvPr id="848" name="pg848"/>
             <p:cNvSpPr/>
             <p:nvPr/>
           </p:nvSpPr>
@@ -54300,7 +54260,7 @@
         </p:sp>
         <p:sp>
           <p:nvSpPr>
-            <p:cNvPr id="850" name="pg850"/>
+            <p:cNvPr id="849" name="pg849"/>
             <p:cNvSpPr/>
             <p:nvPr/>
           </p:nvSpPr>
@@ -54346,7 +54306,7 @@
         </p:sp>
         <p:sp>
           <p:nvSpPr>
-            <p:cNvPr id="851" name="pg851"/>
+            <p:cNvPr id="850" name="pg850"/>
             <p:cNvSpPr/>
             <p:nvPr/>
           </p:nvSpPr>
@@ -54392,7 +54352,7 @@
         </p:sp>
         <p:sp>
           <p:nvSpPr>
-            <p:cNvPr id="852" name="pg852"/>
+            <p:cNvPr id="851" name="pg851"/>
             <p:cNvSpPr/>
             <p:nvPr/>
           </p:nvSpPr>
@@ -54438,7 +54398,7 @@
         </p:sp>
         <p:sp>
           <p:nvSpPr>
-            <p:cNvPr id="853" name="pg853"/>
+            <p:cNvPr id="852" name="pg852"/>
             <p:cNvSpPr/>
             <p:nvPr/>
           </p:nvSpPr>
@@ -54484,7 +54444,7 @@
         </p:sp>
         <p:sp>
           <p:nvSpPr>
-            <p:cNvPr id="854" name="pg854"/>
+            <p:cNvPr id="853" name="pg853"/>
             <p:cNvSpPr/>
             <p:nvPr/>
           </p:nvSpPr>
@@ -54530,7 +54490,7 @@
         </p:sp>
         <p:sp>
           <p:nvSpPr>
-            <p:cNvPr id="855" name="pg855"/>
+            <p:cNvPr id="854" name="pg854"/>
             <p:cNvSpPr/>
             <p:nvPr/>
           </p:nvSpPr>
@@ -54576,7 +54536,7 @@
         </p:sp>
         <p:sp>
           <p:nvSpPr>
-            <p:cNvPr id="856" name="pg856"/>
+            <p:cNvPr id="855" name="pg855"/>
             <p:cNvSpPr/>
             <p:nvPr/>
           </p:nvSpPr>
@@ -54622,7 +54582,7 @@
         </p:sp>
         <p:sp>
           <p:nvSpPr>
-            <p:cNvPr id="857" name="pg857"/>
+            <p:cNvPr id="856" name="pg856"/>
             <p:cNvSpPr/>
             <p:nvPr/>
           </p:nvSpPr>
@@ -54668,7 +54628,7 @@
         </p:sp>
         <p:sp>
           <p:nvSpPr>
-            <p:cNvPr id="858" name="pg858"/>
+            <p:cNvPr id="857" name="pg857"/>
             <p:cNvSpPr/>
             <p:nvPr/>
           </p:nvSpPr>
@@ -54714,7 +54674,7 @@
         </p:sp>
         <p:sp>
           <p:nvSpPr>
-            <p:cNvPr id="859" name="pg859"/>
+            <p:cNvPr id="858" name="pg858"/>
             <p:cNvSpPr/>
             <p:nvPr/>
           </p:nvSpPr>
@@ -54760,7 +54720,7 @@
         </p:sp>
         <p:sp>
           <p:nvSpPr>
-            <p:cNvPr id="860" name="pg860"/>
+            <p:cNvPr id="859" name="pg859"/>
             <p:cNvSpPr/>
             <p:nvPr/>
           </p:nvSpPr>
@@ -54806,7 +54766,7 @@
         </p:sp>
         <p:sp>
           <p:nvSpPr>
-            <p:cNvPr id="861" name="pg861"/>
+            <p:cNvPr id="860" name="pg860"/>
             <p:cNvSpPr/>
             <p:nvPr/>
           </p:nvSpPr>
@@ -54852,7 +54812,7 @@
         </p:sp>
         <p:sp>
           <p:nvSpPr>
-            <p:cNvPr id="862" name="pg862"/>
+            <p:cNvPr id="861" name="pg861"/>
             <p:cNvSpPr/>
             <p:nvPr/>
           </p:nvSpPr>
@@ -54898,7 +54858,7 @@
         </p:sp>
         <p:sp>
           <p:nvSpPr>
-            <p:cNvPr id="863" name="pg863"/>
+            <p:cNvPr id="862" name="pg862"/>
             <p:cNvSpPr/>
             <p:nvPr/>
           </p:nvSpPr>
@@ -54944,7 +54904,7 @@
         </p:sp>
         <p:sp>
           <p:nvSpPr>
-            <p:cNvPr id="864" name="pg864"/>
+            <p:cNvPr id="863" name="pg863"/>
             <p:cNvSpPr/>
             <p:nvPr/>
           </p:nvSpPr>
@@ -54990,7 +54950,7 @@
         </p:sp>
         <p:sp>
           <p:nvSpPr>
-            <p:cNvPr id="865" name="pg865"/>
+            <p:cNvPr id="864" name="pg864"/>
             <p:cNvSpPr/>
             <p:nvPr/>
           </p:nvSpPr>
@@ -55036,7 +54996,7 @@
         </p:sp>
         <p:sp>
           <p:nvSpPr>
-            <p:cNvPr id="866" name="pg866"/>
+            <p:cNvPr id="865" name="pg865"/>
             <p:cNvSpPr/>
             <p:nvPr/>
           </p:nvSpPr>
@@ -55082,7 +55042,7 @@
         </p:sp>
         <p:sp>
           <p:nvSpPr>
-            <p:cNvPr id="867" name="pg867"/>
+            <p:cNvPr id="866" name="pg866"/>
             <p:cNvSpPr/>
             <p:nvPr/>
           </p:nvSpPr>
@@ -55128,7 +55088,7 @@
         </p:sp>
         <p:sp>
           <p:nvSpPr>
-            <p:cNvPr id="868" name="pg868"/>
+            <p:cNvPr id="867" name="pg867"/>
             <p:cNvSpPr/>
             <p:nvPr/>
           </p:nvSpPr>
@@ -55174,7 +55134,7 @@
         </p:sp>
         <p:sp>
           <p:nvSpPr>
-            <p:cNvPr id="869" name="pg869"/>
+            <p:cNvPr id="868" name="pg868"/>
             <p:cNvSpPr/>
             <p:nvPr/>
           </p:nvSpPr>
@@ -55220,7 +55180,7 @@
         </p:sp>
         <p:sp>
           <p:nvSpPr>
-            <p:cNvPr id="870" name="pg870"/>
+            <p:cNvPr id="869" name="pg869"/>
             <p:cNvSpPr/>
             <p:nvPr/>
           </p:nvSpPr>
@@ -55482,7 +55442,7 @@
         </p:sp>
         <p:sp>
           <p:nvSpPr>
-            <p:cNvPr id="871" name="pg871"/>
+            <p:cNvPr id="870" name="pg870"/>
             <p:cNvSpPr/>
             <p:nvPr/>
           </p:nvSpPr>
@@ -55528,7 +55488,7 @@
         </p:sp>
         <p:sp>
           <p:nvSpPr>
-            <p:cNvPr id="872" name="pg872"/>
+            <p:cNvPr id="871" name="pg871"/>
             <p:cNvSpPr/>
             <p:nvPr/>
           </p:nvSpPr>
@@ -55610,7 +55570,7 @@
         </p:sp>
         <p:sp>
           <p:nvSpPr>
-            <p:cNvPr id="873" name="pg873"/>
+            <p:cNvPr id="872" name="pg872"/>
             <p:cNvSpPr/>
             <p:nvPr/>
           </p:nvSpPr>
@@ -55989,7 +55949,7 @@
         </p:sp>
         <p:sp>
           <p:nvSpPr>
-            <p:cNvPr id="874" name="pg874"/>
+            <p:cNvPr id="873" name="pg873"/>
             <p:cNvSpPr/>
             <p:nvPr/>
           </p:nvSpPr>
@@ -56035,7 +55995,7 @@
         </p:sp>
         <p:sp>
           <p:nvSpPr>
-            <p:cNvPr id="875" name="pg875"/>
+            <p:cNvPr id="874" name="pg874"/>
             <p:cNvSpPr/>
             <p:nvPr/>
           </p:nvSpPr>
@@ -56081,7 +56041,7 @@
         </p:sp>
         <p:sp>
           <p:nvSpPr>
-            <p:cNvPr id="876" name="pg876"/>
+            <p:cNvPr id="875" name="pg875"/>
             <p:cNvSpPr/>
             <p:nvPr/>
           </p:nvSpPr>
@@ -56127,7 +56087,7 @@
         </p:sp>
         <p:sp>
           <p:nvSpPr>
-            <p:cNvPr id="877" name="pg877"/>
+            <p:cNvPr id="876" name="pg876"/>
             <p:cNvSpPr/>
             <p:nvPr/>
           </p:nvSpPr>
@@ -56173,7 +56133,7 @@
         </p:sp>
         <p:sp>
           <p:nvSpPr>
-            <p:cNvPr id="878" name="pg878"/>
+            <p:cNvPr id="877" name="pg877"/>
             <p:cNvSpPr/>
             <p:nvPr/>
           </p:nvSpPr>
@@ -56219,7 +56179,7 @@
         </p:sp>
         <p:sp>
           <p:nvSpPr>
-            <p:cNvPr id="879" name="pg879"/>
+            <p:cNvPr id="878" name="pg878"/>
             <p:cNvSpPr/>
             <p:nvPr/>
           </p:nvSpPr>
@@ -56265,7 +56225,7 @@
         </p:sp>
         <p:sp>
           <p:nvSpPr>
-            <p:cNvPr id="880" name="pg880"/>
+            <p:cNvPr id="879" name="pg879"/>
             <p:cNvSpPr/>
             <p:nvPr/>
           </p:nvSpPr>
@@ -56311,7 +56271,7 @@
         </p:sp>
         <p:sp>
           <p:nvSpPr>
-            <p:cNvPr id="881" name="pg881"/>
+            <p:cNvPr id="880" name="pg880"/>
             <p:cNvSpPr/>
             <p:nvPr/>
           </p:nvSpPr>
@@ -56357,7 +56317,7 @@
         </p:sp>
         <p:sp>
           <p:nvSpPr>
-            <p:cNvPr id="882" name="pg882"/>
+            <p:cNvPr id="881" name="pg881"/>
             <p:cNvSpPr/>
             <p:nvPr/>
           </p:nvSpPr>
@@ -56403,7 +56363,7 @@
         </p:sp>
         <p:sp>
           <p:nvSpPr>
-            <p:cNvPr id="883" name="pg883"/>
+            <p:cNvPr id="882" name="pg882"/>
             <p:cNvSpPr/>
             <p:nvPr/>
           </p:nvSpPr>
@@ -56449,7 +56409,7 @@
         </p:sp>
         <p:sp>
           <p:nvSpPr>
-            <p:cNvPr id="884" name="pg884"/>
+            <p:cNvPr id="883" name="pg883"/>
             <p:cNvSpPr/>
             <p:nvPr/>
           </p:nvSpPr>
@@ -56495,7 +56455,7 @@
         </p:sp>
         <p:sp>
           <p:nvSpPr>
-            <p:cNvPr id="885" name="pg885"/>
+            <p:cNvPr id="884" name="pg884"/>
             <p:cNvSpPr/>
             <p:nvPr/>
           </p:nvSpPr>
@@ -56541,7 +56501,7 @@
         </p:sp>
         <p:sp>
           <p:nvSpPr>
-            <p:cNvPr id="886" name="pg886"/>
+            <p:cNvPr id="885" name="pg885"/>
             <p:cNvSpPr/>
             <p:nvPr/>
           </p:nvSpPr>
@@ -56587,7 +56547,7 @@
         </p:sp>
         <p:sp>
           <p:nvSpPr>
-            <p:cNvPr id="887" name="pg887"/>
+            <p:cNvPr id="886" name="pg886"/>
             <p:cNvSpPr/>
             <p:nvPr/>
           </p:nvSpPr>
@@ -56633,7 +56593,7 @@
         </p:sp>
         <p:sp>
           <p:nvSpPr>
-            <p:cNvPr id="888" name="pg888"/>
+            <p:cNvPr id="887" name="pg887"/>
             <p:cNvSpPr/>
             <p:nvPr/>
           </p:nvSpPr>
@@ -56679,7 +56639,7 @@
         </p:sp>
         <p:sp>
           <p:nvSpPr>
-            <p:cNvPr id="889" name="pg889"/>
+            <p:cNvPr id="888" name="pg888"/>
             <p:cNvSpPr/>
             <p:nvPr/>
           </p:nvSpPr>
@@ -56725,7 +56685,7 @@
         </p:sp>
         <p:sp>
           <p:nvSpPr>
-            <p:cNvPr id="890" name="pg890"/>
+            <p:cNvPr id="889" name="pg889"/>
             <p:cNvSpPr/>
             <p:nvPr/>
           </p:nvSpPr>
@@ -56771,7 +56731,7 @@
         </p:sp>
         <p:sp>
           <p:nvSpPr>
-            <p:cNvPr id="891" name="pg891"/>
+            <p:cNvPr id="890" name="pg890"/>
             <p:cNvSpPr/>
             <p:nvPr/>
           </p:nvSpPr>
@@ -56817,7 +56777,7 @@
         </p:sp>
         <p:sp>
           <p:nvSpPr>
-            <p:cNvPr id="892" name="pg892"/>
+            <p:cNvPr id="891" name="pg891"/>
             <p:cNvSpPr/>
             <p:nvPr/>
           </p:nvSpPr>
@@ -56863,7 +56823,7 @@
         </p:sp>
         <p:sp>
           <p:nvSpPr>
-            <p:cNvPr id="893" name="pg893"/>
+            <p:cNvPr id="892" name="pg892"/>
             <p:cNvSpPr/>
             <p:nvPr/>
           </p:nvSpPr>
@@ -56909,7 +56869,7 @@
         </p:sp>
         <p:sp>
           <p:nvSpPr>
-            <p:cNvPr id="894" name="pg894"/>
+            <p:cNvPr id="893" name="pg893"/>
             <p:cNvSpPr/>
             <p:nvPr/>
           </p:nvSpPr>
@@ -56955,7 +56915,7 @@
         </p:sp>
         <p:sp>
           <p:nvSpPr>
-            <p:cNvPr id="895" name="pg895"/>
+            <p:cNvPr id="894" name="pg894"/>
             <p:cNvSpPr/>
             <p:nvPr/>
           </p:nvSpPr>
@@ -57001,7 +56961,7 @@
         </p:sp>
         <p:sp>
           <p:nvSpPr>
-            <p:cNvPr id="896" name="pg896"/>
+            <p:cNvPr id="895" name="pg895"/>
             <p:cNvSpPr/>
             <p:nvPr/>
           </p:nvSpPr>
@@ -57047,7 +57007,7 @@
         </p:sp>
         <p:sp>
           <p:nvSpPr>
-            <p:cNvPr id="897" name="pg897"/>
+            <p:cNvPr id="896" name="pg896"/>
             <p:cNvSpPr/>
             <p:nvPr/>
           </p:nvSpPr>
@@ -57093,7 +57053,7 @@
         </p:sp>
         <p:sp>
           <p:nvSpPr>
-            <p:cNvPr id="898" name="pg898"/>
+            <p:cNvPr id="897" name="pg897"/>
             <p:cNvSpPr/>
             <p:nvPr/>
           </p:nvSpPr>
@@ -57139,7 +57099,7 @@
         </p:sp>
         <p:sp>
           <p:nvSpPr>
-            <p:cNvPr id="899" name="pg899"/>
+            <p:cNvPr id="898" name="pg898"/>
             <p:cNvSpPr/>
             <p:nvPr/>
           </p:nvSpPr>
@@ -57491,7 +57451,7 @@
         </p:sp>
         <p:sp>
           <p:nvSpPr>
-            <p:cNvPr id="900" name="pg900"/>
+            <p:cNvPr id="899" name="pg899"/>
             <p:cNvSpPr/>
             <p:nvPr/>
           </p:nvSpPr>
@@ -57819,7 +57779,7 @@
         </p:sp>
         <p:sp>
           <p:nvSpPr>
-            <p:cNvPr id="901" name="pg901"/>
+            <p:cNvPr id="900" name="pg900"/>
             <p:cNvSpPr/>
             <p:nvPr/>
           </p:nvSpPr>
@@ -57868,7 +57828,7 @@
         </p:sp>
         <p:sp>
           <p:nvSpPr>
-            <p:cNvPr id="902" name="tx902"/>
+            <p:cNvPr id="901" name="tx901"/>
             <p:cNvSpPr/>
             <p:nvPr/>
           </p:nvSpPr>
@@ -57914,7 +57874,7 @@
         </p:sp>
         <p:sp>
           <p:nvSpPr>
-            <p:cNvPr id="903" name="tx903"/>
+            <p:cNvPr id="902" name="tx902"/>
             <p:cNvSpPr/>
             <p:nvPr/>
           </p:nvSpPr>
@@ -57960,7 +57920,7 @@
         </p:sp>
         <p:sp>
           <p:nvSpPr>
-            <p:cNvPr id="904" name="tx904"/>
+            <p:cNvPr id="903" name="tx903"/>
             <p:cNvSpPr/>
             <p:nvPr/>
           </p:nvSpPr>
@@ -58006,7 +57966,7 @@
         </p:sp>
         <p:sp>
           <p:nvSpPr>
-            <p:cNvPr id="905" name="tx905"/>
+            <p:cNvPr id="904" name="tx904"/>
             <p:cNvSpPr/>
             <p:nvPr/>
           </p:nvSpPr>
@@ -58052,7 +58012,7 @@
         </p:sp>
         <p:sp>
           <p:nvSpPr>
-            <p:cNvPr id="906" name="tx906"/>
+            <p:cNvPr id="905" name="tx905"/>
             <p:cNvSpPr/>
             <p:nvPr/>
           </p:nvSpPr>
@@ -58098,7 +58058,7 @@
         </p:sp>
         <p:sp>
           <p:nvSpPr>
-            <p:cNvPr id="907" name="tx907"/>
+            <p:cNvPr id="906" name="tx906"/>
             <p:cNvSpPr/>
             <p:nvPr/>
           </p:nvSpPr>
@@ -58144,7 +58104,7 @@
         </p:sp>
         <p:sp>
           <p:nvSpPr>
-            <p:cNvPr id="908" name="tx908"/>
+            <p:cNvPr id="907" name="tx907"/>
             <p:cNvSpPr/>
             <p:nvPr/>
           </p:nvSpPr>
@@ -58190,7 +58150,7 @@
         </p:sp>
         <p:sp>
           <p:nvSpPr>
-            <p:cNvPr id="909" name="tx909"/>
+            <p:cNvPr id="908" name="tx908"/>
             <p:cNvSpPr/>
             <p:nvPr/>
           </p:nvSpPr>
@@ -58236,7 +58196,7 @@
         </p:sp>
         <p:sp>
           <p:nvSpPr>
-            <p:cNvPr id="910" name="tx910"/>
+            <p:cNvPr id="909" name="tx909"/>
             <p:cNvSpPr/>
             <p:nvPr/>
           </p:nvSpPr>
@@ -58282,7 +58242,7 @@
         </p:sp>
         <p:sp>
           <p:nvSpPr>
-            <p:cNvPr id="911" name="tx911"/>
+            <p:cNvPr id="910" name="tx910"/>
             <p:cNvSpPr/>
             <p:nvPr/>
           </p:nvSpPr>
@@ -58328,7 +58288,7 @@
         </p:sp>
         <p:sp>
           <p:nvSpPr>
-            <p:cNvPr id="912" name="tx912"/>
+            <p:cNvPr id="911" name="tx911"/>
             <p:cNvSpPr/>
             <p:nvPr/>
           </p:nvSpPr>
@@ -58374,7 +58334,7 @@
         </p:sp>
         <p:sp>
           <p:nvSpPr>
-            <p:cNvPr id="913" name="tx913"/>
+            <p:cNvPr id="912" name="tx912"/>
             <p:cNvSpPr/>
             <p:nvPr/>
           </p:nvSpPr>
@@ -58420,7 +58380,7 @@
         </p:sp>
         <p:sp>
           <p:nvSpPr>
-            <p:cNvPr id="914" name="tx914"/>
+            <p:cNvPr id="913" name="tx913"/>
             <p:cNvSpPr/>
             <p:nvPr/>
           </p:nvSpPr>
@@ -58466,7 +58426,7 @@
         </p:sp>
         <p:sp>
           <p:nvSpPr>
-            <p:cNvPr id="915" name="tx915"/>
+            <p:cNvPr id="914" name="tx914"/>
             <p:cNvSpPr/>
             <p:nvPr/>
           </p:nvSpPr>
@@ -58512,7 +58472,7 @@
         </p:sp>
         <p:sp>
           <p:nvSpPr>
-            <p:cNvPr id="916" name="tx916"/>
+            <p:cNvPr id="915" name="tx915"/>
             <p:cNvSpPr/>
             <p:nvPr/>
           </p:nvSpPr>
@@ -58558,7 +58518,7 @@
         </p:sp>
         <p:sp>
           <p:nvSpPr>
-            <p:cNvPr id="917" name="tx917"/>
+            <p:cNvPr id="916" name="tx916"/>
             <p:cNvSpPr/>
             <p:nvPr/>
           </p:nvSpPr>
@@ -58604,7 +58564,7 @@
         </p:sp>
         <p:sp>
           <p:nvSpPr>
-            <p:cNvPr id="918" name="tx918"/>
+            <p:cNvPr id="917" name="tx917"/>
             <p:cNvSpPr/>
             <p:nvPr/>
           </p:nvSpPr>
@@ -58650,7 +58610,7 @@
         </p:sp>
         <p:sp>
           <p:nvSpPr>
-            <p:cNvPr id="919" name="tx919"/>
+            <p:cNvPr id="918" name="tx918"/>
             <p:cNvSpPr/>
             <p:nvPr/>
           </p:nvSpPr>
@@ -58696,7 +58656,7 @@
         </p:sp>
         <p:sp>
           <p:nvSpPr>
-            <p:cNvPr id="920" name="tx920"/>
+            <p:cNvPr id="919" name="tx919"/>
             <p:cNvSpPr/>
             <p:nvPr/>
           </p:nvSpPr>
@@ -58742,7 +58702,7 @@
         </p:sp>
         <p:sp>
           <p:nvSpPr>
-            <p:cNvPr id="921" name="tx921"/>
+            <p:cNvPr id="920" name="tx920"/>
             <p:cNvSpPr/>
             <p:nvPr/>
           </p:nvSpPr>
@@ -58788,7 +58748,7 @@
         </p:sp>
         <p:sp>
           <p:nvSpPr>
-            <p:cNvPr id="922" name="tx922"/>
+            <p:cNvPr id="921" name="tx921"/>
             <p:cNvSpPr/>
             <p:nvPr/>
           </p:nvSpPr>
@@ -58834,7 +58794,7 @@
         </p:sp>
         <p:sp>
           <p:nvSpPr>
-            <p:cNvPr id="923" name="tx923"/>
+            <p:cNvPr id="922" name="tx922"/>
             <p:cNvSpPr/>
             <p:nvPr/>
           </p:nvSpPr>
@@ -58880,7 +58840,7 @@
         </p:sp>
         <p:sp>
           <p:nvSpPr>
-            <p:cNvPr id="924" name="tx924"/>
+            <p:cNvPr id="923" name="tx923"/>
             <p:cNvSpPr/>
             <p:nvPr/>
           </p:nvSpPr>
@@ -58926,7 +58886,7 @@
         </p:sp>
         <p:sp>
           <p:nvSpPr>
-            <p:cNvPr id="925" name="tx925"/>
+            <p:cNvPr id="924" name="tx924"/>
             <p:cNvSpPr/>
             <p:nvPr/>
           </p:nvSpPr>
@@ -58972,7 +58932,7 @@
         </p:sp>
         <p:sp>
           <p:nvSpPr>
-            <p:cNvPr id="926" name="tx926"/>
+            <p:cNvPr id="925" name="tx925"/>
             <p:cNvSpPr/>
             <p:nvPr/>
           </p:nvSpPr>
@@ -59018,7 +58978,7 @@
         </p:sp>
         <p:sp>
           <p:nvSpPr>
-            <p:cNvPr id="927" name="tx927"/>
+            <p:cNvPr id="926" name="tx926"/>
             <p:cNvSpPr/>
             <p:nvPr/>
           </p:nvSpPr>
